--- a/Python/Python.pptx
+++ b/Python/Python.pptx
@@ -5,50 +5,49 @@
     <p:sldMasterId id="2147483648" r:id="rId1"/>
   </p:sldMasterIdLst>
   <p:notesMasterIdLst>
-    <p:notesMasterId r:id="rId43"/>
+    <p:notesMasterId r:id="rId42"/>
   </p:notesMasterIdLst>
   <p:sldIdLst>
     <p:sldId id="256" r:id="rId2"/>
     <p:sldId id="258" r:id="rId3"/>
-    <p:sldId id="300" r:id="rId4"/>
-    <p:sldId id="310" r:id="rId5"/>
-    <p:sldId id="301" r:id="rId6"/>
-    <p:sldId id="304" r:id="rId7"/>
-    <p:sldId id="303" r:id="rId8"/>
-    <p:sldId id="302" r:id="rId9"/>
-    <p:sldId id="305" r:id="rId10"/>
-    <p:sldId id="307" r:id="rId11"/>
-    <p:sldId id="308" r:id="rId12"/>
-    <p:sldId id="309" r:id="rId13"/>
-    <p:sldId id="259" r:id="rId14"/>
-    <p:sldId id="262" r:id="rId15"/>
-    <p:sldId id="260" r:id="rId16"/>
-    <p:sldId id="261" r:id="rId17"/>
-    <p:sldId id="263" r:id="rId18"/>
-    <p:sldId id="320" r:id="rId19"/>
-    <p:sldId id="322" r:id="rId20"/>
-    <p:sldId id="328" r:id="rId21"/>
-    <p:sldId id="323" r:id="rId22"/>
-    <p:sldId id="326" r:id="rId23"/>
-    <p:sldId id="327" r:id="rId24"/>
-    <p:sldId id="324" r:id="rId25"/>
-    <p:sldId id="325" r:id="rId26"/>
-    <p:sldId id="311" r:id="rId27"/>
-    <p:sldId id="312" r:id="rId28"/>
-    <p:sldId id="313" r:id="rId29"/>
-    <p:sldId id="314" r:id="rId30"/>
-    <p:sldId id="315" r:id="rId31"/>
-    <p:sldId id="316" r:id="rId32"/>
-    <p:sldId id="264" r:id="rId33"/>
-    <p:sldId id="265" r:id="rId34"/>
-    <p:sldId id="266" r:id="rId35"/>
-    <p:sldId id="321" r:id="rId36"/>
-    <p:sldId id="318" r:id="rId37"/>
-    <p:sldId id="317" r:id="rId38"/>
-    <p:sldId id="297" r:id="rId39"/>
-    <p:sldId id="299" r:id="rId40"/>
-    <p:sldId id="319" r:id="rId41"/>
-    <p:sldId id="257" r:id="rId42"/>
+    <p:sldId id="310" r:id="rId4"/>
+    <p:sldId id="301" r:id="rId5"/>
+    <p:sldId id="304" r:id="rId6"/>
+    <p:sldId id="303" r:id="rId7"/>
+    <p:sldId id="302" r:id="rId8"/>
+    <p:sldId id="305" r:id="rId9"/>
+    <p:sldId id="307" r:id="rId10"/>
+    <p:sldId id="308" r:id="rId11"/>
+    <p:sldId id="309" r:id="rId12"/>
+    <p:sldId id="259" r:id="rId13"/>
+    <p:sldId id="262" r:id="rId14"/>
+    <p:sldId id="260" r:id="rId15"/>
+    <p:sldId id="261" r:id="rId16"/>
+    <p:sldId id="263" r:id="rId17"/>
+    <p:sldId id="320" r:id="rId18"/>
+    <p:sldId id="322" r:id="rId19"/>
+    <p:sldId id="328" r:id="rId20"/>
+    <p:sldId id="323" r:id="rId21"/>
+    <p:sldId id="326" r:id="rId22"/>
+    <p:sldId id="327" r:id="rId23"/>
+    <p:sldId id="324" r:id="rId24"/>
+    <p:sldId id="325" r:id="rId25"/>
+    <p:sldId id="311" r:id="rId26"/>
+    <p:sldId id="312" r:id="rId27"/>
+    <p:sldId id="313" r:id="rId28"/>
+    <p:sldId id="314" r:id="rId29"/>
+    <p:sldId id="315" r:id="rId30"/>
+    <p:sldId id="316" r:id="rId31"/>
+    <p:sldId id="264" r:id="rId32"/>
+    <p:sldId id="265" r:id="rId33"/>
+    <p:sldId id="266" r:id="rId34"/>
+    <p:sldId id="321" r:id="rId35"/>
+    <p:sldId id="318" r:id="rId36"/>
+    <p:sldId id="317" r:id="rId37"/>
+    <p:sldId id="297" r:id="rId38"/>
+    <p:sldId id="299" r:id="rId39"/>
+    <p:sldId id="319" r:id="rId40"/>
+    <p:sldId id="257" r:id="rId41"/>
   </p:sldIdLst>
   <p:sldSz cx="12192000" cy="6858000"/>
   <p:notesSz cx="6858000" cy="9144000"/>
@@ -237,7 +236,7 @@
           <a:p>
             <a:fld id="{49166821-6C76-43B4-90ED-EC04C965C0EE}" type="datetimeFigureOut">
               <a:rPr lang="en-US" smtClean="0"/>
-              <a:t>8/26/2026</a:t>
+              <a:t>9/9/2026</a:t>
             </a:fld>
             <a:endParaRPr lang="en-US"/>
           </a:p>
@@ -639,73 +638,30 @@
           <a:bodyPr/>
           <a:lstStyle/>
           <a:p>
+            <a:pPr marL="0" marR="0" lvl="0" indent="0" algn="l" defTabSz="914400" rtl="0" eaLnBrk="1" fontAlgn="auto" latinLnBrk="0" hangingPunct="1">
+              <a:lnSpc>
+                <a:spcPct val="100000"/>
+              </a:lnSpc>
+              <a:spcBef>
+                <a:spcPts val="0"/>
+              </a:spcBef>
+              <a:spcAft>
+                <a:spcPts val="0"/>
+              </a:spcAft>
+              <a:buClrTx/>
+              <a:buSzTx/>
+              <a:buFontTx/>
+              <a:buNone/>
+              <a:tabLst/>
+              <a:defRPr/>
+            </a:pPr>
             <a:r>
               <a:rPr lang="en-US" dirty="0"/>
-              <a:t>Python has a ton of uses. A few of them:</a:t>
+              <a:t>Ask the students which pieces of code are repeated</a:t>
             </a:r>
           </a:p>
           <a:p>
             <a:endParaRPr lang="en-US" dirty="0"/>
-          </a:p>
-          <a:p>
-            <a:pPr marL="171450" indent="-171450">
-              <a:buFontTx/>
-              <a:buChar char="-"/>
-            </a:pPr>
-            <a:r>
-              <a:rPr lang="en-US" dirty="0"/>
-              <a:t>Game Development</a:t>
-            </a:r>
-          </a:p>
-          <a:p>
-            <a:pPr marL="171450" indent="-171450">
-              <a:buFontTx/>
-              <a:buChar char="-"/>
-            </a:pPr>
-            <a:r>
-              <a:rPr lang="en-US" dirty="0"/>
-              <a:t>Automation</a:t>
-            </a:r>
-          </a:p>
-          <a:p>
-            <a:pPr marL="171450" indent="-171450">
-              <a:buFontTx/>
-              <a:buChar char="-"/>
-            </a:pPr>
-            <a:r>
-              <a:rPr lang="en-US" dirty="0"/>
-              <a:t>Web Development</a:t>
-            </a:r>
-          </a:p>
-          <a:p>
-            <a:pPr marL="171450" indent="-171450">
-              <a:buFontTx/>
-              <a:buChar char="-"/>
-            </a:pPr>
-            <a:r>
-              <a:rPr lang="en-US" dirty="0"/>
-              <a:t>Data Analysis</a:t>
-            </a:r>
-          </a:p>
-          <a:p>
-            <a:pPr marL="171450" indent="-171450">
-              <a:buFontTx/>
-              <a:buChar char="-"/>
-            </a:pPr>
-            <a:r>
-              <a:rPr lang="en-US" dirty="0"/>
-              <a:t>Web Scraping</a:t>
-            </a:r>
-          </a:p>
-          <a:p>
-            <a:pPr marL="171450" indent="-171450">
-              <a:buFontTx/>
-              <a:buChar char="-"/>
-            </a:pPr>
-            <a:r>
-              <a:rPr lang="en-US" dirty="0"/>
-              <a:t>Machine Learning</a:t>
-            </a:r>
           </a:p>
         </p:txBody>
       </p:sp>
@@ -724,9 +680,9 @@
           <a:bodyPr/>
           <a:lstStyle/>
           <a:p>
-            <a:fld id="{DEC8F7F9-57EC-49CF-9FCD-2B781E4B449F}" type="slidenum">
+            <a:fld id="{58794465-180C-46F3-B270-18D6C421C221}" type="slidenum">
               <a:rPr lang="en-US" smtClean="0"/>
-              <a:t>38</a:t>
+              <a:t>27</a:t>
             </a:fld>
             <a:endParaRPr lang="en-US"/>
           </a:p>
@@ -735,7 +691,7 @@
     </p:spTree>
     <p:extLst>
       <p:ext uri="{BB962C8B-B14F-4D97-AF65-F5344CB8AC3E}">
-        <p14:creationId xmlns:p14="http://schemas.microsoft.com/office/powerpoint/2010/main" val="2636235472"/>
+        <p14:creationId xmlns:p14="http://schemas.microsoft.com/office/powerpoint/2010/main" val="836334808"/>
       </p:ext>
     </p:extLst>
   </p:cSld>
@@ -789,53 +745,10 @@
           <a:bodyPr/>
           <a:lstStyle/>
           <a:p>
-            <a:pPr marL="171450" indent="-171450">
-              <a:buFont typeface="Arial" panose="020B0604020202020204" pitchFamily="34" charset="0"/>
-              <a:buChar char="•"/>
-            </a:pPr>
             <a:r>
               <a:rPr lang="en-US" dirty="0"/>
-              <a:t>None of this information is strictly necessary, but it’s fun to know!</a:t>
-            </a:r>
-          </a:p>
-          <a:p>
-            <a:pPr marL="171450" indent="-171450">
-              <a:buFont typeface="Arial" panose="020B0604020202020204" pitchFamily="34" charset="0"/>
-              <a:buChar char="•"/>
-            </a:pPr>
-            <a:r>
-              <a:rPr lang="en-US" dirty="0"/>
-              <a:t>Look at this cat – </a:t>
-            </a:r>
-            <a:r>
-              <a:rPr lang="en-US" b="1" dirty="0"/>
-              <a:t>does anyone know Monty Python</a:t>
-            </a:r>
-            <a:r>
-              <a:rPr lang="en-US" b="0" dirty="0"/>
-              <a:t>? That’s actually Python’s namesake.</a:t>
-            </a:r>
-          </a:p>
-          <a:p>
-            <a:pPr marL="171450" indent="-171450">
-              <a:buFont typeface="Arial" panose="020B0604020202020204" pitchFamily="34" charset="0"/>
-              <a:buChar char="•"/>
-            </a:pPr>
-            <a:r>
-              <a:rPr lang="en-US" b="0" dirty="0"/>
-              <a:t>The philosophy of Python has some key points. In comparison to other programming languages – these are some of the guiding principles.</a:t>
-            </a:r>
-          </a:p>
-          <a:p>
-            <a:pPr marL="171450" indent="-171450">
-              <a:buFont typeface="Arial" panose="020B0604020202020204" pitchFamily="34" charset="0"/>
-              <a:buChar char="•"/>
-            </a:pPr>
-            <a:r>
-              <a:rPr lang="en-US" b="0" dirty="0"/>
-              <a:t>Also, it was released in 1991 by this guy named Guido van Rossum. His glasses are cool as heck.</a:t>
-            </a:r>
-            <a:endParaRPr lang="en-US" dirty="0"/>
+              <a:t>These three lines are repeated! Over and over again!</a:t>
+            </a:r>
           </a:p>
         </p:txBody>
       </p:sp>
@@ -854,9 +767,637 @@
           <a:bodyPr/>
           <a:lstStyle/>
           <a:p>
+            <a:fld id="{58794465-180C-46F3-B270-18D6C421C221}" type="slidenum">
+              <a:rPr lang="en-US" smtClean="0"/>
+              <a:t>28</a:t>
+            </a:fld>
+            <a:endParaRPr lang="en-US"/>
+          </a:p>
+        </p:txBody>
+      </p:sp>
+    </p:spTree>
+    <p:extLst>
+      <p:ext uri="{BB962C8B-B14F-4D97-AF65-F5344CB8AC3E}">
+        <p14:creationId xmlns:p14="http://schemas.microsoft.com/office/powerpoint/2010/main" val="609025019"/>
+      </p:ext>
+    </p:extLst>
+  </p:cSld>
+  <p:clrMapOvr>
+    <a:masterClrMapping/>
+  </p:clrMapOvr>
+</p:notes>
+</file>
+
+<file path=ppt/notesSlides/notesSlide12.xml><?xml version="1.0" encoding="utf-8"?>
+<p:notes xmlns:a="http://schemas.openxmlformats.org/drawingml/2006/main" xmlns:r="http://schemas.openxmlformats.org/officeDocument/2006/relationships" xmlns:p="http://schemas.openxmlformats.org/presentationml/2006/main">
+  <p:cSld>
+    <p:spTree>
+      <p:nvGrpSpPr>
+        <p:cNvPr id="1" name=""/>
+        <p:cNvGrpSpPr/>
+        <p:nvPr/>
+      </p:nvGrpSpPr>
+      <p:grpSpPr>
+        <a:xfrm>
+          <a:off x="0" y="0"/>
+          <a:ext cx="0" cy="0"/>
+          <a:chOff x="0" y="0"/>
+          <a:chExt cx="0" cy="0"/>
+        </a:xfrm>
+      </p:grpSpPr>
+      <p:sp>
+        <p:nvSpPr>
+          <p:cNvPr id="2" name="Slide Image Placeholder 1"/>
+          <p:cNvSpPr>
+            <a:spLocks noGrp="1" noRot="1" noChangeAspect="1"/>
+          </p:cNvSpPr>
+          <p:nvPr>
+            <p:ph type="sldImg"/>
+          </p:nvPr>
+        </p:nvSpPr>
+        <p:spPr/>
+      </p:sp>
+      <p:sp>
+        <p:nvSpPr>
+          <p:cNvPr id="3" name="Notes Placeholder 2"/>
+          <p:cNvSpPr>
+            <a:spLocks noGrp="1"/>
+          </p:cNvSpPr>
+          <p:nvPr>
+            <p:ph type="body" idx="1"/>
+          </p:nvPr>
+        </p:nvSpPr>
+        <p:spPr/>
+        <p:txBody>
+          <a:bodyPr/>
+          <a:lstStyle/>
+          <a:p>
+            <a:r>
+              <a:rPr lang="en-US" dirty="0"/>
+              <a:t>We don’t need all the other ones!</a:t>
+            </a:r>
+          </a:p>
+        </p:txBody>
+      </p:sp>
+      <p:sp>
+        <p:nvSpPr>
+          <p:cNvPr id="4" name="Slide Number Placeholder 3"/>
+          <p:cNvSpPr>
+            <a:spLocks noGrp="1"/>
+          </p:cNvSpPr>
+          <p:nvPr>
+            <p:ph type="sldNum" sz="quarter" idx="5"/>
+          </p:nvPr>
+        </p:nvSpPr>
+        <p:spPr/>
+        <p:txBody>
+          <a:bodyPr/>
+          <a:lstStyle/>
+          <a:p>
+            <a:fld id="{58794465-180C-46F3-B270-18D6C421C221}" type="slidenum">
+              <a:rPr lang="en-US" smtClean="0"/>
+              <a:t>29</a:t>
+            </a:fld>
+            <a:endParaRPr lang="en-US"/>
+          </a:p>
+        </p:txBody>
+      </p:sp>
+    </p:spTree>
+    <p:extLst>
+      <p:ext uri="{BB962C8B-B14F-4D97-AF65-F5344CB8AC3E}">
+        <p14:creationId xmlns:p14="http://schemas.microsoft.com/office/powerpoint/2010/main" val="3500104412"/>
+      </p:ext>
+    </p:extLst>
+  </p:cSld>
+  <p:clrMapOvr>
+    <a:masterClrMapping/>
+  </p:clrMapOvr>
+</p:notes>
+</file>
+
+<file path=ppt/notesSlides/notesSlide13.xml><?xml version="1.0" encoding="utf-8"?>
+<p:notes xmlns:a="http://schemas.openxmlformats.org/drawingml/2006/main" xmlns:r="http://schemas.openxmlformats.org/officeDocument/2006/relationships" xmlns:p="http://schemas.openxmlformats.org/presentationml/2006/main">
+  <p:cSld>
+    <p:spTree>
+      <p:nvGrpSpPr>
+        <p:cNvPr id="1" name=""/>
+        <p:cNvGrpSpPr/>
+        <p:nvPr/>
+      </p:nvGrpSpPr>
+      <p:grpSpPr>
+        <a:xfrm>
+          <a:off x="0" y="0"/>
+          <a:ext cx="0" cy="0"/>
+          <a:chOff x="0" y="0"/>
+          <a:chExt cx="0" cy="0"/>
+        </a:xfrm>
+      </p:grpSpPr>
+      <p:sp>
+        <p:nvSpPr>
+          <p:cNvPr id="2" name="Slide Image Placeholder 1"/>
+          <p:cNvSpPr>
+            <a:spLocks noGrp="1" noRot="1" noChangeAspect="1"/>
+          </p:cNvSpPr>
+          <p:nvPr>
+            <p:ph type="sldImg"/>
+          </p:nvPr>
+        </p:nvSpPr>
+        <p:spPr/>
+      </p:sp>
+      <p:sp>
+        <p:nvSpPr>
+          <p:cNvPr id="3" name="Notes Placeholder 2"/>
+          <p:cNvSpPr>
+            <a:spLocks noGrp="1"/>
+          </p:cNvSpPr>
+          <p:nvPr>
+            <p:ph type="body" idx="1"/>
+          </p:nvPr>
+        </p:nvSpPr>
+        <p:spPr/>
+        <p:txBody>
+          <a:bodyPr/>
+          <a:lstStyle/>
+          <a:p>
+            <a:r>
+              <a:rPr lang="en-US" dirty="0"/>
+              <a:t>Let’s take a look here</a:t>
+            </a:r>
+          </a:p>
+        </p:txBody>
+      </p:sp>
+      <p:sp>
+        <p:nvSpPr>
+          <p:cNvPr id="4" name="Slide Number Placeholder 3"/>
+          <p:cNvSpPr>
+            <a:spLocks noGrp="1"/>
+          </p:cNvSpPr>
+          <p:nvPr>
+            <p:ph type="sldNum" sz="quarter" idx="5"/>
+          </p:nvPr>
+        </p:nvSpPr>
+        <p:spPr/>
+        <p:txBody>
+          <a:bodyPr/>
+          <a:lstStyle/>
+          <a:p>
+            <a:fld id="{58794465-180C-46F3-B270-18D6C421C221}" type="slidenum">
+              <a:rPr lang="en-US" smtClean="0"/>
+              <a:t>30</a:t>
+            </a:fld>
+            <a:endParaRPr lang="en-US"/>
+          </a:p>
+        </p:txBody>
+      </p:sp>
+    </p:spTree>
+    <p:extLst>
+      <p:ext uri="{BB962C8B-B14F-4D97-AF65-F5344CB8AC3E}">
+        <p14:creationId xmlns:p14="http://schemas.microsoft.com/office/powerpoint/2010/main" val="3923343224"/>
+      </p:ext>
+    </p:extLst>
+  </p:cSld>
+  <p:clrMapOvr>
+    <a:masterClrMapping/>
+  </p:clrMapOvr>
+</p:notes>
+</file>
+
+<file path=ppt/notesSlides/notesSlide14.xml><?xml version="1.0" encoding="utf-8"?>
+<p:notes xmlns:a="http://schemas.openxmlformats.org/drawingml/2006/main" xmlns:r="http://schemas.openxmlformats.org/officeDocument/2006/relationships" xmlns:p="http://schemas.openxmlformats.org/presentationml/2006/main">
+  <p:cSld>
+    <p:spTree>
+      <p:nvGrpSpPr>
+        <p:cNvPr id="1" name=""/>
+        <p:cNvGrpSpPr/>
+        <p:nvPr/>
+      </p:nvGrpSpPr>
+      <p:grpSpPr>
+        <a:xfrm>
+          <a:off x="0" y="0"/>
+          <a:ext cx="0" cy="0"/>
+          <a:chOff x="0" y="0"/>
+          <a:chExt cx="0" cy="0"/>
+        </a:xfrm>
+      </p:grpSpPr>
+      <p:sp>
+        <p:nvSpPr>
+          <p:cNvPr id="2" name="Slide Image Placeholder 1"/>
+          <p:cNvSpPr>
+            <a:spLocks noGrp="1" noRot="1" noChangeAspect="1"/>
+          </p:cNvSpPr>
+          <p:nvPr>
+            <p:ph type="sldImg"/>
+          </p:nvPr>
+        </p:nvSpPr>
+        <p:spPr/>
+      </p:sp>
+      <p:sp>
+        <p:nvSpPr>
+          <p:cNvPr id="3" name="Notes Placeholder 2"/>
+          <p:cNvSpPr>
+            <a:spLocks noGrp="1"/>
+          </p:cNvSpPr>
+          <p:nvPr>
+            <p:ph type="body" idx="1"/>
+          </p:nvPr>
+        </p:nvSpPr>
+        <p:spPr/>
+        <p:txBody>
+          <a:bodyPr/>
+          <a:lstStyle/>
+          <a:p>
+            <a:r>
+              <a:rPr lang="en-US" dirty="0"/>
+              <a:t>And we want to throw these in a loop! 18 times!</a:t>
+            </a:r>
+          </a:p>
+        </p:txBody>
+      </p:sp>
+      <p:sp>
+        <p:nvSpPr>
+          <p:cNvPr id="4" name="Slide Number Placeholder 3"/>
+          <p:cNvSpPr>
+            <a:spLocks noGrp="1"/>
+          </p:cNvSpPr>
+          <p:nvPr>
+            <p:ph type="sldNum" sz="quarter" idx="5"/>
+          </p:nvPr>
+        </p:nvSpPr>
+        <p:spPr/>
+        <p:txBody>
+          <a:bodyPr/>
+          <a:lstStyle/>
+          <a:p>
+            <a:fld id="{58794465-180C-46F3-B270-18D6C421C221}" type="slidenum">
+              <a:rPr lang="en-US" smtClean="0"/>
+              <a:t>31</a:t>
+            </a:fld>
+            <a:endParaRPr lang="en-US"/>
+          </a:p>
+        </p:txBody>
+      </p:sp>
+    </p:spTree>
+    <p:extLst>
+      <p:ext uri="{BB962C8B-B14F-4D97-AF65-F5344CB8AC3E}">
+        <p14:creationId xmlns:p14="http://schemas.microsoft.com/office/powerpoint/2010/main" val="2683319449"/>
+      </p:ext>
+    </p:extLst>
+  </p:cSld>
+  <p:clrMapOvr>
+    <a:masterClrMapping/>
+  </p:clrMapOvr>
+</p:notes>
+</file>
+
+<file path=ppt/notesSlides/notesSlide15.xml><?xml version="1.0" encoding="utf-8"?>
+<p:notes xmlns:a="http://schemas.openxmlformats.org/drawingml/2006/main" xmlns:r="http://schemas.openxmlformats.org/officeDocument/2006/relationships" xmlns:p="http://schemas.openxmlformats.org/presentationml/2006/main">
+  <p:cSld>
+    <p:spTree>
+      <p:nvGrpSpPr>
+        <p:cNvPr id="1" name=""/>
+        <p:cNvGrpSpPr/>
+        <p:nvPr/>
+      </p:nvGrpSpPr>
+      <p:grpSpPr>
+        <a:xfrm>
+          <a:off x="0" y="0"/>
+          <a:ext cx="0" cy="0"/>
+          <a:chOff x="0" y="0"/>
+          <a:chExt cx="0" cy="0"/>
+        </a:xfrm>
+      </p:grpSpPr>
+      <p:sp>
+        <p:nvSpPr>
+          <p:cNvPr id="2" name="Slide Image Placeholder 1"/>
+          <p:cNvSpPr>
+            <a:spLocks noGrp="1" noRot="1" noChangeAspect="1"/>
+          </p:cNvSpPr>
+          <p:nvPr>
+            <p:ph type="sldImg"/>
+          </p:nvPr>
+        </p:nvSpPr>
+        <p:spPr/>
+      </p:sp>
+      <p:sp>
+        <p:nvSpPr>
+          <p:cNvPr id="3" name="Notes Placeholder 2"/>
+          <p:cNvSpPr>
+            <a:spLocks noGrp="1"/>
+          </p:cNvSpPr>
+          <p:nvPr>
+            <p:ph type="body" idx="1"/>
+          </p:nvPr>
+        </p:nvSpPr>
+        <p:spPr/>
+        <p:txBody>
+          <a:bodyPr/>
+          <a:lstStyle/>
+          <a:p>
+            <a:r>
+              <a:rPr lang="en-US" dirty="0"/>
+              <a:t>Indentation is how you show which lines to repeat!</a:t>
+            </a:r>
+          </a:p>
+        </p:txBody>
+      </p:sp>
+      <p:sp>
+        <p:nvSpPr>
+          <p:cNvPr id="4" name="Slide Number Placeholder 3"/>
+          <p:cNvSpPr>
+            <a:spLocks noGrp="1"/>
+          </p:cNvSpPr>
+          <p:nvPr>
+            <p:ph type="sldNum" sz="quarter" idx="5"/>
+          </p:nvPr>
+        </p:nvSpPr>
+        <p:spPr/>
+        <p:txBody>
+          <a:bodyPr/>
+          <a:lstStyle/>
+          <a:p>
+            <a:fld id="{58794465-180C-46F3-B270-18D6C421C221}" type="slidenum">
+              <a:rPr lang="en-US" smtClean="0"/>
+              <a:t>32</a:t>
+            </a:fld>
+            <a:endParaRPr lang="en-US"/>
+          </a:p>
+        </p:txBody>
+      </p:sp>
+    </p:spTree>
+    <p:extLst>
+      <p:ext uri="{BB962C8B-B14F-4D97-AF65-F5344CB8AC3E}">
+        <p14:creationId xmlns:p14="http://schemas.microsoft.com/office/powerpoint/2010/main" val="1783106288"/>
+      </p:ext>
+    </p:extLst>
+  </p:cSld>
+  <p:clrMapOvr>
+    <a:masterClrMapping/>
+  </p:clrMapOvr>
+</p:notes>
+</file>
+
+<file path=ppt/notesSlides/notesSlide16.xml><?xml version="1.0" encoding="utf-8"?>
+<p:notes xmlns:a="http://schemas.openxmlformats.org/drawingml/2006/main" xmlns:r="http://schemas.openxmlformats.org/officeDocument/2006/relationships" xmlns:p="http://schemas.openxmlformats.org/presentationml/2006/main">
+  <p:cSld>
+    <p:spTree>
+      <p:nvGrpSpPr>
+        <p:cNvPr id="1" name=""/>
+        <p:cNvGrpSpPr/>
+        <p:nvPr/>
+      </p:nvGrpSpPr>
+      <p:grpSpPr>
+        <a:xfrm>
+          <a:off x="0" y="0"/>
+          <a:ext cx="0" cy="0"/>
+          <a:chOff x="0" y="0"/>
+          <a:chExt cx="0" cy="0"/>
+        </a:xfrm>
+      </p:grpSpPr>
+      <p:sp>
+        <p:nvSpPr>
+          <p:cNvPr id="2" name="Slide Image Placeholder 1"/>
+          <p:cNvSpPr>
+            <a:spLocks noGrp="1" noRot="1" noChangeAspect="1"/>
+          </p:cNvSpPr>
+          <p:nvPr>
+            <p:ph type="sldImg"/>
+          </p:nvPr>
+        </p:nvSpPr>
+        <p:spPr/>
+      </p:sp>
+      <p:sp>
+        <p:nvSpPr>
+          <p:cNvPr id="3" name="Notes Placeholder 2"/>
+          <p:cNvSpPr>
+            <a:spLocks noGrp="1"/>
+          </p:cNvSpPr>
+          <p:nvPr>
+            <p:ph type="body" idx="1"/>
+          </p:nvPr>
+        </p:nvSpPr>
+        <p:spPr/>
+        <p:txBody>
+          <a:bodyPr/>
+          <a:lstStyle/>
+          <a:p>
+            <a:r>
+              <a:rPr lang="en-US" dirty="0"/>
+              <a:t>Python has a ton of uses. A few of them:</a:t>
+            </a:r>
+          </a:p>
+          <a:p>
+            <a:endParaRPr lang="en-US" dirty="0"/>
+          </a:p>
+          <a:p>
+            <a:pPr marL="171450" indent="-171450">
+              <a:buFontTx/>
+              <a:buChar char="-"/>
+            </a:pPr>
+            <a:r>
+              <a:rPr lang="en-US" dirty="0"/>
+              <a:t>Game Development</a:t>
+            </a:r>
+          </a:p>
+          <a:p>
+            <a:pPr marL="171450" indent="-171450">
+              <a:buFontTx/>
+              <a:buChar char="-"/>
+            </a:pPr>
+            <a:r>
+              <a:rPr lang="en-US" dirty="0"/>
+              <a:t>Automation</a:t>
+            </a:r>
+          </a:p>
+          <a:p>
+            <a:pPr marL="171450" indent="-171450">
+              <a:buFontTx/>
+              <a:buChar char="-"/>
+            </a:pPr>
+            <a:r>
+              <a:rPr lang="en-US" dirty="0"/>
+              <a:t>Web Development</a:t>
+            </a:r>
+          </a:p>
+          <a:p>
+            <a:pPr marL="171450" indent="-171450">
+              <a:buFontTx/>
+              <a:buChar char="-"/>
+            </a:pPr>
+            <a:r>
+              <a:rPr lang="en-US" dirty="0"/>
+              <a:t>Data Analysis</a:t>
+            </a:r>
+          </a:p>
+          <a:p>
+            <a:pPr marL="171450" indent="-171450">
+              <a:buFontTx/>
+              <a:buChar char="-"/>
+            </a:pPr>
+            <a:r>
+              <a:rPr lang="en-US" dirty="0"/>
+              <a:t>Web Scraping</a:t>
+            </a:r>
+          </a:p>
+          <a:p>
+            <a:pPr marL="171450" indent="-171450">
+              <a:buFontTx/>
+              <a:buChar char="-"/>
+            </a:pPr>
+            <a:r>
+              <a:rPr lang="en-US" dirty="0"/>
+              <a:t>Machine Learning</a:t>
+            </a:r>
+          </a:p>
+        </p:txBody>
+      </p:sp>
+      <p:sp>
+        <p:nvSpPr>
+          <p:cNvPr id="4" name="Slide Number Placeholder 3"/>
+          <p:cNvSpPr>
+            <a:spLocks noGrp="1"/>
+          </p:cNvSpPr>
+          <p:nvPr>
+            <p:ph type="sldNum" sz="quarter" idx="5"/>
+          </p:nvPr>
+        </p:nvSpPr>
+        <p:spPr/>
+        <p:txBody>
+          <a:bodyPr/>
+          <a:lstStyle/>
+          <a:p>
             <a:fld id="{DEC8F7F9-57EC-49CF-9FCD-2B781E4B449F}" type="slidenum">
               <a:rPr lang="en-US" smtClean="0"/>
-              <a:t>39</a:t>
+              <a:t>37</a:t>
+            </a:fld>
+            <a:endParaRPr lang="en-US"/>
+          </a:p>
+        </p:txBody>
+      </p:sp>
+    </p:spTree>
+    <p:extLst>
+      <p:ext uri="{BB962C8B-B14F-4D97-AF65-F5344CB8AC3E}">
+        <p14:creationId xmlns:p14="http://schemas.microsoft.com/office/powerpoint/2010/main" val="2636235472"/>
+      </p:ext>
+    </p:extLst>
+  </p:cSld>
+  <p:clrMapOvr>
+    <a:masterClrMapping/>
+  </p:clrMapOvr>
+</p:notes>
+</file>
+
+<file path=ppt/notesSlides/notesSlide17.xml><?xml version="1.0" encoding="utf-8"?>
+<p:notes xmlns:a="http://schemas.openxmlformats.org/drawingml/2006/main" xmlns:r="http://schemas.openxmlformats.org/officeDocument/2006/relationships" xmlns:p="http://schemas.openxmlformats.org/presentationml/2006/main">
+  <p:cSld>
+    <p:spTree>
+      <p:nvGrpSpPr>
+        <p:cNvPr id="1" name=""/>
+        <p:cNvGrpSpPr/>
+        <p:nvPr/>
+      </p:nvGrpSpPr>
+      <p:grpSpPr>
+        <a:xfrm>
+          <a:off x="0" y="0"/>
+          <a:ext cx="0" cy="0"/>
+          <a:chOff x="0" y="0"/>
+          <a:chExt cx="0" cy="0"/>
+        </a:xfrm>
+      </p:grpSpPr>
+      <p:sp>
+        <p:nvSpPr>
+          <p:cNvPr id="2" name="Slide Image Placeholder 1"/>
+          <p:cNvSpPr>
+            <a:spLocks noGrp="1" noRot="1" noChangeAspect="1"/>
+          </p:cNvSpPr>
+          <p:nvPr>
+            <p:ph type="sldImg"/>
+          </p:nvPr>
+        </p:nvSpPr>
+        <p:spPr/>
+      </p:sp>
+      <p:sp>
+        <p:nvSpPr>
+          <p:cNvPr id="3" name="Notes Placeholder 2"/>
+          <p:cNvSpPr>
+            <a:spLocks noGrp="1"/>
+          </p:cNvSpPr>
+          <p:nvPr>
+            <p:ph type="body" idx="1"/>
+          </p:nvPr>
+        </p:nvSpPr>
+        <p:spPr/>
+        <p:txBody>
+          <a:bodyPr/>
+          <a:lstStyle/>
+          <a:p>
+            <a:pPr marL="171450" indent="-171450">
+              <a:buFont typeface="Arial" panose="020B0604020202020204" pitchFamily="34" charset="0"/>
+              <a:buChar char="•"/>
+            </a:pPr>
+            <a:r>
+              <a:rPr lang="en-US" dirty="0"/>
+              <a:t>None of this information is strictly necessary, but it’s fun to know!</a:t>
+            </a:r>
+          </a:p>
+          <a:p>
+            <a:pPr marL="171450" indent="-171450">
+              <a:buFont typeface="Arial" panose="020B0604020202020204" pitchFamily="34" charset="0"/>
+              <a:buChar char="•"/>
+            </a:pPr>
+            <a:r>
+              <a:rPr lang="en-US" dirty="0"/>
+              <a:t>Look at this cat – </a:t>
+            </a:r>
+            <a:r>
+              <a:rPr lang="en-US" b="1" dirty="0"/>
+              <a:t>does anyone know Monty Python</a:t>
+            </a:r>
+            <a:r>
+              <a:rPr lang="en-US" b="0" dirty="0"/>
+              <a:t>? That’s actually Python’s namesake.</a:t>
+            </a:r>
+          </a:p>
+          <a:p>
+            <a:pPr marL="171450" indent="-171450">
+              <a:buFont typeface="Arial" panose="020B0604020202020204" pitchFamily="34" charset="0"/>
+              <a:buChar char="•"/>
+            </a:pPr>
+            <a:r>
+              <a:rPr lang="en-US" b="0" dirty="0"/>
+              <a:t>The philosophy of Python has some key points. In comparison to other programming languages – these are some of the guiding principles.</a:t>
+            </a:r>
+          </a:p>
+          <a:p>
+            <a:pPr marL="171450" indent="-171450">
+              <a:buFont typeface="Arial" panose="020B0604020202020204" pitchFamily="34" charset="0"/>
+              <a:buChar char="•"/>
+            </a:pPr>
+            <a:r>
+              <a:rPr lang="en-US" b="0" dirty="0"/>
+              <a:t>Also, it was released in 1991 by this guy named Guido van Rossum. His glasses are cool as heck.</a:t>
+            </a:r>
+            <a:endParaRPr lang="en-US" dirty="0"/>
+          </a:p>
+        </p:txBody>
+      </p:sp>
+      <p:sp>
+        <p:nvSpPr>
+          <p:cNvPr id="4" name="Slide Number Placeholder 3"/>
+          <p:cNvSpPr>
+            <a:spLocks noGrp="1"/>
+          </p:cNvSpPr>
+          <p:nvPr>
+            <p:ph type="sldNum" sz="quarter" idx="5"/>
+          </p:nvPr>
+        </p:nvSpPr>
+        <p:spPr/>
+        <p:txBody>
+          <a:bodyPr/>
+          <a:lstStyle/>
+          <a:p>
+            <a:fld id="{DEC8F7F9-57EC-49CF-9FCD-2B781E4B449F}" type="slidenum">
+              <a:rPr lang="en-US" smtClean="0"/>
+              <a:t>38</a:t>
             </a:fld>
             <a:endParaRPr lang="en-US"/>
           </a:p>
@@ -875,7 +1416,7 @@
 </p:notes>
 </file>
 
-<file path=ppt/notesSlides/notesSlide12.xml><?xml version="1.0" encoding="utf-8"?>
+<file path=ppt/notesSlides/notesSlide18.xml><?xml version="1.0" encoding="utf-8"?>
 <p:notes xmlns:a="http://schemas.openxmlformats.org/drawingml/2006/main" xmlns:r="http://schemas.openxmlformats.org/officeDocument/2006/relationships" xmlns:p="http://schemas.openxmlformats.org/presentationml/2006/main">
   <p:cSld>
     <p:spTree>
@@ -1030,7 +1571,7 @@
           <a:p>
             <a:fld id="{DEC8F7F9-57EC-49CF-9FCD-2B781E4B449F}" type="slidenum">
               <a:rPr lang="en-US" smtClean="0"/>
-              <a:t>40</a:t>
+              <a:t>39</a:t>
             </a:fld>
             <a:endParaRPr lang="en-US"/>
           </a:p>
@@ -1049,7 +1590,7 @@
 </p:notes>
 </file>
 
-<file path=ppt/notesSlides/notesSlide13.xml><?xml version="1.0" encoding="utf-8"?>
+<file path=ppt/notesSlides/notesSlide19.xml><?xml version="1.0" encoding="utf-8"?>
 <p:notes xmlns:a="http://schemas.openxmlformats.org/drawingml/2006/main" xmlns:r="http://schemas.openxmlformats.org/officeDocument/2006/relationships" xmlns:p="http://schemas.openxmlformats.org/presentationml/2006/main">
   <p:cSld>
     <p:spTree>
@@ -1135,7 +1676,7 @@
           <a:p>
             <a:fld id="{58794465-180C-46F3-B270-18D6C421C221}" type="slidenum">
               <a:rPr lang="en-US" smtClean="0"/>
-              <a:t>41</a:t>
+              <a:t>40</a:t>
             </a:fld>
             <a:endParaRPr lang="en-US"/>
           </a:p>
@@ -1346,15 +1887,15 @@
             </a:pPr>
             <a:r>
               <a:rPr lang="en-US" dirty="0"/>
-              <a:t>In the world of programming, </a:t>
+              <a:t>Remember, Python (this snake guy) </a:t>
             </a:r>
             <a:r>
               <a:rPr lang="en-US" i="1" dirty="0"/>
-              <a:t>you</a:t>
+              <a:t>executes</a:t>
             </a:r>
             <a:r>
               <a:rPr lang="en-US" i="0" dirty="0"/>
-              <a:t> wield the power. Think of it like this – </a:t>
+              <a:t> instructions. Python reads the instructions, and follows them – executing the commands.</a:t>
             </a:r>
           </a:p>
           <a:p>
@@ -1364,7 +1905,7 @@
             </a:pPr>
             <a:r>
               <a:rPr lang="en-US" i="0" dirty="0"/>
-              <a:t>There is a magical robotic serpent named Python</a:t>
+              <a:t>Imagine there were a magical scroll that could control this snake. It has a set of instructions that MUST be followed.</a:t>
             </a:r>
           </a:p>
           <a:p>
@@ -1374,7 +1915,7 @@
             </a:pPr>
             <a:r>
               <a:rPr lang="en-US" i="0" dirty="0"/>
-              <a:t>It will bend to your every will and whim</a:t>
+              <a:t>The snake will read through these instructions ONE BY ONE. The first one happens first. Order matters.</a:t>
             </a:r>
           </a:p>
           <a:p>
@@ -1384,7 +1925,15 @@
             </a:pPr>
             <a:r>
               <a:rPr lang="en-US" i="0" dirty="0"/>
-              <a:t>All you must do is command it with flawless incantation. Let’s see an example</a:t>
+              <a:t>The snake will </a:t>
+            </a:r>
+            <a:r>
+              <a:rPr lang="en-US" i="1" dirty="0"/>
+              <a:t>execute</a:t>
+            </a:r>
+            <a:r>
+              <a:rPr lang="en-US" i="0" dirty="0"/>
+              <a:t> the first instruction. Like this. It will say Hi!</a:t>
             </a:r>
             <a:endParaRPr lang="en-US" dirty="0"/>
           </a:p>
@@ -1407,7 +1956,7 @@
           <a:p>
             <a:fld id="{58794465-180C-46F3-B270-18D6C421C221}" type="slidenum">
               <a:rPr lang="en-US" smtClean="0"/>
-              <a:t>3</a:t>
+              <a:t>4</a:t>
             </a:fld>
             <a:endParaRPr lang="en-US"/>
           </a:p>
@@ -1416,7 +1965,7 @@
     </p:spTree>
     <p:extLst>
       <p:ext uri="{BB962C8B-B14F-4D97-AF65-F5344CB8AC3E}">
-        <p14:creationId xmlns:p14="http://schemas.microsoft.com/office/powerpoint/2010/main" val="2272438995"/>
+        <p14:creationId xmlns:p14="http://schemas.microsoft.com/office/powerpoint/2010/main" val="3487193796"/>
       </p:ext>
     </p:extLst>
   </p:cSld>
@@ -1476,15 +2025,7 @@
             </a:pPr>
             <a:r>
               <a:rPr lang="en-US" dirty="0"/>
-              <a:t>Remember, Python (this snake guy) </a:t>
-            </a:r>
-            <a:r>
-              <a:rPr lang="en-US" i="1" dirty="0"/>
-              <a:t>executes</a:t>
-            </a:r>
-            <a:r>
-              <a:rPr lang="en-US" i="0" dirty="0"/>
-              <a:t> instructions. Python reads the instructions, and follows them – executing the commands.</a:t>
+              <a:t>After that, the snake will move on down to the next statement. It will read it, understand it, and then do it!</a:t>
             </a:r>
           </a:p>
           <a:p>
@@ -1493,38 +2034,9 @@
               <a:buChar char="•"/>
             </a:pPr>
             <a:r>
-              <a:rPr lang="en-US" i="0" dirty="0"/>
-              <a:t>Imagine there were a magical scroll that could control this snake. It has a set of instructions that MUST be followed.</a:t>
-            </a:r>
-          </a:p>
-          <a:p>
-            <a:pPr marL="171450" indent="-171450">
-              <a:buFont typeface="Arial" panose="020B0604020202020204" pitchFamily="34" charset="0"/>
-              <a:buChar char="•"/>
-            </a:pPr>
-            <a:r>
-              <a:rPr lang="en-US" i="0" dirty="0"/>
-              <a:t>The snake will read through these instructions ONE BY ONE. The first one happens first. Order matters.</a:t>
-            </a:r>
-          </a:p>
-          <a:p>
-            <a:pPr marL="171450" indent="-171450">
-              <a:buFont typeface="Arial" panose="020B0604020202020204" pitchFamily="34" charset="0"/>
-              <a:buChar char="•"/>
-            </a:pPr>
-            <a:r>
-              <a:rPr lang="en-US" i="0" dirty="0"/>
-              <a:t>The snake will </a:t>
-            </a:r>
-            <a:r>
-              <a:rPr lang="en-US" i="1" dirty="0"/>
-              <a:t>execute</a:t>
-            </a:r>
-            <a:r>
-              <a:rPr lang="en-US" i="0" dirty="0"/>
-              <a:t> the first instruction. Like this. It will say Hi!</a:t>
-            </a:r>
-            <a:endParaRPr lang="en-US" dirty="0"/>
+              <a:rPr lang="en-US" dirty="0"/>
+              <a:t>It looks like this.</a:t>
+            </a:r>
           </a:p>
         </p:txBody>
       </p:sp>
@@ -1554,7 +2066,7 @@
     </p:spTree>
     <p:extLst>
       <p:ext uri="{BB962C8B-B14F-4D97-AF65-F5344CB8AC3E}">
-        <p14:creationId xmlns:p14="http://schemas.microsoft.com/office/powerpoint/2010/main" val="3487193796"/>
+        <p14:creationId xmlns:p14="http://schemas.microsoft.com/office/powerpoint/2010/main" val="252557727"/>
       </p:ext>
     </p:extLst>
   </p:cSld>
@@ -1614,8 +2126,13 @@
             </a:pPr>
             <a:r>
               <a:rPr lang="en-US" dirty="0"/>
-              <a:t>After that, the snake will move on down to the next statement. It will read it, understand it, and then do it!</a:t>
-            </a:r>
+              <a:t>The snake, being a super powerful computer, can also perform calculations. </a:t>
+            </a:r>
+            <a:r>
+              <a:rPr lang="en-US" b="1" dirty="0"/>
+              <a:t>What’s four plus four?</a:t>
+            </a:r>
+            <a:endParaRPr lang="en-US" b="0" dirty="0"/>
           </a:p>
           <a:p>
             <a:pPr marL="171450" indent="-171450">
@@ -1623,9 +2140,10 @@
               <a:buChar char="•"/>
             </a:pPr>
             <a:r>
-              <a:rPr lang="en-US" dirty="0"/>
-              <a:t>It looks like this.</a:t>
-            </a:r>
+              <a:rPr lang="en-US" b="0" dirty="0"/>
+              <a:t>It will spit out the answer.</a:t>
+            </a:r>
+            <a:endParaRPr lang="en-US" dirty="0"/>
           </a:p>
         </p:txBody>
       </p:sp>
@@ -1655,7 +2173,7 @@
     </p:spTree>
     <p:extLst>
       <p:ext uri="{BB962C8B-B14F-4D97-AF65-F5344CB8AC3E}">
-        <p14:creationId xmlns:p14="http://schemas.microsoft.com/office/powerpoint/2010/main" val="252557727"/>
+        <p14:creationId xmlns:p14="http://schemas.microsoft.com/office/powerpoint/2010/main" val="1416537075"/>
       </p:ext>
     </p:extLst>
   </p:cSld>
@@ -1715,13 +2233,8 @@
             </a:pPr>
             <a:r>
               <a:rPr lang="en-US" dirty="0"/>
-              <a:t>The snake, being a super powerful computer, can also perform calculations. </a:t>
-            </a:r>
-            <a:r>
-              <a:rPr lang="en-US" b="1" dirty="0"/>
-              <a:t>What’s four plus four?</a:t>
-            </a:r>
-            <a:endParaRPr lang="en-US" b="0" dirty="0"/>
+              <a:t>Using some specific libraries (code other people wrote), it’s even possible to have graphical representations of the computer. If we tell Python to do a flip…</a:t>
+            </a:r>
           </a:p>
           <a:p>
             <a:pPr marL="171450" indent="-171450">
@@ -1729,10 +2242,9 @@
               <a:buChar char="•"/>
             </a:pPr>
             <a:r>
-              <a:rPr lang="en-US" b="0" dirty="0"/>
-              <a:t>It will spit out the answer.</a:t>
-            </a:r>
-            <a:endParaRPr lang="en-US" dirty="0"/>
+              <a:rPr lang="en-US" dirty="0"/>
+              <a:t>It will flip.</a:t>
+            </a:r>
           </a:p>
         </p:txBody>
       </p:sp>
@@ -1762,7 +2274,7 @@
     </p:spTree>
     <p:extLst>
       <p:ext uri="{BB962C8B-B14F-4D97-AF65-F5344CB8AC3E}">
-        <p14:creationId xmlns:p14="http://schemas.microsoft.com/office/powerpoint/2010/main" val="1416537075"/>
+        <p14:creationId xmlns:p14="http://schemas.microsoft.com/office/powerpoint/2010/main" val="660534005"/>
       </p:ext>
     </p:extLst>
   </p:cSld>
@@ -1822,7 +2334,7 @@
             </a:pPr>
             <a:r>
               <a:rPr lang="en-US" dirty="0"/>
-              <a:t>Using some specific libraries (code other people wrote), it’s even possible to have graphical representations of the computer. If we tell Python to do a flip…</a:t>
+              <a:t>So, how does this actually translate into real Python code?</a:t>
             </a:r>
           </a:p>
           <a:p>
@@ -1832,7 +2344,47 @@
             </a:pPr>
             <a:r>
               <a:rPr lang="en-US" dirty="0"/>
-              <a:t>It will flip.</a:t>
+              <a:t>Really, it’s not too different from the text – but there are some specific format needs (or SYNTAX) that must be followed.</a:t>
+            </a:r>
+          </a:p>
+          <a:p>
+            <a:pPr marL="171450" indent="-171450">
+              <a:buFont typeface="Arial" panose="020B0604020202020204" pitchFamily="34" charset="0"/>
+              <a:buChar char="•"/>
+            </a:pPr>
+            <a:r>
+              <a:rPr lang="en-US" dirty="0"/>
+              <a:t>Each line here is a command or statement. Those are the same thing for our purposes.</a:t>
+            </a:r>
+          </a:p>
+          <a:p>
+            <a:pPr marL="171450" indent="-171450">
+              <a:buFont typeface="Arial" panose="020B0604020202020204" pitchFamily="34" charset="0"/>
+              <a:buChar char="•"/>
+            </a:pPr>
+            <a:r>
+              <a:rPr lang="en-US" dirty="0"/>
+              <a:t>Each statement does something very specific – the snake does exactly what you tell it, as long as it knows how!</a:t>
+            </a:r>
+          </a:p>
+          <a:p>
+            <a:pPr marL="171450" indent="-171450">
+              <a:buFont typeface="Arial" panose="020B0604020202020204" pitchFamily="34" charset="0"/>
+              <a:buChar char="•"/>
+            </a:pPr>
+            <a:r>
+              <a:rPr lang="en-US" dirty="0"/>
+              <a:t>It’s really important to spell everything correctly</a:t>
+            </a:r>
+          </a:p>
+          <a:p>
+            <a:pPr marL="171450" indent="-171450">
+              <a:buFont typeface="Arial" panose="020B0604020202020204" pitchFamily="34" charset="0"/>
+              <a:buChar char="•"/>
+            </a:pPr>
+            <a:r>
+              <a:rPr lang="en-US" dirty="0"/>
+              <a:t>Things like parentheses, quotation marks, and periods all need to be in the right place. They are super important! When in doubt, try to make sure everything you’re typing matches exactly.</a:t>
             </a:r>
           </a:p>
         </p:txBody>
@@ -1863,7 +2415,7 @@
     </p:spTree>
     <p:extLst>
       <p:ext uri="{BB962C8B-B14F-4D97-AF65-F5344CB8AC3E}">
-        <p14:creationId xmlns:p14="http://schemas.microsoft.com/office/powerpoint/2010/main" val="660534005"/>
+        <p14:creationId xmlns:p14="http://schemas.microsoft.com/office/powerpoint/2010/main" val="3704454224"/>
       </p:ext>
     </p:extLst>
   </p:cSld>
@@ -1917,64 +2469,7 @@
           <a:bodyPr/>
           <a:lstStyle/>
           <a:p>
-            <a:pPr marL="171450" indent="-171450">
-              <a:buFont typeface="Arial" panose="020B0604020202020204" pitchFamily="34" charset="0"/>
-              <a:buChar char="•"/>
-            </a:pPr>
-            <a:r>
-              <a:rPr lang="en-US" dirty="0"/>
-              <a:t>So, how does this actually translate into real Python code?</a:t>
-            </a:r>
-          </a:p>
-          <a:p>
-            <a:pPr marL="171450" indent="-171450">
-              <a:buFont typeface="Arial" panose="020B0604020202020204" pitchFamily="34" charset="0"/>
-              <a:buChar char="•"/>
-            </a:pPr>
-            <a:r>
-              <a:rPr lang="en-US" dirty="0"/>
-              <a:t>Really, it’s not too different from the text – but there are some specific format needs (or SYNTAX) that must be followed.</a:t>
-            </a:r>
-          </a:p>
-          <a:p>
-            <a:pPr marL="171450" indent="-171450">
-              <a:buFont typeface="Arial" panose="020B0604020202020204" pitchFamily="34" charset="0"/>
-              <a:buChar char="•"/>
-            </a:pPr>
-            <a:r>
-              <a:rPr lang="en-US" dirty="0"/>
-              <a:t>Each line here is a command or statement. Those are the same thing for our purposes.</a:t>
-            </a:r>
-          </a:p>
-          <a:p>
-            <a:pPr marL="171450" indent="-171450">
-              <a:buFont typeface="Arial" panose="020B0604020202020204" pitchFamily="34" charset="0"/>
-              <a:buChar char="•"/>
-            </a:pPr>
-            <a:r>
-              <a:rPr lang="en-US" dirty="0"/>
-              <a:t>Each statement does something very specific – the snake does exactly what you tell it, as long as it knows how!</a:t>
-            </a:r>
-          </a:p>
-          <a:p>
-            <a:pPr marL="171450" indent="-171450">
-              <a:buFont typeface="Arial" panose="020B0604020202020204" pitchFamily="34" charset="0"/>
-              <a:buChar char="•"/>
-            </a:pPr>
-            <a:r>
-              <a:rPr lang="en-US" dirty="0"/>
-              <a:t>It’s really important to spell everything correctly</a:t>
-            </a:r>
-          </a:p>
-          <a:p>
-            <a:pPr marL="171450" indent="-171450">
-              <a:buFont typeface="Arial" panose="020B0604020202020204" pitchFamily="34" charset="0"/>
-              <a:buChar char="•"/>
-            </a:pPr>
-            <a:r>
-              <a:rPr lang="en-US" dirty="0"/>
-              <a:t>Things like parentheses, quotation marks, and periods all need to be in the right place. They are super important! When in doubt, try to make sure everything you’re typing matches exactly.</a:t>
-            </a:r>
+            <a:endParaRPr lang="en-US" dirty="0"/>
           </a:p>
         </p:txBody>
       </p:sp>
@@ -2004,7 +2499,7 @@
     </p:spTree>
     <p:extLst>
       <p:ext uri="{BB962C8B-B14F-4D97-AF65-F5344CB8AC3E}">
-        <p14:creationId xmlns:p14="http://schemas.microsoft.com/office/powerpoint/2010/main" val="3704454224"/>
+        <p14:creationId xmlns:p14="http://schemas.microsoft.com/office/powerpoint/2010/main" val="2324409365"/>
       </p:ext>
     </p:extLst>
   </p:cSld>
@@ -2079,7 +2574,7 @@
           <a:p>
             <a:fld id="{58794465-180C-46F3-B270-18D6C421C221}" type="slidenum">
               <a:rPr lang="en-US" smtClean="0"/>
-              <a:t>10</a:t>
+              <a:t>26</a:t>
             </a:fld>
             <a:endParaRPr lang="en-US"/>
           </a:p>
@@ -2088,7 +2583,7 @@
     </p:spTree>
     <p:extLst>
       <p:ext uri="{BB962C8B-B14F-4D97-AF65-F5344CB8AC3E}">
-        <p14:creationId xmlns:p14="http://schemas.microsoft.com/office/powerpoint/2010/main" val="2324409365"/>
+        <p14:creationId xmlns:p14="http://schemas.microsoft.com/office/powerpoint/2010/main" val="770907388"/>
       </p:ext>
     </p:extLst>
   </p:cSld>
@@ -2245,7 +2740,7 @@
           <a:p>
             <a:fld id="{9ED8E289-1C12-4E95-8FE8-FF2F994E0C49}" type="datetimeFigureOut">
               <a:rPr lang="en-US" smtClean="0"/>
-              <a:t>8/26/2026</a:t>
+              <a:t>9/9/2026</a:t>
             </a:fld>
             <a:endParaRPr lang="en-US"/>
           </a:p>
@@ -2443,7 +2938,7 @@
           <a:p>
             <a:fld id="{9ED8E289-1C12-4E95-8FE8-FF2F994E0C49}" type="datetimeFigureOut">
               <a:rPr lang="en-US" smtClean="0"/>
-              <a:t>8/26/2026</a:t>
+              <a:t>9/9/2026</a:t>
             </a:fld>
             <a:endParaRPr lang="en-US"/>
           </a:p>
@@ -2651,7 +3146,7 @@
           <a:p>
             <a:fld id="{9ED8E289-1C12-4E95-8FE8-FF2F994E0C49}" type="datetimeFigureOut">
               <a:rPr lang="en-US" smtClean="0"/>
-              <a:t>8/26/2026</a:t>
+              <a:t>9/9/2026</a:t>
             </a:fld>
             <a:endParaRPr lang="en-US"/>
           </a:p>
@@ -2849,7 +3344,7 @@
           <a:p>
             <a:fld id="{9ED8E289-1C12-4E95-8FE8-FF2F994E0C49}" type="datetimeFigureOut">
               <a:rPr lang="en-US" smtClean="0"/>
-              <a:t>8/26/2026</a:t>
+              <a:t>9/9/2026</a:t>
             </a:fld>
             <a:endParaRPr lang="en-US"/>
           </a:p>
@@ -3124,7 +3619,7 @@
           <a:p>
             <a:fld id="{9ED8E289-1C12-4E95-8FE8-FF2F994E0C49}" type="datetimeFigureOut">
               <a:rPr lang="en-US" smtClean="0"/>
-              <a:t>8/26/2026</a:t>
+              <a:t>9/9/2026</a:t>
             </a:fld>
             <a:endParaRPr lang="en-US"/>
           </a:p>
@@ -3389,7 +3884,7 @@
           <a:p>
             <a:fld id="{9ED8E289-1C12-4E95-8FE8-FF2F994E0C49}" type="datetimeFigureOut">
               <a:rPr lang="en-US" smtClean="0"/>
-              <a:t>8/26/2026</a:t>
+              <a:t>9/9/2026</a:t>
             </a:fld>
             <a:endParaRPr lang="en-US"/>
           </a:p>
@@ -3801,7 +4296,7 @@
           <a:p>
             <a:fld id="{9ED8E289-1C12-4E95-8FE8-FF2F994E0C49}" type="datetimeFigureOut">
               <a:rPr lang="en-US" smtClean="0"/>
-              <a:t>8/26/2026</a:t>
+              <a:t>9/9/2026</a:t>
             </a:fld>
             <a:endParaRPr lang="en-US"/>
           </a:p>
@@ -3942,7 +4437,7 @@
           <a:p>
             <a:fld id="{9ED8E289-1C12-4E95-8FE8-FF2F994E0C49}" type="datetimeFigureOut">
               <a:rPr lang="en-US" smtClean="0"/>
-              <a:t>8/26/2026</a:t>
+              <a:t>9/9/2026</a:t>
             </a:fld>
             <a:endParaRPr lang="en-US"/>
           </a:p>
@@ -4055,7 +4550,7 @@
           <a:p>
             <a:fld id="{9ED8E289-1C12-4E95-8FE8-FF2F994E0C49}" type="datetimeFigureOut">
               <a:rPr lang="en-US" smtClean="0"/>
-              <a:t>8/26/2026</a:t>
+              <a:t>9/9/2026</a:t>
             </a:fld>
             <a:endParaRPr lang="en-US"/>
           </a:p>
@@ -4366,7 +4861,7 @@
           <a:p>
             <a:fld id="{9ED8E289-1C12-4E95-8FE8-FF2F994E0C49}" type="datetimeFigureOut">
               <a:rPr lang="en-US" smtClean="0"/>
-              <a:t>8/26/2026</a:t>
+              <a:t>9/9/2026</a:t>
             </a:fld>
             <a:endParaRPr lang="en-US"/>
           </a:p>
@@ -4654,7 +5149,7 @@
           <a:p>
             <a:fld id="{9ED8E289-1C12-4E95-8FE8-FF2F994E0C49}" type="datetimeFigureOut">
               <a:rPr lang="en-US" smtClean="0"/>
-              <a:t>8/26/2026</a:t>
+              <a:t>9/9/2026</a:t>
             </a:fld>
             <a:endParaRPr lang="en-US"/>
           </a:p>
@@ -4895,7 +5390,7 @@
           <a:p>
             <a:fld id="{9ED8E289-1C12-4E95-8FE8-FF2F994E0C49}" type="datetimeFigureOut">
               <a:rPr lang="en-US" smtClean="0"/>
-              <a:t>8/26/2026</a:t>
+              <a:t>9/9/2026</a:t>
             </a:fld>
             <a:endParaRPr lang="en-US"/>
           </a:p>
@@ -5517,384 +6012,6 @@
 </file>
 
 <file path=ppt/slides/slide10.xml><?xml version="1.0" encoding="utf-8"?>
-<p:sld xmlns:a="http://schemas.openxmlformats.org/drawingml/2006/main" xmlns:r="http://schemas.openxmlformats.org/officeDocument/2006/relationships" xmlns:p="http://schemas.openxmlformats.org/presentationml/2006/main">
-  <p:cSld>
-    <p:spTree>
-      <p:nvGrpSpPr>
-        <p:cNvPr id="1" name=""/>
-        <p:cNvGrpSpPr/>
-        <p:nvPr/>
-      </p:nvGrpSpPr>
-      <p:grpSpPr>
-        <a:xfrm>
-          <a:off x="0" y="0"/>
-          <a:ext cx="0" cy="0"/>
-          <a:chOff x="0" y="0"/>
-          <a:chExt cx="0" cy="0"/>
-        </a:xfrm>
-      </p:grpSpPr>
-      <p:sp>
-        <p:nvSpPr>
-          <p:cNvPr id="5" name="TextBox 4">
-            <a:extLst>
-              <a:ext uri="{FF2B5EF4-FFF2-40B4-BE49-F238E27FC236}">
-                <a16:creationId xmlns:a16="http://schemas.microsoft.com/office/drawing/2014/main" id="{95ED940D-4F78-01CF-752B-E9085274FFC7}"/>
-              </a:ext>
-            </a:extLst>
-          </p:cNvPr>
-          <p:cNvSpPr txBox="1"/>
-          <p:nvPr/>
-        </p:nvSpPr>
-        <p:spPr>
-          <a:xfrm>
-            <a:off x="1308100" y="1562383"/>
-            <a:ext cx="9575800" cy="4708981"/>
-          </a:xfrm>
-          <a:prstGeom prst="rect">
-            <a:avLst/>
-          </a:prstGeom>
-          <a:noFill/>
-        </p:spPr>
-        <p:txBody>
-          <a:bodyPr wrap="square">
-            <a:spAutoFit/>
-          </a:bodyPr>
-          <a:lstStyle/>
-          <a:p>
-            <a:r>
-              <a:rPr lang="en-US" sz="2000" dirty="0">
-                <a:latin typeface="Consolas" panose="020B0609020204030204" pitchFamily="49" charset="0"/>
-              </a:rPr>
-              <a:t>                             ___-------___</a:t>
-            </a:r>
-          </a:p>
-          <a:p>
-            <a:r>
-              <a:rPr lang="en-US" sz="2000" dirty="0">
-                <a:latin typeface="Consolas" panose="020B0609020204030204" pitchFamily="49" charset="0"/>
-              </a:rPr>
-              <a:t>                         _-~~             ~~-_</a:t>
-            </a:r>
-          </a:p>
-          <a:p>
-            <a:r>
-              <a:rPr lang="en-US" sz="2000" dirty="0">
-                <a:latin typeface="Consolas" panose="020B0609020204030204" pitchFamily="49" charset="0"/>
-              </a:rPr>
-              <a:t>                      _-~                    /~-_</a:t>
-            </a:r>
-          </a:p>
-          <a:p>
-            <a:r>
-              <a:rPr lang="en-US" sz="2000" dirty="0">
-                <a:latin typeface="Consolas" panose="020B0609020204030204" pitchFamily="49" charset="0"/>
-              </a:rPr>
-              <a:t>   /^\__/^\         /~  \                   /    \</a:t>
-            </a:r>
-          </a:p>
-          <a:p>
-            <a:r>
-              <a:rPr lang="en-US" sz="2000" dirty="0">
-                <a:latin typeface="Consolas" panose="020B0609020204030204" pitchFamily="49" charset="0"/>
-              </a:rPr>
-              <a:t> /|  O|| O|        /      \_______________/        \</a:t>
-            </a:r>
-          </a:p>
-          <a:p>
-            <a:r>
-              <a:rPr lang="en-US" sz="2000" dirty="0">
-                <a:latin typeface="Consolas" panose="020B0609020204030204" pitchFamily="49" charset="0"/>
-              </a:rPr>
-              <a:t>| |___||__|      /       /                \          \</a:t>
-            </a:r>
-          </a:p>
-          <a:p>
-            <a:r>
-              <a:rPr lang="en-US" sz="2000" dirty="0">
-                <a:latin typeface="Consolas" panose="020B0609020204030204" pitchFamily="49" charset="0"/>
-              </a:rPr>
-              <a:t>|          \    /      /                    \          \</a:t>
-            </a:r>
-          </a:p>
-          <a:p>
-            <a:r>
-              <a:rPr lang="en-US" sz="2000" dirty="0">
-                <a:latin typeface="Consolas" panose="020B0609020204030204" pitchFamily="49" charset="0"/>
-              </a:rPr>
-              <a:t>|   (_______) /______/          </a:t>
-            </a:r>
-            <a:r>
-              <a:rPr lang="en-US" sz="2000" b="1" dirty="0">
-                <a:solidFill>
-                  <a:schemeClr val="tx2"/>
-                </a:solidFill>
-                <a:latin typeface="Consolas" panose="020B0609020204030204" pitchFamily="49" charset="0"/>
-              </a:rPr>
-              <a:t>TURTLE</a:t>
-            </a:r>
-            <a:r>
-              <a:rPr lang="en-US" sz="2000" dirty="0">
-                <a:latin typeface="Consolas" panose="020B0609020204030204" pitchFamily="49" charset="0"/>
-              </a:rPr>
-              <a:t>       \_________ \</a:t>
-            </a:r>
-          </a:p>
-          <a:p>
-            <a:r>
-              <a:rPr lang="en-US" sz="2000" dirty="0">
-                <a:latin typeface="Consolas" panose="020B0609020204030204" pitchFamily="49" charset="0"/>
-              </a:rPr>
-              <a:t>|         / /         \      </a:t>
-            </a:r>
-            <a:r>
-              <a:rPr lang="en-US" sz="2000" b="1" dirty="0">
-                <a:solidFill>
-                  <a:schemeClr val="tx2"/>
-                </a:solidFill>
-                <a:latin typeface="Consolas" panose="020B0609020204030204" pitchFamily="49" charset="0"/>
-              </a:rPr>
-              <a:t>GRAPHICS</a:t>
-            </a:r>
-            <a:r>
-              <a:rPr lang="en-US" sz="2000" dirty="0">
-                <a:latin typeface="Consolas" panose="020B0609020204030204" pitchFamily="49" charset="0"/>
-              </a:rPr>
-              <a:t>       /            \</a:t>
-            </a:r>
-          </a:p>
-          <a:p>
-            <a:r>
-              <a:rPr lang="en-US" sz="2000" dirty="0">
-                <a:latin typeface="Consolas" panose="020B0609020204030204" pitchFamily="49" charset="0"/>
-              </a:rPr>
-              <a:t> \         \^\\         \                  /               \     /</a:t>
-            </a:r>
-          </a:p>
-          <a:p>
-            <a:r>
-              <a:rPr lang="en-US" sz="2000" dirty="0">
-                <a:latin typeface="Consolas" panose="020B0609020204030204" pitchFamily="49" charset="0"/>
-              </a:rPr>
-              <a:t>   \         ||           \______________/      _-_       //\__//</a:t>
-            </a:r>
-          </a:p>
-          <a:p>
-            <a:r>
-              <a:rPr lang="en-US" sz="2000" dirty="0">
-                <a:latin typeface="Consolas" panose="020B0609020204030204" pitchFamily="49" charset="0"/>
-              </a:rPr>
-              <a:t>     \       ||------_-~~-_ ------------- \ --/~   ~\    || __/</a:t>
-            </a:r>
-          </a:p>
-          <a:p>
-            <a:r>
-              <a:rPr lang="en-US" sz="2000" dirty="0">
-                <a:latin typeface="Consolas" panose="020B0609020204030204" pitchFamily="49" charset="0"/>
-              </a:rPr>
-              <a:t>       ~-----||====/~     |==================|       |/~~~~~</a:t>
-            </a:r>
-          </a:p>
-          <a:p>
-            <a:r>
-              <a:rPr lang="en-US" sz="2000" dirty="0">
-                <a:latin typeface="Consolas" panose="020B0609020204030204" pitchFamily="49" charset="0"/>
-              </a:rPr>
-              <a:t>        (_(__/  ./     /                    \_\      \.</a:t>
-            </a:r>
-          </a:p>
-          <a:p>
-            <a:r>
-              <a:rPr lang="en-US" sz="2000" dirty="0">
-                <a:latin typeface="Consolas" panose="020B0609020204030204" pitchFamily="49" charset="0"/>
-              </a:rPr>
-              <a:t>               (_(___/                         \_____)_)</a:t>
-            </a:r>
-          </a:p>
-        </p:txBody>
-      </p:sp>
-      <p:sp>
-        <p:nvSpPr>
-          <p:cNvPr id="10" name="TextBox 9">
-            <a:extLst>
-              <a:ext uri="{FF2B5EF4-FFF2-40B4-BE49-F238E27FC236}">
-                <a16:creationId xmlns:a16="http://schemas.microsoft.com/office/drawing/2014/main" id="{B086B709-30F6-C14C-9937-9FD4EB15E81A}"/>
-              </a:ext>
-            </a:extLst>
-          </p:cNvPr>
-          <p:cNvSpPr txBox="1"/>
-          <p:nvPr/>
-        </p:nvSpPr>
-        <p:spPr>
-          <a:xfrm>
-            <a:off x="-90312" y="-203980"/>
-            <a:ext cx="888385" cy="707886"/>
-          </a:xfrm>
-          <a:prstGeom prst="rect">
-            <a:avLst/>
-          </a:prstGeom>
-          <a:noFill/>
-        </p:spPr>
-        <p:txBody>
-          <a:bodyPr wrap="none" rtlCol="0">
-            <a:spAutoFit/>
-          </a:bodyPr>
-          <a:lstStyle/>
-          <a:p>
-            <a:r>
-              <a:rPr lang="en-US" sz="4000" dirty="0"/>
-              <a:t>🐢</a:t>
-            </a:r>
-          </a:p>
-        </p:txBody>
-      </p:sp>
-    </p:spTree>
-    <p:extLst>
-      <p:ext uri="{BB962C8B-B14F-4D97-AF65-F5344CB8AC3E}">
-        <p14:creationId xmlns:p14="http://schemas.microsoft.com/office/powerpoint/2010/main" val="2585959955"/>
-      </p:ext>
-    </p:extLst>
-  </p:cSld>
-  <p:clrMapOvr>
-    <a:masterClrMapping/>
-  </p:clrMapOvr>
-  <mc:AlternateContent xmlns:mc="http://schemas.openxmlformats.org/markup-compatibility/2006" xmlns:p159="http://schemas.microsoft.com/office/powerpoint/2015/09/main">
-    <mc:Choice Requires="p159">
-      <p:transition xmlns:p14="http://schemas.microsoft.com/office/powerpoint/2010/main" spd="slow" p14:dur="2000">
-        <p159:morph option="byObject"/>
-      </p:transition>
-    </mc:Choice>
-    <mc:Fallback xmlns="">
-      <p:transition spd="slow">
-        <p:fade/>
-      </p:transition>
-    </mc:Fallback>
-  </mc:AlternateContent>
-  <p:timing>
-    <p:tnLst>
-      <p:par>
-        <p:cTn id="1" dur="indefinite" restart="never" nodeType="tmRoot">
-          <p:childTnLst>
-            <p:seq concurrent="1" nextAc="seek">
-              <p:cTn id="2" dur="indefinite" nodeType="mainSeq">
-                <p:childTnLst>
-                  <p:par>
-                    <p:cTn id="3" fill="hold">
-                      <p:stCondLst>
-                        <p:cond delay="indefinite"/>
-                      </p:stCondLst>
-                      <p:childTnLst>
-                        <p:par>
-                          <p:cTn id="4" fill="hold">
-                            <p:stCondLst>
-                              <p:cond delay="0"/>
-                            </p:stCondLst>
-                            <p:childTnLst>
-                              <p:par>
-                                <p:cTn id="5" presetID="10" presetClass="entr" presetSubtype="0" fill="hold" grpId="0" nodeType="clickEffect">
-                                  <p:stCondLst>
-                                    <p:cond delay="0"/>
-                                  </p:stCondLst>
-                                  <p:childTnLst>
-                                    <p:set>
-                                      <p:cBhvr>
-                                        <p:cTn id="6" dur="1" fill="hold">
-                                          <p:stCondLst>
-                                            <p:cond delay="0"/>
-                                          </p:stCondLst>
-                                        </p:cTn>
-                                        <p:tgtEl>
-                                          <p:spTgt spid="5"/>
-                                        </p:tgtEl>
-                                        <p:attrNameLst>
-                                          <p:attrName>style.visibility</p:attrName>
-                                        </p:attrNameLst>
-                                      </p:cBhvr>
-                                      <p:to>
-                                        <p:strVal val="visible"/>
-                                      </p:to>
-                                    </p:set>
-                                    <p:animEffect transition="in" filter="fade">
-                                      <p:cBhvr>
-                                        <p:cTn id="7" dur="500"/>
-                                        <p:tgtEl>
-                                          <p:spTgt spid="5"/>
-                                        </p:tgtEl>
-                                      </p:cBhvr>
-                                    </p:animEffect>
-                                  </p:childTnLst>
-                                </p:cTn>
-                              </p:par>
-                              <p:par>
-                                <p:cTn id="8" presetID="10" presetClass="entr" presetSubtype="0" fill="hold" grpId="0" nodeType="withEffect">
-                                  <p:stCondLst>
-                                    <p:cond delay="0"/>
-                                  </p:stCondLst>
-                                  <p:childTnLst>
-                                    <p:set>
-                                      <p:cBhvr>
-                                        <p:cTn id="9" dur="1" fill="hold">
-                                          <p:stCondLst>
-                                            <p:cond delay="0"/>
-                                          </p:stCondLst>
-                                        </p:cTn>
-                                        <p:tgtEl>
-                                          <p:spTgt spid="10"/>
-                                        </p:tgtEl>
-                                        <p:attrNameLst>
-                                          <p:attrName>style.visibility</p:attrName>
-                                        </p:attrNameLst>
-                                      </p:cBhvr>
-                                      <p:to>
-                                        <p:strVal val="visible"/>
-                                      </p:to>
-                                    </p:set>
-                                    <p:animEffect transition="in" filter="fade">
-                                      <p:cBhvr>
-                                        <p:cTn id="10" dur="500"/>
-                                        <p:tgtEl>
-                                          <p:spTgt spid="10"/>
-                                        </p:tgtEl>
-                                      </p:cBhvr>
-                                    </p:animEffect>
-                                  </p:childTnLst>
-                                </p:cTn>
-                              </p:par>
-                            </p:childTnLst>
-                          </p:cTn>
-                        </p:par>
-                      </p:childTnLst>
-                    </p:cTn>
-                  </p:par>
-                </p:childTnLst>
-              </p:cTn>
-              <p:prevCondLst>
-                <p:cond evt="onPrev" delay="0">
-                  <p:tgtEl>
-                    <p:sldTgt/>
-                  </p:tgtEl>
-                </p:cond>
-              </p:prevCondLst>
-              <p:nextCondLst>
-                <p:cond evt="onNext" delay="0">
-                  <p:tgtEl>
-                    <p:sldTgt/>
-                  </p:tgtEl>
-                </p:cond>
-              </p:nextCondLst>
-            </p:seq>
-          </p:childTnLst>
-        </p:cTn>
-      </p:par>
-    </p:tnLst>
-    <p:bldLst>
-      <p:bldP spid="5" grpId="0"/>
-      <p:bldP spid="10" grpId="0"/>
-    </p:bldLst>
-  </p:timing>
-</p:sld>
-</file>
-
-<file path=ppt/slides/slide11.xml><?xml version="1.0" encoding="utf-8"?>
 <p:sld xmlns:a="http://schemas.openxmlformats.org/drawingml/2006/main" xmlns:r="http://schemas.openxmlformats.org/officeDocument/2006/relationships" xmlns:p="http://schemas.openxmlformats.org/presentationml/2006/main">
   <p:cSld>
     <p:spTree>
@@ -6747,7 +6864,7 @@
 </p:sld>
 </file>
 
-<file path=ppt/slides/slide12.xml><?xml version="1.0" encoding="utf-8"?>
+<file path=ppt/slides/slide11.xml><?xml version="1.0" encoding="utf-8"?>
 <p:sld xmlns:a="http://schemas.openxmlformats.org/drawingml/2006/main" xmlns:r="http://schemas.openxmlformats.org/officeDocument/2006/relationships" xmlns:p="http://schemas.openxmlformats.org/presentationml/2006/main">
   <p:cSld>
     <p:spTree>
@@ -7263,7 +7380,7 @@
 </p:sld>
 </file>
 
-<file path=ppt/slides/slide13.xml><?xml version="1.0" encoding="utf-8"?>
+<file path=ppt/slides/slide12.xml><?xml version="1.0" encoding="utf-8"?>
 <p:sld xmlns:a="http://schemas.openxmlformats.org/drawingml/2006/main" xmlns:r="http://schemas.openxmlformats.org/officeDocument/2006/relationships" xmlns:p="http://schemas.openxmlformats.org/presentationml/2006/main">
   <p:cSld>
     <p:spTree>
@@ -8003,7 +8120,7 @@
 </p:sld>
 </file>
 
-<file path=ppt/slides/slide14.xml><?xml version="1.0" encoding="utf-8"?>
+<file path=ppt/slides/slide13.xml><?xml version="1.0" encoding="utf-8"?>
 <p:sld xmlns:a="http://schemas.openxmlformats.org/drawingml/2006/main" xmlns:r="http://schemas.openxmlformats.org/officeDocument/2006/relationships" xmlns:p="http://schemas.openxmlformats.org/presentationml/2006/main">
   <p:cSld>
     <p:spTree>
@@ -8535,7 +8652,7 @@
 </p:sld>
 </file>
 
-<file path=ppt/slides/slide15.xml><?xml version="1.0" encoding="utf-8"?>
+<file path=ppt/slides/slide14.xml><?xml version="1.0" encoding="utf-8"?>
 <p:sld xmlns:a="http://schemas.openxmlformats.org/drawingml/2006/main" xmlns:r="http://schemas.openxmlformats.org/officeDocument/2006/relationships" xmlns:p="http://schemas.openxmlformats.org/presentationml/2006/main">
   <p:cSld>
     <p:spTree>
@@ -9516,7 +9633,7 @@
 </p:sld>
 </file>
 
-<file path=ppt/slides/slide16.xml><?xml version="1.0" encoding="utf-8"?>
+<file path=ppt/slides/slide15.xml><?xml version="1.0" encoding="utf-8"?>
 <p:sld xmlns:a="http://schemas.openxmlformats.org/drawingml/2006/main" xmlns:r="http://schemas.openxmlformats.org/officeDocument/2006/relationships" xmlns:p="http://schemas.openxmlformats.org/presentationml/2006/main">
   <p:cSld>
     <p:spTree>
@@ -10145,7 +10262,7 @@
 </p:sld>
 </file>
 
-<file path=ppt/slides/slide17.xml><?xml version="1.0" encoding="utf-8"?>
+<file path=ppt/slides/slide16.xml><?xml version="1.0" encoding="utf-8"?>
 <p:sld xmlns:a="http://schemas.openxmlformats.org/drawingml/2006/main" xmlns:r="http://schemas.openxmlformats.org/officeDocument/2006/relationships" xmlns:p="http://schemas.openxmlformats.org/presentationml/2006/main">
   <p:cSld>
     <p:spTree>
@@ -10658,7 +10775,7 @@
 </p:sld>
 </file>
 
-<file path=ppt/slides/slide18.xml><?xml version="1.0" encoding="utf-8"?>
+<file path=ppt/slides/slide17.xml><?xml version="1.0" encoding="utf-8"?>
 <p:sld xmlns:a="http://schemas.openxmlformats.org/drawingml/2006/main" xmlns:r="http://schemas.openxmlformats.org/officeDocument/2006/relationships" xmlns:p="http://schemas.openxmlformats.org/presentationml/2006/main">
   <p:cSld>
     <p:spTree>
@@ -11139,7 +11256,7 @@
 </p:sld>
 </file>
 
-<file path=ppt/slides/slide19.xml><?xml version="1.0" encoding="utf-8"?>
+<file path=ppt/slides/slide18.xml><?xml version="1.0" encoding="utf-8"?>
 <p:sld xmlns:a="http://schemas.openxmlformats.org/drawingml/2006/main" xmlns:r="http://schemas.openxmlformats.org/officeDocument/2006/relationships" xmlns:p="http://schemas.openxmlformats.org/presentationml/2006/main">
   <p:cSld>
     <p:spTree>
@@ -11583,6 +11700,830 @@
     </p:tnLst>
     <p:bldLst>
       <p:bldP spid="7" grpId="0"/>
+    </p:bldLst>
+  </p:timing>
+</p:sld>
+</file>
+
+<file path=ppt/slides/slide19.xml><?xml version="1.0" encoding="utf-8"?>
+<p:sld xmlns:a="http://schemas.openxmlformats.org/drawingml/2006/main" xmlns:r="http://schemas.openxmlformats.org/officeDocument/2006/relationships" xmlns:p="http://schemas.openxmlformats.org/presentationml/2006/main">
+  <p:cSld>
+    <p:spTree>
+      <p:nvGrpSpPr>
+        <p:cNvPr id="1" name="">
+          <a:extLst>
+            <a:ext uri="{FF2B5EF4-FFF2-40B4-BE49-F238E27FC236}">
+              <a16:creationId xmlns:a16="http://schemas.microsoft.com/office/drawing/2014/main" id="{40B9B33B-69A4-631F-7EC7-B492D746C5CC}"/>
+            </a:ext>
+          </a:extLst>
+        </p:cNvPr>
+        <p:cNvGrpSpPr/>
+        <p:nvPr/>
+      </p:nvGrpSpPr>
+      <p:grpSpPr>
+        <a:xfrm>
+          <a:off x="0" y="0"/>
+          <a:ext cx="0" cy="0"/>
+          <a:chOff x="0" y="0"/>
+          <a:chExt cx="0" cy="0"/>
+        </a:xfrm>
+      </p:grpSpPr>
+      <p:sp>
+        <p:nvSpPr>
+          <p:cNvPr id="2" name="Title 1">
+            <a:extLst>
+              <a:ext uri="{FF2B5EF4-FFF2-40B4-BE49-F238E27FC236}">
+                <a16:creationId xmlns:a16="http://schemas.microsoft.com/office/drawing/2014/main" id="{473DEB99-B354-66E0-45D9-86DC4EAF0ABE}"/>
+              </a:ext>
+            </a:extLst>
+          </p:cNvPr>
+          <p:cNvSpPr>
+            <a:spLocks noGrp="1"/>
+          </p:cNvSpPr>
+          <p:nvPr>
+            <p:ph type="title"/>
+          </p:nvPr>
+        </p:nvSpPr>
+        <p:spPr>
+          <a:xfrm>
+            <a:off x="454378" y="3198636"/>
+            <a:ext cx="10515600" cy="1325563"/>
+          </a:xfrm>
+        </p:spPr>
+        <p:txBody>
+          <a:bodyPr/>
+          <a:lstStyle/>
+          <a:p>
+            <a:r>
+              <a:rPr lang="en-US" dirty="0"/>
+              <a:t>Q: What are these symbols?</a:t>
+            </a:r>
+          </a:p>
+        </p:txBody>
+      </p:sp>
+      <p:sp>
+        <p:nvSpPr>
+          <p:cNvPr id="7" name="TextBox 6">
+            <a:extLst>
+              <a:ext uri="{FF2B5EF4-FFF2-40B4-BE49-F238E27FC236}">
+                <a16:creationId xmlns:a16="http://schemas.microsoft.com/office/drawing/2014/main" id="{74ADC3E8-80E1-A60F-26D7-4DDB822B1EBF}"/>
+              </a:ext>
+            </a:extLst>
+          </p:cNvPr>
+          <p:cNvSpPr txBox="1"/>
+          <p:nvPr/>
+        </p:nvSpPr>
+        <p:spPr>
+          <a:xfrm>
+            <a:off x="6254045" y="4908022"/>
+            <a:ext cx="5667022" cy="923330"/>
+          </a:xfrm>
+          <a:prstGeom prst="rect">
+            <a:avLst/>
+          </a:prstGeom>
+          <a:noFill/>
+        </p:spPr>
+        <p:txBody>
+          <a:bodyPr wrap="square">
+            <a:spAutoFit/>
+          </a:bodyPr>
+          <a:lstStyle/>
+          <a:p>
+            <a:r>
+              <a:rPr lang="en-US" sz="5400" dirty="0">
+                <a:solidFill>
+                  <a:schemeClr val="tx2"/>
+                </a:solidFill>
+              </a:rPr>
+              <a:t>Quotation marks</a:t>
+            </a:r>
+          </a:p>
+        </p:txBody>
+      </p:sp>
+      <p:sp>
+        <p:nvSpPr>
+          <p:cNvPr id="10" name="Content Placeholder 2">
+            <a:extLst>
+              <a:ext uri="{FF2B5EF4-FFF2-40B4-BE49-F238E27FC236}">
+                <a16:creationId xmlns:a16="http://schemas.microsoft.com/office/drawing/2014/main" id="{3FA0360A-FC21-2EC2-8599-8E3B6F771BF1}"/>
+              </a:ext>
+            </a:extLst>
+          </p:cNvPr>
+          <p:cNvSpPr txBox="1">
+            <a:spLocks/>
+          </p:cNvSpPr>
+          <p:nvPr/>
+        </p:nvSpPr>
+        <p:spPr>
+          <a:xfrm>
+            <a:off x="124178" y="418570"/>
+            <a:ext cx="11943644" cy="2020712"/>
+          </a:xfrm>
+          <a:prstGeom prst="rect">
+            <a:avLst/>
+          </a:prstGeom>
+          <a:solidFill>
+            <a:schemeClr val="bg2"/>
+          </a:solidFill>
+          <a:ln w="38100">
+            <a:solidFill>
+              <a:schemeClr val="tx1"/>
+            </a:solidFill>
+          </a:ln>
+        </p:spPr>
+        <p:txBody>
+          <a:bodyPr vert="horz" lIns="91440" tIns="45720" rIns="91440" bIns="45720" rtlCol="0" anchor="ctr">
+            <a:normAutofit/>
+          </a:bodyPr>
+          <a:lstStyle>
+            <a:lvl1pPr marL="0" indent="0" algn="ctr" defTabSz="914400" rtl="0" eaLnBrk="1" latinLnBrk="0" hangingPunct="1">
+              <a:lnSpc>
+                <a:spcPct val="90000"/>
+              </a:lnSpc>
+              <a:spcBef>
+                <a:spcPts val="1000"/>
+              </a:spcBef>
+              <a:buFont typeface="Arial" panose="020B0604020202020204" pitchFamily="34" charset="0"/>
+              <a:buNone/>
+              <a:defRPr sz="2400" kern="1200">
+                <a:solidFill>
+                  <a:schemeClr val="tx1"/>
+                </a:solidFill>
+                <a:latin typeface="+mn-lt"/>
+                <a:ea typeface="+mn-ea"/>
+                <a:cs typeface="+mn-cs"/>
+              </a:defRPr>
+            </a:lvl1pPr>
+            <a:lvl2pPr marL="457200" indent="0" algn="ctr" defTabSz="914400" rtl="0" eaLnBrk="1" latinLnBrk="0" hangingPunct="1">
+              <a:lnSpc>
+                <a:spcPct val="90000"/>
+              </a:lnSpc>
+              <a:spcBef>
+                <a:spcPts val="500"/>
+              </a:spcBef>
+              <a:buFont typeface="Arial" panose="020B0604020202020204" pitchFamily="34" charset="0"/>
+              <a:buNone/>
+              <a:defRPr sz="2000" kern="1200">
+                <a:solidFill>
+                  <a:schemeClr val="tx1"/>
+                </a:solidFill>
+                <a:latin typeface="+mn-lt"/>
+                <a:ea typeface="+mn-ea"/>
+                <a:cs typeface="+mn-cs"/>
+              </a:defRPr>
+            </a:lvl2pPr>
+            <a:lvl3pPr marL="914400" indent="0" algn="ctr" defTabSz="914400" rtl="0" eaLnBrk="1" latinLnBrk="0" hangingPunct="1">
+              <a:lnSpc>
+                <a:spcPct val="90000"/>
+              </a:lnSpc>
+              <a:spcBef>
+                <a:spcPts val="500"/>
+              </a:spcBef>
+              <a:buFont typeface="Arial" panose="020B0604020202020204" pitchFamily="34" charset="0"/>
+              <a:buNone/>
+              <a:defRPr sz="1800" kern="1200">
+                <a:solidFill>
+                  <a:schemeClr val="tx1"/>
+                </a:solidFill>
+                <a:latin typeface="+mn-lt"/>
+                <a:ea typeface="+mn-ea"/>
+                <a:cs typeface="+mn-cs"/>
+              </a:defRPr>
+            </a:lvl3pPr>
+            <a:lvl4pPr marL="1371600" indent="0" algn="ctr" defTabSz="914400" rtl="0" eaLnBrk="1" latinLnBrk="0" hangingPunct="1">
+              <a:lnSpc>
+                <a:spcPct val="90000"/>
+              </a:lnSpc>
+              <a:spcBef>
+                <a:spcPts val="500"/>
+              </a:spcBef>
+              <a:buFont typeface="Arial" panose="020B0604020202020204" pitchFamily="34" charset="0"/>
+              <a:buNone/>
+              <a:defRPr sz="1600" kern="1200">
+                <a:solidFill>
+                  <a:schemeClr val="tx1"/>
+                </a:solidFill>
+                <a:latin typeface="+mn-lt"/>
+                <a:ea typeface="+mn-ea"/>
+                <a:cs typeface="+mn-cs"/>
+              </a:defRPr>
+            </a:lvl4pPr>
+            <a:lvl5pPr marL="1828800" indent="0" algn="ctr" defTabSz="914400" rtl="0" eaLnBrk="1" latinLnBrk="0" hangingPunct="1">
+              <a:lnSpc>
+                <a:spcPct val="90000"/>
+              </a:lnSpc>
+              <a:spcBef>
+                <a:spcPts val="500"/>
+              </a:spcBef>
+              <a:buFont typeface="Arial" panose="020B0604020202020204" pitchFamily="34" charset="0"/>
+              <a:buNone/>
+              <a:defRPr sz="1600" kern="1200">
+                <a:solidFill>
+                  <a:schemeClr val="tx1"/>
+                </a:solidFill>
+                <a:latin typeface="+mn-lt"/>
+                <a:ea typeface="+mn-ea"/>
+                <a:cs typeface="+mn-cs"/>
+              </a:defRPr>
+            </a:lvl5pPr>
+            <a:lvl6pPr marL="2286000" indent="0" algn="ctr" defTabSz="914400" rtl="0" eaLnBrk="1" latinLnBrk="0" hangingPunct="1">
+              <a:lnSpc>
+                <a:spcPct val="90000"/>
+              </a:lnSpc>
+              <a:spcBef>
+                <a:spcPts val="500"/>
+              </a:spcBef>
+              <a:buFont typeface="Arial" panose="020B0604020202020204" pitchFamily="34" charset="0"/>
+              <a:buNone/>
+              <a:defRPr sz="1600" kern="1200">
+                <a:solidFill>
+                  <a:schemeClr val="tx1"/>
+                </a:solidFill>
+                <a:latin typeface="+mn-lt"/>
+                <a:ea typeface="+mn-ea"/>
+                <a:cs typeface="+mn-cs"/>
+              </a:defRPr>
+            </a:lvl6pPr>
+            <a:lvl7pPr marL="2743200" indent="0" algn="ctr" defTabSz="914400" rtl="0" eaLnBrk="1" latinLnBrk="0" hangingPunct="1">
+              <a:lnSpc>
+                <a:spcPct val="90000"/>
+              </a:lnSpc>
+              <a:spcBef>
+                <a:spcPts val="500"/>
+              </a:spcBef>
+              <a:buFont typeface="Arial" panose="020B0604020202020204" pitchFamily="34" charset="0"/>
+              <a:buNone/>
+              <a:defRPr sz="1600" kern="1200">
+                <a:solidFill>
+                  <a:schemeClr val="tx1"/>
+                </a:solidFill>
+                <a:latin typeface="+mn-lt"/>
+                <a:ea typeface="+mn-ea"/>
+                <a:cs typeface="+mn-cs"/>
+              </a:defRPr>
+            </a:lvl7pPr>
+            <a:lvl8pPr marL="3200400" indent="0" algn="ctr" defTabSz="914400" rtl="0" eaLnBrk="1" latinLnBrk="0" hangingPunct="1">
+              <a:lnSpc>
+                <a:spcPct val="90000"/>
+              </a:lnSpc>
+              <a:spcBef>
+                <a:spcPts val="500"/>
+              </a:spcBef>
+              <a:buFont typeface="Arial" panose="020B0604020202020204" pitchFamily="34" charset="0"/>
+              <a:buNone/>
+              <a:defRPr sz="1600" kern="1200">
+                <a:solidFill>
+                  <a:schemeClr val="tx1"/>
+                </a:solidFill>
+                <a:latin typeface="+mn-lt"/>
+                <a:ea typeface="+mn-ea"/>
+                <a:cs typeface="+mn-cs"/>
+              </a:defRPr>
+            </a:lvl8pPr>
+            <a:lvl9pPr marL="3657600" indent="0" algn="ctr" defTabSz="914400" rtl="0" eaLnBrk="1" latinLnBrk="0" hangingPunct="1">
+              <a:lnSpc>
+                <a:spcPct val="90000"/>
+              </a:lnSpc>
+              <a:spcBef>
+                <a:spcPts val="500"/>
+              </a:spcBef>
+              <a:buFont typeface="Arial" panose="020B0604020202020204" pitchFamily="34" charset="0"/>
+              <a:buNone/>
+              <a:defRPr sz="1600" kern="1200">
+                <a:solidFill>
+                  <a:schemeClr val="tx1"/>
+                </a:solidFill>
+                <a:latin typeface="+mn-lt"/>
+                <a:ea typeface="+mn-ea"/>
+                <a:cs typeface="+mn-cs"/>
+              </a:defRPr>
+            </a:lvl9pPr>
+          </a:lstStyle>
+          <a:p>
+            <a:r>
+              <a:rPr lang="en-US" sz="8000" dirty="0" err="1">
+                <a:solidFill>
+                  <a:srgbClr val="FF9DA4"/>
+                </a:solidFill>
+                <a:latin typeface="Consolas" panose="020B0609020204030204" pitchFamily="49" charset="0"/>
+              </a:rPr>
+              <a:t>crush</a:t>
+            </a:r>
+            <a:r>
+              <a:rPr lang="en-US" sz="8000" dirty="0" err="1">
+                <a:solidFill>
+                  <a:srgbClr val="FFFFFF"/>
+                </a:solidFill>
+                <a:latin typeface="Consolas" panose="020B0609020204030204" pitchFamily="49" charset="0"/>
+              </a:rPr>
+              <a:t>.</a:t>
+            </a:r>
+            <a:r>
+              <a:rPr lang="en-US" sz="8000" dirty="0" err="1">
+                <a:solidFill>
+                  <a:srgbClr val="BBDAFF"/>
+                </a:solidFill>
+                <a:latin typeface="Consolas" panose="020B0609020204030204" pitchFamily="49" charset="0"/>
+              </a:rPr>
+              <a:t>write</a:t>
+            </a:r>
+            <a:r>
+              <a:rPr lang="en-US" sz="8000" dirty="0">
+                <a:solidFill>
+                  <a:srgbClr val="BBDAFF"/>
+                </a:solidFill>
+                <a:latin typeface="Consolas" panose="020B0609020204030204" pitchFamily="49" charset="0"/>
+              </a:rPr>
+              <a:t>(</a:t>
+            </a:r>
+            <a:r>
+              <a:rPr lang="en-US" sz="8000" dirty="0">
+                <a:solidFill>
+                  <a:srgbClr val="D1F1A9"/>
+                </a:solidFill>
+                <a:latin typeface="Consolas" panose="020B0609020204030204" pitchFamily="49" charset="0"/>
+              </a:rPr>
+              <a:t>"ahoy"</a:t>
+            </a:r>
+            <a:r>
+              <a:rPr lang="en-US" sz="8000" dirty="0">
+                <a:solidFill>
+                  <a:srgbClr val="BBDAFF"/>
+                </a:solidFill>
+                <a:latin typeface="Consolas" panose="020B0609020204030204" pitchFamily="49" charset="0"/>
+              </a:rPr>
+              <a:t>)</a:t>
+            </a:r>
+            <a:endParaRPr lang="en-US" sz="8000" dirty="0">
+              <a:solidFill>
+                <a:srgbClr val="FFFFFF"/>
+              </a:solidFill>
+              <a:latin typeface="Consolas" panose="020B0609020204030204" pitchFamily="49" charset="0"/>
+            </a:endParaRPr>
+          </a:p>
+        </p:txBody>
+      </p:sp>
+      <p:cxnSp>
+        <p:nvCxnSpPr>
+          <p:cNvPr id="4" name="Straight Arrow Connector 3">
+            <a:extLst>
+              <a:ext uri="{FF2B5EF4-FFF2-40B4-BE49-F238E27FC236}">
+                <a16:creationId xmlns:a16="http://schemas.microsoft.com/office/drawing/2014/main" id="{FBCC6C4C-808D-578D-F0B1-B52A3E205641}"/>
+              </a:ext>
+            </a:extLst>
+          </p:cNvPr>
+          <p:cNvCxnSpPr>
+            <a:cxnSpLocks/>
+            <a:endCxn id="5" idx="4"/>
+          </p:cNvCxnSpPr>
+          <p:nvPr/>
+        </p:nvCxnSpPr>
+        <p:spPr>
+          <a:xfrm flipV="1">
+            <a:off x="7667083" y="2053906"/>
+            <a:ext cx="70555" cy="1325563"/>
+          </a:xfrm>
+          <a:prstGeom prst="straightConnector1">
+            <a:avLst/>
+          </a:prstGeom>
+          <a:ln w="76200" cap="flat" cmpd="sng" algn="ctr">
+            <a:solidFill>
+              <a:schemeClr val="accent5"/>
+            </a:solidFill>
+            <a:prstDash val="solid"/>
+            <a:round/>
+            <a:headEnd type="none" w="med" len="med"/>
+            <a:tailEnd type="arrow" w="med" len="med"/>
+          </a:ln>
+        </p:spPr>
+        <p:style>
+          <a:lnRef idx="0">
+            <a:scrgbClr r="0" g="0" b="0"/>
+          </a:lnRef>
+          <a:fillRef idx="0">
+            <a:scrgbClr r="0" g="0" b="0"/>
+          </a:fillRef>
+          <a:effectRef idx="0">
+            <a:scrgbClr r="0" g="0" b="0"/>
+          </a:effectRef>
+          <a:fontRef idx="minor">
+            <a:schemeClr val="tx1"/>
+          </a:fontRef>
+        </p:style>
+      </p:cxnSp>
+      <p:sp>
+        <p:nvSpPr>
+          <p:cNvPr id="5" name="Oval 4">
+            <a:extLst>
+              <a:ext uri="{FF2B5EF4-FFF2-40B4-BE49-F238E27FC236}">
+                <a16:creationId xmlns:a16="http://schemas.microsoft.com/office/drawing/2014/main" id="{ADBBBFBE-84F3-4125-2815-7705EE2BA569}"/>
+              </a:ext>
+            </a:extLst>
+          </p:cNvPr>
+          <p:cNvSpPr/>
+          <p:nvPr/>
+        </p:nvSpPr>
+        <p:spPr>
+          <a:xfrm>
+            <a:off x="7413082" y="706184"/>
+            <a:ext cx="649111" cy="1347722"/>
+          </a:xfrm>
+          <a:prstGeom prst="ellipse">
+            <a:avLst/>
+          </a:prstGeom>
+          <a:noFill/>
+          <a:ln w="76200">
+            <a:solidFill>
+              <a:schemeClr val="accent5"/>
+            </a:solidFill>
+          </a:ln>
+        </p:spPr>
+        <p:style>
+          <a:lnRef idx="2">
+            <a:schemeClr val="accent1">
+              <a:shade val="15000"/>
+            </a:schemeClr>
+          </a:lnRef>
+          <a:fillRef idx="1">
+            <a:schemeClr val="accent1"/>
+          </a:fillRef>
+          <a:effectRef idx="0">
+            <a:schemeClr val="accent1"/>
+          </a:effectRef>
+          <a:fontRef idx="minor">
+            <a:schemeClr val="lt1"/>
+          </a:fontRef>
+        </p:style>
+        <p:txBody>
+          <a:bodyPr rtlCol="0" anchor="ctr"/>
+          <a:lstStyle/>
+          <a:p>
+            <a:pPr algn="ctr"/>
+            <a:endParaRPr lang="en-US"/>
+          </a:p>
+        </p:txBody>
+      </p:sp>
+      <p:cxnSp>
+        <p:nvCxnSpPr>
+          <p:cNvPr id="8" name="Straight Arrow Connector 7">
+            <a:extLst>
+              <a:ext uri="{FF2B5EF4-FFF2-40B4-BE49-F238E27FC236}">
+                <a16:creationId xmlns:a16="http://schemas.microsoft.com/office/drawing/2014/main" id="{97029B3A-C435-91A1-C041-61390A314F03}"/>
+              </a:ext>
+            </a:extLst>
+          </p:cNvPr>
+          <p:cNvCxnSpPr>
+            <a:cxnSpLocks/>
+            <a:endCxn id="13" idx="3"/>
+          </p:cNvCxnSpPr>
+          <p:nvPr/>
+        </p:nvCxnSpPr>
+        <p:spPr>
+          <a:xfrm flipV="1">
+            <a:off x="8376356" y="1919028"/>
+            <a:ext cx="1946437" cy="1509972"/>
+          </a:xfrm>
+          <a:prstGeom prst="straightConnector1">
+            <a:avLst/>
+          </a:prstGeom>
+          <a:ln w="76200" cap="flat" cmpd="sng" algn="ctr">
+            <a:solidFill>
+              <a:schemeClr val="accent5"/>
+            </a:solidFill>
+            <a:prstDash val="solid"/>
+            <a:round/>
+            <a:headEnd type="none" w="med" len="med"/>
+            <a:tailEnd type="arrow" w="med" len="med"/>
+          </a:ln>
+        </p:spPr>
+        <p:style>
+          <a:lnRef idx="0">
+            <a:scrgbClr r="0" g="0" b="0"/>
+          </a:lnRef>
+          <a:fillRef idx="0">
+            <a:scrgbClr r="0" g="0" b="0"/>
+          </a:fillRef>
+          <a:effectRef idx="0">
+            <a:scrgbClr r="0" g="0" b="0"/>
+          </a:effectRef>
+          <a:fontRef idx="minor">
+            <a:schemeClr val="tx1"/>
+          </a:fontRef>
+        </p:style>
+      </p:cxnSp>
+      <p:sp>
+        <p:nvSpPr>
+          <p:cNvPr id="13" name="Oval 12">
+            <a:extLst>
+              <a:ext uri="{FF2B5EF4-FFF2-40B4-BE49-F238E27FC236}">
+                <a16:creationId xmlns:a16="http://schemas.microsoft.com/office/drawing/2014/main" id="{CBDE5943-8C9D-9A92-280A-14B777AA3E97}"/>
+              </a:ext>
+            </a:extLst>
+          </p:cNvPr>
+          <p:cNvSpPr/>
+          <p:nvPr/>
+        </p:nvSpPr>
+        <p:spPr>
+          <a:xfrm>
+            <a:off x="10227733" y="768675"/>
+            <a:ext cx="649111" cy="1347722"/>
+          </a:xfrm>
+          <a:prstGeom prst="ellipse">
+            <a:avLst/>
+          </a:prstGeom>
+          <a:noFill/>
+          <a:ln w="76200">
+            <a:solidFill>
+              <a:schemeClr val="accent5"/>
+            </a:solidFill>
+          </a:ln>
+        </p:spPr>
+        <p:style>
+          <a:lnRef idx="2">
+            <a:schemeClr val="accent1">
+              <a:shade val="15000"/>
+            </a:schemeClr>
+          </a:lnRef>
+          <a:fillRef idx="1">
+            <a:schemeClr val="accent1"/>
+          </a:fillRef>
+          <a:effectRef idx="0">
+            <a:schemeClr val="accent1"/>
+          </a:effectRef>
+          <a:fontRef idx="minor">
+            <a:schemeClr val="lt1"/>
+          </a:fontRef>
+        </p:style>
+        <p:txBody>
+          <a:bodyPr rtlCol="0" anchor="ctr"/>
+          <a:lstStyle/>
+          <a:p>
+            <a:pPr algn="ctr"/>
+            <a:endParaRPr lang="en-US"/>
+          </a:p>
+        </p:txBody>
+      </p:sp>
+    </p:spTree>
+    <p:extLst>
+      <p:ext uri="{BB962C8B-B14F-4D97-AF65-F5344CB8AC3E}">
+        <p14:creationId xmlns:p14="http://schemas.microsoft.com/office/powerpoint/2010/main" val="77373794"/>
+      </p:ext>
+    </p:extLst>
+  </p:cSld>
+  <p:clrMapOvr>
+    <a:masterClrMapping/>
+  </p:clrMapOvr>
+  <mc:AlternateContent xmlns:mc="http://schemas.openxmlformats.org/markup-compatibility/2006" xmlns:p159="http://schemas.microsoft.com/office/powerpoint/2015/09/main">
+    <mc:Choice Requires="p159">
+      <p:transition xmlns:p14="http://schemas.microsoft.com/office/powerpoint/2010/main" spd="slow" p14:dur="2000">
+        <p159:morph option="byObject"/>
+      </p:transition>
+    </mc:Choice>
+    <mc:Fallback xmlns="">
+      <p:transition spd="slow">
+        <p:fade/>
+      </p:transition>
+    </mc:Fallback>
+  </mc:AlternateContent>
+  <p:timing>
+    <p:tnLst>
+      <p:par>
+        <p:cTn id="1" dur="indefinite" restart="never" nodeType="tmRoot">
+          <p:childTnLst>
+            <p:seq concurrent="1" nextAc="seek">
+              <p:cTn id="2" dur="indefinite" nodeType="mainSeq">
+                <p:childTnLst>
+                  <p:par>
+                    <p:cTn id="3" fill="hold">
+                      <p:stCondLst>
+                        <p:cond delay="indefinite"/>
+                        <p:cond evt="onBegin" delay="0">
+                          <p:tn val="2"/>
+                        </p:cond>
+                      </p:stCondLst>
+                      <p:childTnLst>
+                        <p:par>
+                          <p:cTn id="4" fill="hold">
+                            <p:stCondLst>
+                              <p:cond delay="0"/>
+                            </p:stCondLst>
+                            <p:childTnLst>
+                              <p:par>
+                                <p:cTn id="5" presetID="10" presetClass="entr" presetSubtype="0" fill="hold" nodeType="afterEffect">
+                                  <p:stCondLst>
+                                    <p:cond delay="0"/>
+                                  </p:stCondLst>
+                                  <p:childTnLst>
+                                    <p:set>
+                                      <p:cBhvr>
+                                        <p:cTn id="6" dur="1" fill="hold">
+                                          <p:stCondLst>
+                                            <p:cond delay="0"/>
+                                          </p:stCondLst>
+                                        </p:cTn>
+                                        <p:tgtEl>
+                                          <p:spTgt spid="4"/>
+                                        </p:tgtEl>
+                                        <p:attrNameLst>
+                                          <p:attrName>style.visibility</p:attrName>
+                                        </p:attrNameLst>
+                                      </p:cBhvr>
+                                      <p:to>
+                                        <p:strVal val="visible"/>
+                                      </p:to>
+                                    </p:set>
+                                    <p:animEffect transition="in" filter="fade">
+                                      <p:cBhvr>
+                                        <p:cTn id="7" dur="500"/>
+                                        <p:tgtEl>
+                                          <p:spTgt spid="4"/>
+                                        </p:tgtEl>
+                                      </p:cBhvr>
+                                    </p:animEffect>
+                                  </p:childTnLst>
+                                </p:cTn>
+                              </p:par>
+                              <p:par>
+                                <p:cTn id="8" presetID="10" presetClass="entr" presetSubtype="0" fill="hold" grpId="0" nodeType="withEffect">
+                                  <p:stCondLst>
+                                    <p:cond delay="0"/>
+                                  </p:stCondLst>
+                                  <p:childTnLst>
+                                    <p:set>
+                                      <p:cBhvr>
+                                        <p:cTn id="9" dur="1" fill="hold">
+                                          <p:stCondLst>
+                                            <p:cond delay="0"/>
+                                          </p:stCondLst>
+                                        </p:cTn>
+                                        <p:tgtEl>
+                                          <p:spTgt spid="5"/>
+                                        </p:tgtEl>
+                                        <p:attrNameLst>
+                                          <p:attrName>style.visibility</p:attrName>
+                                        </p:attrNameLst>
+                                      </p:cBhvr>
+                                      <p:to>
+                                        <p:strVal val="visible"/>
+                                      </p:to>
+                                    </p:set>
+                                    <p:animEffect transition="in" filter="fade">
+                                      <p:cBhvr>
+                                        <p:cTn id="10" dur="500"/>
+                                        <p:tgtEl>
+                                          <p:spTgt spid="5"/>
+                                        </p:tgtEl>
+                                      </p:cBhvr>
+                                    </p:animEffect>
+                                  </p:childTnLst>
+                                </p:cTn>
+                              </p:par>
+                              <p:par>
+                                <p:cTn id="11" presetID="10" presetClass="entr" presetSubtype="0" fill="hold" nodeType="withEffect">
+                                  <p:stCondLst>
+                                    <p:cond delay="0"/>
+                                  </p:stCondLst>
+                                  <p:childTnLst>
+                                    <p:set>
+                                      <p:cBhvr>
+                                        <p:cTn id="12" dur="1" fill="hold">
+                                          <p:stCondLst>
+                                            <p:cond delay="0"/>
+                                          </p:stCondLst>
+                                        </p:cTn>
+                                        <p:tgtEl>
+                                          <p:spTgt spid="8"/>
+                                        </p:tgtEl>
+                                        <p:attrNameLst>
+                                          <p:attrName>style.visibility</p:attrName>
+                                        </p:attrNameLst>
+                                      </p:cBhvr>
+                                      <p:to>
+                                        <p:strVal val="visible"/>
+                                      </p:to>
+                                    </p:set>
+                                    <p:animEffect transition="in" filter="fade">
+                                      <p:cBhvr>
+                                        <p:cTn id="13" dur="500"/>
+                                        <p:tgtEl>
+                                          <p:spTgt spid="8"/>
+                                        </p:tgtEl>
+                                      </p:cBhvr>
+                                    </p:animEffect>
+                                  </p:childTnLst>
+                                </p:cTn>
+                              </p:par>
+                              <p:par>
+                                <p:cTn id="14" presetID="10" presetClass="entr" presetSubtype="0" fill="hold" grpId="0" nodeType="withEffect">
+                                  <p:stCondLst>
+                                    <p:cond delay="0"/>
+                                  </p:stCondLst>
+                                  <p:childTnLst>
+                                    <p:set>
+                                      <p:cBhvr>
+                                        <p:cTn id="15" dur="1" fill="hold">
+                                          <p:stCondLst>
+                                            <p:cond delay="0"/>
+                                          </p:stCondLst>
+                                        </p:cTn>
+                                        <p:tgtEl>
+                                          <p:spTgt spid="13"/>
+                                        </p:tgtEl>
+                                        <p:attrNameLst>
+                                          <p:attrName>style.visibility</p:attrName>
+                                        </p:attrNameLst>
+                                      </p:cBhvr>
+                                      <p:to>
+                                        <p:strVal val="visible"/>
+                                      </p:to>
+                                    </p:set>
+                                    <p:animEffect transition="in" filter="fade">
+                                      <p:cBhvr>
+                                        <p:cTn id="16" dur="500"/>
+                                        <p:tgtEl>
+                                          <p:spTgt spid="13"/>
+                                        </p:tgtEl>
+                                      </p:cBhvr>
+                                    </p:animEffect>
+                                  </p:childTnLst>
+                                </p:cTn>
+                              </p:par>
+                            </p:childTnLst>
+                          </p:cTn>
+                        </p:par>
+                      </p:childTnLst>
+                    </p:cTn>
+                  </p:par>
+                  <p:par>
+                    <p:cTn id="17" fill="hold">
+                      <p:stCondLst>
+                        <p:cond delay="indefinite"/>
+                      </p:stCondLst>
+                      <p:childTnLst>
+                        <p:par>
+                          <p:cTn id="18" fill="hold">
+                            <p:stCondLst>
+                              <p:cond delay="0"/>
+                            </p:stCondLst>
+                            <p:childTnLst>
+                              <p:par>
+                                <p:cTn id="19" presetID="1" presetClass="entr" presetSubtype="0" fill="hold" grpId="0" nodeType="clickEffect">
+                                  <p:stCondLst>
+                                    <p:cond delay="0"/>
+                                  </p:stCondLst>
+                                  <p:childTnLst>
+                                    <p:set>
+                                      <p:cBhvr>
+                                        <p:cTn id="20" dur="1" fill="hold">
+                                          <p:stCondLst>
+                                            <p:cond delay="0"/>
+                                          </p:stCondLst>
+                                        </p:cTn>
+                                        <p:tgtEl>
+                                          <p:spTgt spid="7"/>
+                                        </p:tgtEl>
+                                        <p:attrNameLst>
+                                          <p:attrName>style.visibility</p:attrName>
+                                        </p:attrNameLst>
+                                      </p:cBhvr>
+                                      <p:to>
+                                        <p:strVal val="visible"/>
+                                      </p:to>
+                                    </p:set>
+                                  </p:childTnLst>
+                                </p:cTn>
+                              </p:par>
+                            </p:childTnLst>
+                          </p:cTn>
+                        </p:par>
+                      </p:childTnLst>
+                    </p:cTn>
+                  </p:par>
+                </p:childTnLst>
+              </p:cTn>
+              <p:prevCondLst>
+                <p:cond evt="onPrev" delay="0">
+                  <p:tgtEl>
+                    <p:sldTgt/>
+                  </p:tgtEl>
+                </p:cond>
+              </p:prevCondLst>
+              <p:nextCondLst>
+                <p:cond evt="onNext" delay="0">
+                  <p:tgtEl>
+                    <p:sldTgt/>
+                  </p:tgtEl>
+                </p:cond>
+              </p:nextCondLst>
+            </p:seq>
+          </p:childTnLst>
+        </p:cTn>
+      </p:par>
+    </p:tnLst>
+    <p:bldLst>
+      <p:bldP spid="7" grpId="0"/>
+      <p:bldP spid="5" grpId="0" animBg="1"/>
+      <p:bldP spid="13" grpId="0" animBg="1"/>
     </p:bldLst>
   </p:timing>
 </p:sld>
@@ -12217,830 +13158,6 @@
         <p:cNvPr id="1" name="">
           <a:extLst>
             <a:ext uri="{FF2B5EF4-FFF2-40B4-BE49-F238E27FC236}">
-              <a16:creationId xmlns:a16="http://schemas.microsoft.com/office/drawing/2014/main" id="{40B9B33B-69A4-631F-7EC7-B492D746C5CC}"/>
-            </a:ext>
-          </a:extLst>
-        </p:cNvPr>
-        <p:cNvGrpSpPr/>
-        <p:nvPr/>
-      </p:nvGrpSpPr>
-      <p:grpSpPr>
-        <a:xfrm>
-          <a:off x="0" y="0"/>
-          <a:ext cx="0" cy="0"/>
-          <a:chOff x="0" y="0"/>
-          <a:chExt cx="0" cy="0"/>
-        </a:xfrm>
-      </p:grpSpPr>
-      <p:sp>
-        <p:nvSpPr>
-          <p:cNvPr id="2" name="Title 1">
-            <a:extLst>
-              <a:ext uri="{FF2B5EF4-FFF2-40B4-BE49-F238E27FC236}">
-                <a16:creationId xmlns:a16="http://schemas.microsoft.com/office/drawing/2014/main" id="{473DEB99-B354-66E0-45D9-86DC4EAF0ABE}"/>
-              </a:ext>
-            </a:extLst>
-          </p:cNvPr>
-          <p:cNvSpPr>
-            <a:spLocks noGrp="1"/>
-          </p:cNvSpPr>
-          <p:nvPr>
-            <p:ph type="title"/>
-          </p:nvPr>
-        </p:nvSpPr>
-        <p:spPr>
-          <a:xfrm>
-            <a:off x="454378" y="3198636"/>
-            <a:ext cx="10515600" cy="1325563"/>
-          </a:xfrm>
-        </p:spPr>
-        <p:txBody>
-          <a:bodyPr/>
-          <a:lstStyle/>
-          <a:p>
-            <a:r>
-              <a:rPr lang="en-US" dirty="0"/>
-              <a:t>Q: What are these symbols?</a:t>
-            </a:r>
-          </a:p>
-        </p:txBody>
-      </p:sp>
-      <p:sp>
-        <p:nvSpPr>
-          <p:cNvPr id="7" name="TextBox 6">
-            <a:extLst>
-              <a:ext uri="{FF2B5EF4-FFF2-40B4-BE49-F238E27FC236}">
-                <a16:creationId xmlns:a16="http://schemas.microsoft.com/office/drawing/2014/main" id="{74ADC3E8-80E1-A60F-26D7-4DDB822B1EBF}"/>
-              </a:ext>
-            </a:extLst>
-          </p:cNvPr>
-          <p:cNvSpPr txBox="1"/>
-          <p:nvPr/>
-        </p:nvSpPr>
-        <p:spPr>
-          <a:xfrm>
-            <a:off x="6254045" y="4908022"/>
-            <a:ext cx="5667022" cy="923330"/>
-          </a:xfrm>
-          <a:prstGeom prst="rect">
-            <a:avLst/>
-          </a:prstGeom>
-          <a:noFill/>
-        </p:spPr>
-        <p:txBody>
-          <a:bodyPr wrap="square">
-            <a:spAutoFit/>
-          </a:bodyPr>
-          <a:lstStyle/>
-          <a:p>
-            <a:r>
-              <a:rPr lang="en-US" sz="5400" dirty="0">
-                <a:solidFill>
-                  <a:schemeClr val="tx2"/>
-                </a:solidFill>
-              </a:rPr>
-              <a:t>Quotation marks</a:t>
-            </a:r>
-          </a:p>
-        </p:txBody>
-      </p:sp>
-      <p:sp>
-        <p:nvSpPr>
-          <p:cNvPr id="10" name="Content Placeholder 2">
-            <a:extLst>
-              <a:ext uri="{FF2B5EF4-FFF2-40B4-BE49-F238E27FC236}">
-                <a16:creationId xmlns:a16="http://schemas.microsoft.com/office/drawing/2014/main" id="{3FA0360A-FC21-2EC2-8599-8E3B6F771BF1}"/>
-              </a:ext>
-            </a:extLst>
-          </p:cNvPr>
-          <p:cNvSpPr txBox="1">
-            <a:spLocks/>
-          </p:cNvSpPr>
-          <p:nvPr/>
-        </p:nvSpPr>
-        <p:spPr>
-          <a:xfrm>
-            <a:off x="124178" y="418570"/>
-            <a:ext cx="11943644" cy="2020712"/>
-          </a:xfrm>
-          <a:prstGeom prst="rect">
-            <a:avLst/>
-          </a:prstGeom>
-          <a:solidFill>
-            <a:schemeClr val="bg2"/>
-          </a:solidFill>
-          <a:ln w="38100">
-            <a:solidFill>
-              <a:schemeClr val="tx1"/>
-            </a:solidFill>
-          </a:ln>
-        </p:spPr>
-        <p:txBody>
-          <a:bodyPr vert="horz" lIns="91440" tIns="45720" rIns="91440" bIns="45720" rtlCol="0" anchor="ctr">
-            <a:normAutofit/>
-          </a:bodyPr>
-          <a:lstStyle>
-            <a:lvl1pPr marL="0" indent="0" algn="ctr" defTabSz="914400" rtl="0" eaLnBrk="1" latinLnBrk="0" hangingPunct="1">
-              <a:lnSpc>
-                <a:spcPct val="90000"/>
-              </a:lnSpc>
-              <a:spcBef>
-                <a:spcPts val="1000"/>
-              </a:spcBef>
-              <a:buFont typeface="Arial" panose="020B0604020202020204" pitchFamily="34" charset="0"/>
-              <a:buNone/>
-              <a:defRPr sz="2400" kern="1200">
-                <a:solidFill>
-                  <a:schemeClr val="tx1"/>
-                </a:solidFill>
-                <a:latin typeface="+mn-lt"/>
-                <a:ea typeface="+mn-ea"/>
-                <a:cs typeface="+mn-cs"/>
-              </a:defRPr>
-            </a:lvl1pPr>
-            <a:lvl2pPr marL="457200" indent="0" algn="ctr" defTabSz="914400" rtl="0" eaLnBrk="1" latinLnBrk="0" hangingPunct="1">
-              <a:lnSpc>
-                <a:spcPct val="90000"/>
-              </a:lnSpc>
-              <a:spcBef>
-                <a:spcPts val="500"/>
-              </a:spcBef>
-              <a:buFont typeface="Arial" panose="020B0604020202020204" pitchFamily="34" charset="0"/>
-              <a:buNone/>
-              <a:defRPr sz="2000" kern="1200">
-                <a:solidFill>
-                  <a:schemeClr val="tx1"/>
-                </a:solidFill>
-                <a:latin typeface="+mn-lt"/>
-                <a:ea typeface="+mn-ea"/>
-                <a:cs typeface="+mn-cs"/>
-              </a:defRPr>
-            </a:lvl2pPr>
-            <a:lvl3pPr marL="914400" indent="0" algn="ctr" defTabSz="914400" rtl="0" eaLnBrk="1" latinLnBrk="0" hangingPunct="1">
-              <a:lnSpc>
-                <a:spcPct val="90000"/>
-              </a:lnSpc>
-              <a:spcBef>
-                <a:spcPts val="500"/>
-              </a:spcBef>
-              <a:buFont typeface="Arial" panose="020B0604020202020204" pitchFamily="34" charset="0"/>
-              <a:buNone/>
-              <a:defRPr sz="1800" kern="1200">
-                <a:solidFill>
-                  <a:schemeClr val="tx1"/>
-                </a:solidFill>
-                <a:latin typeface="+mn-lt"/>
-                <a:ea typeface="+mn-ea"/>
-                <a:cs typeface="+mn-cs"/>
-              </a:defRPr>
-            </a:lvl3pPr>
-            <a:lvl4pPr marL="1371600" indent="0" algn="ctr" defTabSz="914400" rtl="0" eaLnBrk="1" latinLnBrk="0" hangingPunct="1">
-              <a:lnSpc>
-                <a:spcPct val="90000"/>
-              </a:lnSpc>
-              <a:spcBef>
-                <a:spcPts val="500"/>
-              </a:spcBef>
-              <a:buFont typeface="Arial" panose="020B0604020202020204" pitchFamily="34" charset="0"/>
-              <a:buNone/>
-              <a:defRPr sz="1600" kern="1200">
-                <a:solidFill>
-                  <a:schemeClr val="tx1"/>
-                </a:solidFill>
-                <a:latin typeface="+mn-lt"/>
-                <a:ea typeface="+mn-ea"/>
-                <a:cs typeface="+mn-cs"/>
-              </a:defRPr>
-            </a:lvl4pPr>
-            <a:lvl5pPr marL="1828800" indent="0" algn="ctr" defTabSz="914400" rtl="0" eaLnBrk="1" latinLnBrk="0" hangingPunct="1">
-              <a:lnSpc>
-                <a:spcPct val="90000"/>
-              </a:lnSpc>
-              <a:spcBef>
-                <a:spcPts val="500"/>
-              </a:spcBef>
-              <a:buFont typeface="Arial" panose="020B0604020202020204" pitchFamily="34" charset="0"/>
-              <a:buNone/>
-              <a:defRPr sz="1600" kern="1200">
-                <a:solidFill>
-                  <a:schemeClr val="tx1"/>
-                </a:solidFill>
-                <a:latin typeface="+mn-lt"/>
-                <a:ea typeface="+mn-ea"/>
-                <a:cs typeface="+mn-cs"/>
-              </a:defRPr>
-            </a:lvl5pPr>
-            <a:lvl6pPr marL="2286000" indent="0" algn="ctr" defTabSz="914400" rtl="0" eaLnBrk="1" latinLnBrk="0" hangingPunct="1">
-              <a:lnSpc>
-                <a:spcPct val="90000"/>
-              </a:lnSpc>
-              <a:spcBef>
-                <a:spcPts val="500"/>
-              </a:spcBef>
-              <a:buFont typeface="Arial" panose="020B0604020202020204" pitchFamily="34" charset="0"/>
-              <a:buNone/>
-              <a:defRPr sz="1600" kern="1200">
-                <a:solidFill>
-                  <a:schemeClr val="tx1"/>
-                </a:solidFill>
-                <a:latin typeface="+mn-lt"/>
-                <a:ea typeface="+mn-ea"/>
-                <a:cs typeface="+mn-cs"/>
-              </a:defRPr>
-            </a:lvl6pPr>
-            <a:lvl7pPr marL="2743200" indent="0" algn="ctr" defTabSz="914400" rtl="0" eaLnBrk="1" latinLnBrk="0" hangingPunct="1">
-              <a:lnSpc>
-                <a:spcPct val="90000"/>
-              </a:lnSpc>
-              <a:spcBef>
-                <a:spcPts val="500"/>
-              </a:spcBef>
-              <a:buFont typeface="Arial" panose="020B0604020202020204" pitchFamily="34" charset="0"/>
-              <a:buNone/>
-              <a:defRPr sz="1600" kern="1200">
-                <a:solidFill>
-                  <a:schemeClr val="tx1"/>
-                </a:solidFill>
-                <a:latin typeface="+mn-lt"/>
-                <a:ea typeface="+mn-ea"/>
-                <a:cs typeface="+mn-cs"/>
-              </a:defRPr>
-            </a:lvl7pPr>
-            <a:lvl8pPr marL="3200400" indent="0" algn="ctr" defTabSz="914400" rtl="0" eaLnBrk="1" latinLnBrk="0" hangingPunct="1">
-              <a:lnSpc>
-                <a:spcPct val="90000"/>
-              </a:lnSpc>
-              <a:spcBef>
-                <a:spcPts val="500"/>
-              </a:spcBef>
-              <a:buFont typeface="Arial" panose="020B0604020202020204" pitchFamily="34" charset="0"/>
-              <a:buNone/>
-              <a:defRPr sz="1600" kern="1200">
-                <a:solidFill>
-                  <a:schemeClr val="tx1"/>
-                </a:solidFill>
-                <a:latin typeface="+mn-lt"/>
-                <a:ea typeface="+mn-ea"/>
-                <a:cs typeface="+mn-cs"/>
-              </a:defRPr>
-            </a:lvl8pPr>
-            <a:lvl9pPr marL="3657600" indent="0" algn="ctr" defTabSz="914400" rtl="0" eaLnBrk="1" latinLnBrk="0" hangingPunct="1">
-              <a:lnSpc>
-                <a:spcPct val="90000"/>
-              </a:lnSpc>
-              <a:spcBef>
-                <a:spcPts val="500"/>
-              </a:spcBef>
-              <a:buFont typeface="Arial" panose="020B0604020202020204" pitchFamily="34" charset="0"/>
-              <a:buNone/>
-              <a:defRPr sz="1600" kern="1200">
-                <a:solidFill>
-                  <a:schemeClr val="tx1"/>
-                </a:solidFill>
-                <a:latin typeface="+mn-lt"/>
-                <a:ea typeface="+mn-ea"/>
-                <a:cs typeface="+mn-cs"/>
-              </a:defRPr>
-            </a:lvl9pPr>
-          </a:lstStyle>
-          <a:p>
-            <a:r>
-              <a:rPr lang="en-US" sz="8000" dirty="0" err="1">
-                <a:solidFill>
-                  <a:srgbClr val="FF9DA4"/>
-                </a:solidFill>
-                <a:latin typeface="Consolas" panose="020B0609020204030204" pitchFamily="49" charset="0"/>
-              </a:rPr>
-              <a:t>crush</a:t>
-            </a:r>
-            <a:r>
-              <a:rPr lang="en-US" sz="8000" dirty="0" err="1">
-                <a:solidFill>
-                  <a:srgbClr val="FFFFFF"/>
-                </a:solidFill>
-                <a:latin typeface="Consolas" panose="020B0609020204030204" pitchFamily="49" charset="0"/>
-              </a:rPr>
-              <a:t>.</a:t>
-            </a:r>
-            <a:r>
-              <a:rPr lang="en-US" sz="8000" dirty="0" err="1">
-                <a:solidFill>
-                  <a:srgbClr val="BBDAFF"/>
-                </a:solidFill>
-                <a:latin typeface="Consolas" panose="020B0609020204030204" pitchFamily="49" charset="0"/>
-              </a:rPr>
-              <a:t>write</a:t>
-            </a:r>
-            <a:r>
-              <a:rPr lang="en-US" sz="8000" dirty="0">
-                <a:solidFill>
-                  <a:srgbClr val="BBDAFF"/>
-                </a:solidFill>
-                <a:latin typeface="Consolas" panose="020B0609020204030204" pitchFamily="49" charset="0"/>
-              </a:rPr>
-              <a:t>(</a:t>
-            </a:r>
-            <a:r>
-              <a:rPr lang="en-US" sz="8000" dirty="0">
-                <a:solidFill>
-                  <a:srgbClr val="D1F1A9"/>
-                </a:solidFill>
-                <a:latin typeface="Consolas" panose="020B0609020204030204" pitchFamily="49" charset="0"/>
-              </a:rPr>
-              <a:t>"ahoy"</a:t>
-            </a:r>
-            <a:r>
-              <a:rPr lang="en-US" sz="8000" dirty="0">
-                <a:solidFill>
-                  <a:srgbClr val="BBDAFF"/>
-                </a:solidFill>
-                <a:latin typeface="Consolas" panose="020B0609020204030204" pitchFamily="49" charset="0"/>
-              </a:rPr>
-              <a:t>)</a:t>
-            </a:r>
-            <a:endParaRPr lang="en-US" sz="8000" dirty="0">
-              <a:solidFill>
-                <a:srgbClr val="FFFFFF"/>
-              </a:solidFill>
-              <a:latin typeface="Consolas" panose="020B0609020204030204" pitchFamily="49" charset="0"/>
-            </a:endParaRPr>
-          </a:p>
-        </p:txBody>
-      </p:sp>
-      <p:cxnSp>
-        <p:nvCxnSpPr>
-          <p:cNvPr id="4" name="Straight Arrow Connector 3">
-            <a:extLst>
-              <a:ext uri="{FF2B5EF4-FFF2-40B4-BE49-F238E27FC236}">
-                <a16:creationId xmlns:a16="http://schemas.microsoft.com/office/drawing/2014/main" id="{FBCC6C4C-808D-578D-F0B1-B52A3E205641}"/>
-              </a:ext>
-            </a:extLst>
-          </p:cNvPr>
-          <p:cNvCxnSpPr>
-            <a:cxnSpLocks/>
-            <a:endCxn id="5" idx="4"/>
-          </p:cNvCxnSpPr>
-          <p:nvPr/>
-        </p:nvCxnSpPr>
-        <p:spPr>
-          <a:xfrm flipV="1">
-            <a:off x="7667083" y="2053906"/>
-            <a:ext cx="70555" cy="1325563"/>
-          </a:xfrm>
-          <a:prstGeom prst="straightConnector1">
-            <a:avLst/>
-          </a:prstGeom>
-          <a:ln w="76200" cap="flat" cmpd="sng" algn="ctr">
-            <a:solidFill>
-              <a:schemeClr val="accent5"/>
-            </a:solidFill>
-            <a:prstDash val="solid"/>
-            <a:round/>
-            <a:headEnd type="none" w="med" len="med"/>
-            <a:tailEnd type="arrow" w="med" len="med"/>
-          </a:ln>
-        </p:spPr>
-        <p:style>
-          <a:lnRef idx="0">
-            <a:scrgbClr r="0" g="0" b="0"/>
-          </a:lnRef>
-          <a:fillRef idx="0">
-            <a:scrgbClr r="0" g="0" b="0"/>
-          </a:fillRef>
-          <a:effectRef idx="0">
-            <a:scrgbClr r="0" g="0" b="0"/>
-          </a:effectRef>
-          <a:fontRef idx="minor">
-            <a:schemeClr val="tx1"/>
-          </a:fontRef>
-        </p:style>
-      </p:cxnSp>
-      <p:sp>
-        <p:nvSpPr>
-          <p:cNvPr id="5" name="Oval 4">
-            <a:extLst>
-              <a:ext uri="{FF2B5EF4-FFF2-40B4-BE49-F238E27FC236}">
-                <a16:creationId xmlns:a16="http://schemas.microsoft.com/office/drawing/2014/main" id="{ADBBBFBE-84F3-4125-2815-7705EE2BA569}"/>
-              </a:ext>
-            </a:extLst>
-          </p:cNvPr>
-          <p:cNvSpPr/>
-          <p:nvPr/>
-        </p:nvSpPr>
-        <p:spPr>
-          <a:xfrm>
-            <a:off x="7413082" y="706184"/>
-            <a:ext cx="649111" cy="1347722"/>
-          </a:xfrm>
-          <a:prstGeom prst="ellipse">
-            <a:avLst/>
-          </a:prstGeom>
-          <a:noFill/>
-          <a:ln w="76200">
-            <a:solidFill>
-              <a:schemeClr val="accent5"/>
-            </a:solidFill>
-          </a:ln>
-        </p:spPr>
-        <p:style>
-          <a:lnRef idx="2">
-            <a:schemeClr val="accent1">
-              <a:shade val="15000"/>
-            </a:schemeClr>
-          </a:lnRef>
-          <a:fillRef idx="1">
-            <a:schemeClr val="accent1"/>
-          </a:fillRef>
-          <a:effectRef idx="0">
-            <a:schemeClr val="accent1"/>
-          </a:effectRef>
-          <a:fontRef idx="minor">
-            <a:schemeClr val="lt1"/>
-          </a:fontRef>
-        </p:style>
-        <p:txBody>
-          <a:bodyPr rtlCol="0" anchor="ctr"/>
-          <a:lstStyle/>
-          <a:p>
-            <a:pPr algn="ctr"/>
-            <a:endParaRPr lang="en-US"/>
-          </a:p>
-        </p:txBody>
-      </p:sp>
-      <p:cxnSp>
-        <p:nvCxnSpPr>
-          <p:cNvPr id="8" name="Straight Arrow Connector 7">
-            <a:extLst>
-              <a:ext uri="{FF2B5EF4-FFF2-40B4-BE49-F238E27FC236}">
-                <a16:creationId xmlns:a16="http://schemas.microsoft.com/office/drawing/2014/main" id="{97029B3A-C435-91A1-C041-61390A314F03}"/>
-              </a:ext>
-            </a:extLst>
-          </p:cNvPr>
-          <p:cNvCxnSpPr>
-            <a:cxnSpLocks/>
-            <a:endCxn id="13" idx="3"/>
-          </p:cNvCxnSpPr>
-          <p:nvPr/>
-        </p:nvCxnSpPr>
-        <p:spPr>
-          <a:xfrm flipV="1">
-            <a:off x="8376356" y="1919028"/>
-            <a:ext cx="1946437" cy="1509972"/>
-          </a:xfrm>
-          <a:prstGeom prst="straightConnector1">
-            <a:avLst/>
-          </a:prstGeom>
-          <a:ln w="76200" cap="flat" cmpd="sng" algn="ctr">
-            <a:solidFill>
-              <a:schemeClr val="accent5"/>
-            </a:solidFill>
-            <a:prstDash val="solid"/>
-            <a:round/>
-            <a:headEnd type="none" w="med" len="med"/>
-            <a:tailEnd type="arrow" w="med" len="med"/>
-          </a:ln>
-        </p:spPr>
-        <p:style>
-          <a:lnRef idx="0">
-            <a:scrgbClr r="0" g="0" b="0"/>
-          </a:lnRef>
-          <a:fillRef idx="0">
-            <a:scrgbClr r="0" g="0" b="0"/>
-          </a:fillRef>
-          <a:effectRef idx="0">
-            <a:scrgbClr r="0" g="0" b="0"/>
-          </a:effectRef>
-          <a:fontRef idx="minor">
-            <a:schemeClr val="tx1"/>
-          </a:fontRef>
-        </p:style>
-      </p:cxnSp>
-      <p:sp>
-        <p:nvSpPr>
-          <p:cNvPr id="13" name="Oval 12">
-            <a:extLst>
-              <a:ext uri="{FF2B5EF4-FFF2-40B4-BE49-F238E27FC236}">
-                <a16:creationId xmlns:a16="http://schemas.microsoft.com/office/drawing/2014/main" id="{CBDE5943-8C9D-9A92-280A-14B777AA3E97}"/>
-              </a:ext>
-            </a:extLst>
-          </p:cNvPr>
-          <p:cNvSpPr/>
-          <p:nvPr/>
-        </p:nvSpPr>
-        <p:spPr>
-          <a:xfrm>
-            <a:off x="10227733" y="768675"/>
-            <a:ext cx="649111" cy="1347722"/>
-          </a:xfrm>
-          <a:prstGeom prst="ellipse">
-            <a:avLst/>
-          </a:prstGeom>
-          <a:noFill/>
-          <a:ln w="76200">
-            <a:solidFill>
-              <a:schemeClr val="accent5"/>
-            </a:solidFill>
-          </a:ln>
-        </p:spPr>
-        <p:style>
-          <a:lnRef idx="2">
-            <a:schemeClr val="accent1">
-              <a:shade val="15000"/>
-            </a:schemeClr>
-          </a:lnRef>
-          <a:fillRef idx="1">
-            <a:schemeClr val="accent1"/>
-          </a:fillRef>
-          <a:effectRef idx="0">
-            <a:schemeClr val="accent1"/>
-          </a:effectRef>
-          <a:fontRef idx="minor">
-            <a:schemeClr val="lt1"/>
-          </a:fontRef>
-        </p:style>
-        <p:txBody>
-          <a:bodyPr rtlCol="0" anchor="ctr"/>
-          <a:lstStyle/>
-          <a:p>
-            <a:pPr algn="ctr"/>
-            <a:endParaRPr lang="en-US"/>
-          </a:p>
-        </p:txBody>
-      </p:sp>
-    </p:spTree>
-    <p:extLst>
-      <p:ext uri="{BB962C8B-B14F-4D97-AF65-F5344CB8AC3E}">
-        <p14:creationId xmlns:p14="http://schemas.microsoft.com/office/powerpoint/2010/main" val="77373794"/>
-      </p:ext>
-    </p:extLst>
-  </p:cSld>
-  <p:clrMapOvr>
-    <a:masterClrMapping/>
-  </p:clrMapOvr>
-  <mc:AlternateContent xmlns:mc="http://schemas.openxmlformats.org/markup-compatibility/2006" xmlns:p159="http://schemas.microsoft.com/office/powerpoint/2015/09/main">
-    <mc:Choice Requires="p159">
-      <p:transition xmlns:p14="http://schemas.microsoft.com/office/powerpoint/2010/main" spd="slow" p14:dur="2000">
-        <p159:morph option="byObject"/>
-      </p:transition>
-    </mc:Choice>
-    <mc:Fallback xmlns="">
-      <p:transition spd="slow">
-        <p:fade/>
-      </p:transition>
-    </mc:Fallback>
-  </mc:AlternateContent>
-  <p:timing>
-    <p:tnLst>
-      <p:par>
-        <p:cTn id="1" dur="indefinite" restart="never" nodeType="tmRoot">
-          <p:childTnLst>
-            <p:seq concurrent="1" nextAc="seek">
-              <p:cTn id="2" dur="indefinite" nodeType="mainSeq">
-                <p:childTnLst>
-                  <p:par>
-                    <p:cTn id="3" fill="hold">
-                      <p:stCondLst>
-                        <p:cond delay="indefinite"/>
-                        <p:cond evt="onBegin" delay="0">
-                          <p:tn val="2"/>
-                        </p:cond>
-                      </p:stCondLst>
-                      <p:childTnLst>
-                        <p:par>
-                          <p:cTn id="4" fill="hold">
-                            <p:stCondLst>
-                              <p:cond delay="0"/>
-                            </p:stCondLst>
-                            <p:childTnLst>
-                              <p:par>
-                                <p:cTn id="5" presetID="10" presetClass="entr" presetSubtype="0" fill="hold" nodeType="afterEffect">
-                                  <p:stCondLst>
-                                    <p:cond delay="0"/>
-                                  </p:stCondLst>
-                                  <p:childTnLst>
-                                    <p:set>
-                                      <p:cBhvr>
-                                        <p:cTn id="6" dur="1" fill="hold">
-                                          <p:stCondLst>
-                                            <p:cond delay="0"/>
-                                          </p:stCondLst>
-                                        </p:cTn>
-                                        <p:tgtEl>
-                                          <p:spTgt spid="4"/>
-                                        </p:tgtEl>
-                                        <p:attrNameLst>
-                                          <p:attrName>style.visibility</p:attrName>
-                                        </p:attrNameLst>
-                                      </p:cBhvr>
-                                      <p:to>
-                                        <p:strVal val="visible"/>
-                                      </p:to>
-                                    </p:set>
-                                    <p:animEffect transition="in" filter="fade">
-                                      <p:cBhvr>
-                                        <p:cTn id="7" dur="500"/>
-                                        <p:tgtEl>
-                                          <p:spTgt spid="4"/>
-                                        </p:tgtEl>
-                                      </p:cBhvr>
-                                    </p:animEffect>
-                                  </p:childTnLst>
-                                </p:cTn>
-                              </p:par>
-                              <p:par>
-                                <p:cTn id="8" presetID="10" presetClass="entr" presetSubtype="0" fill="hold" grpId="0" nodeType="withEffect">
-                                  <p:stCondLst>
-                                    <p:cond delay="0"/>
-                                  </p:stCondLst>
-                                  <p:childTnLst>
-                                    <p:set>
-                                      <p:cBhvr>
-                                        <p:cTn id="9" dur="1" fill="hold">
-                                          <p:stCondLst>
-                                            <p:cond delay="0"/>
-                                          </p:stCondLst>
-                                        </p:cTn>
-                                        <p:tgtEl>
-                                          <p:spTgt spid="5"/>
-                                        </p:tgtEl>
-                                        <p:attrNameLst>
-                                          <p:attrName>style.visibility</p:attrName>
-                                        </p:attrNameLst>
-                                      </p:cBhvr>
-                                      <p:to>
-                                        <p:strVal val="visible"/>
-                                      </p:to>
-                                    </p:set>
-                                    <p:animEffect transition="in" filter="fade">
-                                      <p:cBhvr>
-                                        <p:cTn id="10" dur="500"/>
-                                        <p:tgtEl>
-                                          <p:spTgt spid="5"/>
-                                        </p:tgtEl>
-                                      </p:cBhvr>
-                                    </p:animEffect>
-                                  </p:childTnLst>
-                                </p:cTn>
-                              </p:par>
-                              <p:par>
-                                <p:cTn id="11" presetID="10" presetClass="entr" presetSubtype="0" fill="hold" nodeType="withEffect">
-                                  <p:stCondLst>
-                                    <p:cond delay="0"/>
-                                  </p:stCondLst>
-                                  <p:childTnLst>
-                                    <p:set>
-                                      <p:cBhvr>
-                                        <p:cTn id="12" dur="1" fill="hold">
-                                          <p:stCondLst>
-                                            <p:cond delay="0"/>
-                                          </p:stCondLst>
-                                        </p:cTn>
-                                        <p:tgtEl>
-                                          <p:spTgt spid="8"/>
-                                        </p:tgtEl>
-                                        <p:attrNameLst>
-                                          <p:attrName>style.visibility</p:attrName>
-                                        </p:attrNameLst>
-                                      </p:cBhvr>
-                                      <p:to>
-                                        <p:strVal val="visible"/>
-                                      </p:to>
-                                    </p:set>
-                                    <p:animEffect transition="in" filter="fade">
-                                      <p:cBhvr>
-                                        <p:cTn id="13" dur="500"/>
-                                        <p:tgtEl>
-                                          <p:spTgt spid="8"/>
-                                        </p:tgtEl>
-                                      </p:cBhvr>
-                                    </p:animEffect>
-                                  </p:childTnLst>
-                                </p:cTn>
-                              </p:par>
-                              <p:par>
-                                <p:cTn id="14" presetID="10" presetClass="entr" presetSubtype="0" fill="hold" grpId="0" nodeType="withEffect">
-                                  <p:stCondLst>
-                                    <p:cond delay="0"/>
-                                  </p:stCondLst>
-                                  <p:childTnLst>
-                                    <p:set>
-                                      <p:cBhvr>
-                                        <p:cTn id="15" dur="1" fill="hold">
-                                          <p:stCondLst>
-                                            <p:cond delay="0"/>
-                                          </p:stCondLst>
-                                        </p:cTn>
-                                        <p:tgtEl>
-                                          <p:spTgt spid="13"/>
-                                        </p:tgtEl>
-                                        <p:attrNameLst>
-                                          <p:attrName>style.visibility</p:attrName>
-                                        </p:attrNameLst>
-                                      </p:cBhvr>
-                                      <p:to>
-                                        <p:strVal val="visible"/>
-                                      </p:to>
-                                    </p:set>
-                                    <p:animEffect transition="in" filter="fade">
-                                      <p:cBhvr>
-                                        <p:cTn id="16" dur="500"/>
-                                        <p:tgtEl>
-                                          <p:spTgt spid="13"/>
-                                        </p:tgtEl>
-                                      </p:cBhvr>
-                                    </p:animEffect>
-                                  </p:childTnLst>
-                                </p:cTn>
-                              </p:par>
-                            </p:childTnLst>
-                          </p:cTn>
-                        </p:par>
-                      </p:childTnLst>
-                    </p:cTn>
-                  </p:par>
-                  <p:par>
-                    <p:cTn id="17" fill="hold">
-                      <p:stCondLst>
-                        <p:cond delay="indefinite"/>
-                      </p:stCondLst>
-                      <p:childTnLst>
-                        <p:par>
-                          <p:cTn id="18" fill="hold">
-                            <p:stCondLst>
-                              <p:cond delay="0"/>
-                            </p:stCondLst>
-                            <p:childTnLst>
-                              <p:par>
-                                <p:cTn id="19" presetID="1" presetClass="entr" presetSubtype="0" fill="hold" grpId="0" nodeType="clickEffect">
-                                  <p:stCondLst>
-                                    <p:cond delay="0"/>
-                                  </p:stCondLst>
-                                  <p:childTnLst>
-                                    <p:set>
-                                      <p:cBhvr>
-                                        <p:cTn id="20" dur="1" fill="hold">
-                                          <p:stCondLst>
-                                            <p:cond delay="0"/>
-                                          </p:stCondLst>
-                                        </p:cTn>
-                                        <p:tgtEl>
-                                          <p:spTgt spid="7"/>
-                                        </p:tgtEl>
-                                        <p:attrNameLst>
-                                          <p:attrName>style.visibility</p:attrName>
-                                        </p:attrNameLst>
-                                      </p:cBhvr>
-                                      <p:to>
-                                        <p:strVal val="visible"/>
-                                      </p:to>
-                                    </p:set>
-                                  </p:childTnLst>
-                                </p:cTn>
-                              </p:par>
-                            </p:childTnLst>
-                          </p:cTn>
-                        </p:par>
-                      </p:childTnLst>
-                    </p:cTn>
-                  </p:par>
-                </p:childTnLst>
-              </p:cTn>
-              <p:prevCondLst>
-                <p:cond evt="onPrev" delay="0">
-                  <p:tgtEl>
-                    <p:sldTgt/>
-                  </p:tgtEl>
-                </p:cond>
-              </p:prevCondLst>
-              <p:nextCondLst>
-                <p:cond evt="onNext" delay="0">
-                  <p:tgtEl>
-                    <p:sldTgt/>
-                  </p:tgtEl>
-                </p:cond>
-              </p:nextCondLst>
-            </p:seq>
-          </p:childTnLst>
-        </p:cTn>
-      </p:par>
-    </p:tnLst>
-    <p:bldLst>
-      <p:bldP spid="7" grpId="0"/>
-      <p:bldP spid="5" grpId="0" animBg="1"/>
-      <p:bldP spid="13" grpId="0" animBg="1"/>
-    </p:bldLst>
-  </p:timing>
-</p:sld>
-</file>
-
-<file path=ppt/slides/slide21.xml><?xml version="1.0" encoding="utf-8"?>
-<p:sld xmlns:a="http://schemas.openxmlformats.org/drawingml/2006/main" xmlns:r="http://schemas.openxmlformats.org/officeDocument/2006/relationships" xmlns:p="http://schemas.openxmlformats.org/presentationml/2006/main">
-  <p:cSld>
-    <p:spTree>
-      <p:nvGrpSpPr>
-        <p:cNvPr id="1" name="">
-          <a:extLst>
-            <a:ext uri="{FF2B5EF4-FFF2-40B4-BE49-F238E27FC236}">
               <a16:creationId xmlns:a16="http://schemas.microsoft.com/office/drawing/2014/main" id="{56EE3779-8C9B-3455-65FE-AD933DA2C65D}"/>
             </a:ext>
           </a:extLst>
@@ -13496,7 +13613,7 @@
 </p:sld>
 </file>
 
-<file path=ppt/slides/slide22.xml><?xml version="1.0" encoding="utf-8"?>
+<file path=ppt/slides/slide21.xml><?xml version="1.0" encoding="utf-8"?>
 <p:sld xmlns:a="http://schemas.openxmlformats.org/drawingml/2006/main" xmlns:r="http://schemas.openxmlformats.org/officeDocument/2006/relationships" xmlns:p="http://schemas.openxmlformats.org/presentationml/2006/main">
   <p:cSld>
     <p:spTree>
@@ -14146,7 +14263,7 @@
 </p:sld>
 </file>
 
-<file path=ppt/slides/slide23.xml><?xml version="1.0" encoding="utf-8"?>
+<file path=ppt/slides/slide22.xml><?xml version="1.0" encoding="utf-8"?>
 <p:sld xmlns:a="http://schemas.openxmlformats.org/drawingml/2006/main" xmlns:r="http://schemas.openxmlformats.org/officeDocument/2006/relationships" xmlns:p="http://schemas.openxmlformats.org/presentationml/2006/main">
   <p:cSld>
     <p:spTree>
@@ -14970,7 +15087,7 @@
 </p:sld>
 </file>
 
-<file path=ppt/slides/slide24.xml><?xml version="1.0" encoding="utf-8"?>
+<file path=ppt/slides/slide23.xml><?xml version="1.0" encoding="utf-8"?>
 <p:sld xmlns:a="http://schemas.openxmlformats.org/drawingml/2006/main" xmlns:r="http://schemas.openxmlformats.org/officeDocument/2006/relationships" xmlns:p="http://schemas.openxmlformats.org/presentationml/2006/main">
   <p:cSld>
     <p:spTree>
@@ -15433,7 +15550,7 @@
 </p:sld>
 </file>
 
-<file path=ppt/slides/slide25.xml><?xml version="1.0" encoding="utf-8"?>
+<file path=ppt/slides/slide24.xml><?xml version="1.0" encoding="utf-8"?>
 <p:sld xmlns:a="http://schemas.openxmlformats.org/drawingml/2006/main" xmlns:r="http://schemas.openxmlformats.org/officeDocument/2006/relationships" xmlns:p="http://schemas.openxmlformats.org/presentationml/2006/main">
   <p:cSld>
     <p:spTree>
@@ -15894,7 +16011,7 @@
 </p:sld>
 </file>
 
-<file path=ppt/slides/slide26.xml><?xml version="1.0" encoding="utf-8"?>
+<file path=ppt/slides/slide25.xml><?xml version="1.0" encoding="utf-8"?>
 <p:sld xmlns:a="http://schemas.openxmlformats.org/drawingml/2006/main" xmlns:r="http://schemas.openxmlformats.org/officeDocument/2006/relationships" xmlns:p="http://schemas.openxmlformats.org/presentationml/2006/main">
   <p:cSld>
     <p:spTree>
@@ -16143,7 +16260,7 @@
 </p:sld>
 </file>
 
-<file path=ppt/slides/slide27.xml><?xml version="1.0" encoding="utf-8"?>
+<file path=ppt/slides/slide26.xml><?xml version="1.0" encoding="utf-8"?>
 <p:sld xmlns:a="http://schemas.openxmlformats.org/drawingml/2006/main" xmlns:r="http://schemas.openxmlformats.org/officeDocument/2006/relationships" xmlns:p="http://schemas.openxmlformats.org/presentationml/2006/main">
   <p:cSld>
     <p:spTree>
@@ -18133,7 +18250,7 @@
           <p:nvPr/>
         </p:nvPicPr>
         <p:blipFill>
-          <a:blip r:embed="rId2"/>
+          <a:blip r:embed="rId3"/>
           <a:stretch>
             <a:fillRect/>
           </a:stretch>
@@ -18345,7 +18462,7 @@
 </p:sld>
 </file>
 
-<file path=ppt/slides/slide28.xml><?xml version="1.0" encoding="utf-8"?>
+<file path=ppt/slides/slide27.xml><?xml version="1.0" encoding="utf-8"?>
 <p:sld xmlns:a="http://schemas.openxmlformats.org/drawingml/2006/main" xmlns:r="http://schemas.openxmlformats.org/officeDocument/2006/relationships" xmlns:p="http://schemas.openxmlformats.org/presentationml/2006/main">
   <p:cSld>
     <p:spTree>
@@ -20343,7 +20460,7 @@
           <p:nvPr/>
         </p:nvPicPr>
         <p:blipFill>
-          <a:blip r:embed="rId2"/>
+          <a:blip r:embed="rId3"/>
           <a:stretch>
             <a:fillRect/>
           </a:stretch>
@@ -20383,7 +20500,7 @@
 </p:sld>
 </file>
 
-<file path=ppt/slides/slide29.xml><?xml version="1.0" encoding="utf-8"?>
+<file path=ppt/slides/slide28.xml><?xml version="1.0" encoding="utf-8"?>
 <p:sld xmlns:a="http://schemas.openxmlformats.org/drawingml/2006/main" xmlns:r="http://schemas.openxmlformats.org/officeDocument/2006/relationships" xmlns:p="http://schemas.openxmlformats.org/presentationml/2006/main">
   <p:cSld>
     <p:spTree>
@@ -22381,7 +22498,7 @@
           <p:nvPr/>
         </p:nvPicPr>
         <p:blipFill>
-          <a:blip r:embed="rId2"/>
+          <a:blip r:embed="rId3"/>
           <a:stretch>
             <a:fillRect/>
           </a:stretch>
@@ -22708,17 +22825,9 @@
 </p:sld>
 </file>
 
-<file path=ppt/slides/slide3.xml><?xml version="1.0" encoding="utf-8"?>
+<file path=ppt/slides/slide29.xml><?xml version="1.0" encoding="utf-8"?>
 <p:sld xmlns:a="http://schemas.openxmlformats.org/drawingml/2006/main" xmlns:r="http://schemas.openxmlformats.org/officeDocument/2006/relationships" xmlns:p="http://schemas.openxmlformats.org/presentationml/2006/main">
   <p:cSld>
-    <p:bg>
-      <p:bgPr>
-        <a:solidFill>
-          <a:schemeClr val="bg1"/>
-        </a:solidFill>
-        <a:effectLst/>
-      </p:bgPr>
-    </p:bg>
     <p:spTree>
       <p:nvGrpSpPr>
         <p:cNvPr id="1" name=""/>
@@ -22738,7 +22847,7 @@
           <p:cNvPr id="4" name="Rectangle 3">
             <a:extLst>
               <a:ext uri="{FF2B5EF4-FFF2-40B4-BE49-F238E27FC236}">
-                <a16:creationId xmlns:a16="http://schemas.microsoft.com/office/drawing/2014/main" id="{2C979BBC-3341-FCDB-497C-EFCC6EAD5839}"/>
+                <a16:creationId xmlns:a16="http://schemas.microsoft.com/office/drawing/2014/main" id="{67B45C40-6D18-0062-BB1F-CBF59D9A1E4E}"/>
               </a:ext>
             </a:extLst>
           </p:cNvPr>
@@ -22747,30 +22856,35 @@
         </p:nvSpPr>
         <p:spPr>
           <a:xfrm>
-            <a:off x="537210" y="1908811"/>
-            <a:ext cx="4243589" cy="834389"/>
+            <a:off x="838200" y="4151376"/>
+            <a:ext cx="2590800" cy="932688"/>
           </a:xfrm>
           <a:prstGeom prst="rect">
             <a:avLst/>
           </a:prstGeom>
           <a:solidFill>
-            <a:schemeClr val="bg1"/>
+            <a:schemeClr val="bg2">
+              <a:lumMod val="95000"/>
+              <a:lumOff val="5000"/>
+            </a:schemeClr>
           </a:solidFill>
-          <a:ln>
-            <a:noFill/>
+          <a:ln w="38100">
+            <a:solidFill>
+              <a:schemeClr val="tx1"/>
+            </a:solidFill>
           </a:ln>
         </p:spPr>
         <p:style>
           <a:lnRef idx="2">
-            <a:schemeClr val="accent1">
+            <a:schemeClr val="dk1">
               <a:shade val="15000"/>
             </a:schemeClr>
           </a:lnRef>
           <a:fillRef idx="1">
-            <a:schemeClr val="accent1"/>
+            <a:schemeClr val="dk1"/>
           </a:fillRef>
           <a:effectRef idx="0">
-            <a:schemeClr val="accent1"/>
+            <a:schemeClr val="dk1"/>
           </a:effectRef>
           <a:fontRef idx="minor">
             <a:schemeClr val="lt1"/>
@@ -22781,66 +22895,6 @@
           <a:lstStyle/>
           <a:p>
             <a:pPr algn="ctr"/>
-            <a:endParaRPr lang="en-US" dirty="0"/>
-          </a:p>
-        </p:txBody>
-      </p:sp>
-      <p:sp useBgFill="1">
-        <p:nvSpPr>
-          <p:cNvPr id="1040" name="Rectangle 1030">
-            <a:extLst>
-              <a:ext uri="{FF2B5EF4-FFF2-40B4-BE49-F238E27FC236}">
-                <a16:creationId xmlns:a16="http://schemas.microsoft.com/office/drawing/2014/main" id="{F13C74B1-5B17-4795-BED0-7140497B445A}"/>
-              </a:ext>
-              <a:ext uri="{C183D7F6-B498-43B3-948B-1728B52AA6E4}">
-                <adec:decorative xmlns:adec="http://schemas.microsoft.com/office/drawing/2017/decorative" val="1"/>
-              </a:ext>
-            </a:extLst>
-          </p:cNvPr>
-          <p:cNvSpPr>
-            <a:spLocks noGrp="1" noRot="1" noChangeAspect="1" noMove="1" noResize="1" noEditPoints="1" noAdjustHandles="1" noChangeArrowheads="1" noChangeShapeType="1" noTextEdit="1"/>
-          </p:cNvSpPr>
-          <p:nvPr>
-            <p:extLst>
-              <p:ext uri="{386F3935-93C4-4BCD-93E2-E3B085C9AB24}">
-                <p16:designElem xmlns:p16="http://schemas.microsoft.com/office/powerpoint/2015/main" val="1"/>
-              </p:ext>
-            </p:extLst>
-          </p:nvPr>
-        </p:nvSpPr>
-        <p:spPr>
-          <a:xfrm>
-            <a:off x="0" y="0"/>
-            <a:ext cx="12188952" cy="6858000"/>
-          </a:xfrm>
-          <a:prstGeom prst="rect">
-            <a:avLst/>
-          </a:prstGeom>
-          <a:ln>
-            <a:noFill/>
-          </a:ln>
-        </p:spPr>
-        <p:style>
-          <a:lnRef idx="2">
-            <a:schemeClr val="accent1">
-              <a:shade val="50000"/>
-            </a:schemeClr>
-          </a:lnRef>
-          <a:fillRef idx="1">
-            <a:schemeClr val="accent1"/>
-          </a:fillRef>
-          <a:effectRef idx="0">
-            <a:schemeClr val="accent1"/>
-          </a:effectRef>
-          <a:fontRef idx="minor">
-            <a:schemeClr val="lt1"/>
-          </a:fontRef>
-        </p:style>
-        <p:txBody>
-          <a:bodyPr rtlCol="0" anchor="ctr"/>
-          <a:lstStyle/>
-          <a:p>
-            <a:pPr algn="ctr"/>
             <a:endParaRPr lang="en-US"/>
           </a:p>
         </p:txBody>
@@ -22850,7 +22904,7 @@
           <p:cNvPr id="2" name="Title 1">
             <a:extLst>
               <a:ext uri="{FF2B5EF4-FFF2-40B4-BE49-F238E27FC236}">
-                <a16:creationId xmlns:a16="http://schemas.microsoft.com/office/drawing/2014/main" id="{1892AFC9-B8BE-19A0-EBCA-9FB61CFE2C51}"/>
+                <a16:creationId xmlns:a16="http://schemas.microsoft.com/office/drawing/2014/main" id="{A210528F-1C1E-CDA5-B923-9142BD6E7A01}"/>
               </a:ext>
             </a:extLst>
           </p:cNvPr>
@@ -22861,305 +22915,23 @@
             <p:ph type="title"/>
           </p:nvPr>
         </p:nvSpPr>
-        <p:spPr>
-          <a:xfrm>
-            <a:off x="640080" y="1"/>
-            <a:ext cx="4368602" cy="1908810"/>
-          </a:xfrm>
-        </p:spPr>
+        <p:spPr/>
         <p:txBody>
-          <a:bodyPr anchor="b">
-            <a:normAutofit/>
-          </a:bodyPr>
+          <a:bodyPr/>
           <a:lstStyle/>
           <a:p>
             <a:r>
-              <a:rPr lang="en-US" sz="5400" b="1" dirty="0"/>
-              <a:t>You Wield the Power</a:t>
-            </a:r>
-          </a:p>
-        </p:txBody>
-      </p:sp>
-      <p:sp>
-        <p:nvSpPr>
-          <p:cNvPr id="1041" name="sketchy line">
-            <a:extLst>
-              <a:ext uri="{FF2B5EF4-FFF2-40B4-BE49-F238E27FC236}">
-                <a16:creationId xmlns:a16="http://schemas.microsoft.com/office/drawing/2014/main" id="{D4974D33-8DC5-464E-8C6D-BE58F0669C17}"/>
-              </a:ext>
-              <a:ext uri="{C183D7F6-B498-43B3-948B-1728B52AA6E4}">
-                <adec:decorative xmlns:adec="http://schemas.microsoft.com/office/drawing/2017/decorative" val="1"/>
-              </a:ext>
-            </a:extLst>
-          </p:cNvPr>
-          <p:cNvSpPr>
-            <a:spLocks noChangeAspect="1"/>
-          </p:cNvSpPr>
-          <p:nvPr>
-            <p:extLst>
-              <p:ext uri="{386F3935-93C4-4BCD-93E2-E3B085C9AB24}">
-                <p16:designElem xmlns:p16="http://schemas.microsoft.com/office/powerpoint/2015/main" val="1"/>
-              </p:ext>
-            </p:extLst>
-          </p:nvPr>
-        </p:nvSpPr>
-        <p:spPr>
-          <a:xfrm>
-            <a:off x="769632" y="2004064"/>
-            <a:ext cx="3474720" cy="18288"/>
-          </a:xfrm>
-          <a:custGeom>
-            <a:avLst/>
-            <a:gdLst>
-              <a:gd name="csX0" fmla="*/ 0 w 3474720"/>
-              <a:gd name="csY0" fmla="*/ 0 h 18288"/>
-              <a:gd name="csX1" fmla="*/ 694944 w 3474720"/>
-              <a:gd name="csY1" fmla="*/ 0 h 18288"/>
-              <a:gd name="csX2" fmla="*/ 1355141 w 3474720"/>
-              <a:gd name="csY2" fmla="*/ 0 h 18288"/>
-              <a:gd name="csX3" fmla="*/ 2015338 w 3474720"/>
-              <a:gd name="csY3" fmla="*/ 0 h 18288"/>
-              <a:gd name="csX4" fmla="*/ 2779776 w 3474720"/>
-              <a:gd name="csY4" fmla="*/ 0 h 18288"/>
-              <a:gd name="csX5" fmla="*/ 3474720 w 3474720"/>
-              <a:gd name="csY5" fmla="*/ 0 h 18288"/>
-              <a:gd name="csX6" fmla="*/ 3474720 w 3474720"/>
-              <a:gd name="csY6" fmla="*/ 18288 h 18288"/>
-              <a:gd name="csX7" fmla="*/ 2779776 w 3474720"/>
-              <a:gd name="csY7" fmla="*/ 18288 h 18288"/>
-              <a:gd name="csX8" fmla="*/ 2189074 w 3474720"/>
-              <a:gd name="csY8" fmla="*/ 18288 h 18288"/>
-              <a:gd name="csX9" fmla="*/ 1528877 w 3474720"/>
-              <a:gd name="csY9" fmla="*/ 18288 h 18288"/>
-              <a:gd name="csX10" fmla="*/ 868680 w 3474720"/>
-              <a:gd name="csY10" fmla="*/ 18288 h 18288"/>
-              <a:gd name="csX11" fmla="*/ 0 w 3474720"/>
-              <a:gd name="csY11" fmla="*/ 18288 h 18288"/>
-              <a:gd name="csX12" fmla="*/ 0 w 3474720"/>
-              <a:gd name="csY12" fmla="*/ 0 h 18288"/>
-            </a:gdLst>
-            <a:ahLst/>
-            <a:cxnLst>
-              <a:cxn ang="0">
-                <a:pos x="csX0" y="csY0"/>
-              </a:cxn>
-              <a:cxn ang="0">
-                <a:pos x="csX1" y="csY1"/>
-              </a:cxn>
-              <a:cxn ang="0">
-                <a:pos x="csX2" y="csY2"/>
-              </a:cxn>
-              <a:cxn ang="0">
-                <a:pos x="csX3" y="csY3"/>
-              </a:cxn>
-              <a:cxn ang="0">
-                <a:pos x="csX4" y="csY4"/>
-              </a:cxn>
-              <a:cxn ang="0">
-                <a:pos x="csX5" y="csY5"/>
-              </a:cxn>
-              <a:cxn ang="0">
-                <a:pos x="csX6" y="csY6"/>
-              </a:cxn>
-              <a:cxn ang="0">
-                <a:pos x="csX7" y="csY7"/>
-              </a:cxn>
-              <a:cxn ang="0">
-                <a:pos x="csX8" y="csY8"/>
-              </a:cxn>
-              <a:cxn ang="0">
-                <a:pos x="csX9" y="csY9"/>
-              </a:cxn>
-              <a:cxn ang="0">
-                <a:pos x="csX10" y="csY10"/>
-              </a:cxn>
-              <a:cxn ang="0">
-                <a:pos x="csX11" y="csY11"/>
-              </a:cxn>
-              <a:cxn ang="0">
-                <a:pos x="csX12" y="csY12"/>
-              </a:cxn>
-            </a:cxnLst>
-            <a:rect l="l" t="t" r="r" b="b"/>
-            <a:pathLst>
-              <a:path w="3474720" h="18288" fill="none" extrusionOk="0">
-                <a:moveTo>
-                  <a:pt x="0" y="0"/>
-                </a:moveTo>
-                <a:cubicBezTo>
-                  <a:pt x="224454" y="-14544"/>
-                  <a:pt x="495407" y="26540"/>
-                  <a:pt x="694944" y="0"/>
-                </a:cubicBezTo>
-                <a:cubicBezTo>
-                  <a:pt x="894481" y="-26540"/>
-                  <a:pt x="1130063" y="24713"/>
-                  <a:pt x="1355141" y="0"/>
-                </a:cubicBezTo>
-                <a:cubicBezTo>
-                  <a:pt x="1580219" y="-24713"/>
-                  <a:pt x="1820099" y="26695"/>
-                  <a:pt x="2015338" y="0"/>
-                </a:cubicBezTo>
-                <a:cubicBezTo>
-                  <a:pt x="2210577" y="-26695"/>
-                  <a:pt x="2402045" y="165"/>
-                  <a:pt x="2779776" y="0"/>
-                </a:cubicBezTo>
-                <a:cubicBezTo>
-                  <a:pt x="3157507" y="-165"/>
-                  <a:pt x="3286859" y="-15571"/>
-                  <a:pt x="3474720" y="0"/>
-                </a:cubicBezTo>
-                <a:cubicBezTo>
-                  <a:pt x="3474286" y="7551"/>
-                  <a:pt x="3474253" y="9822"/>
-                  <a:pt x="3474720" y="18288"/>
-                </a:cubicBezTo>
-                <a:cubicBezTo>
-                  <a:pt x="3233904" y="29845"/>
-                  <a:pt x="2945134" y="-5256"/>
-                  <a:pt x="2779776" y="18288"/>
-                </a:cubicBezTo>
-                <a:cubicBezTo>
-                  <a:pt x="2614418" y="41832"/>
-                  <a:pt x="2339768" y="22709"/>
-                  <a:pt x="2189074" y="18288"/>
-                </a:cubicBezTo>
-                <a:cubicBezTo>
-                  <a:pt x="2038380" y="13867"/>
-                  <a:pt x="1817434" y="-4947"/>
-                  <a:pt x="1528877" y="18288"/>
-                </a:cubicBezTo>
-                <a:cubicBezTo>
-                  <a:pt x="1240320" y="41523"/>
-                  <a:pt x="1042447" y="37198"/>
-                  <a:pt x="868680" y="18288"/>
-                </a:cubicBezTo>
-                <a:cubicBezTo>
-                  <a:pt x="694913" y="-622"/>
-                  <a:pt x="233232" y="44909"/>
-                  <a:pt x="0" y="18288"/>
-                </a:cubicBezTo>
-                <a:cubicBezTo>
-                  <a:pt x="60" y="11696"/>
-                  <a:pt x="66" y="3758"/>
-                  <a:pt x="0" y="0"/>
-                </a:cubicBezTo>
-                <a:close/>
-              </a:path>
-              <a:path w="3474720" h="18288" stroke="0" extrusionOk="0">
-                <a:moveTo>
-                  <a:pt x="0" y="0"/>
-                </a:moveTo>
-                <a:cubicBezTo>
-                  <a:pt x="202328" y="-14716"/>
-                  <a:pt x="332722" y="-11499"/>
-                  <a:pt x="625450" y="0"/>
-                </a:cubicBezTo>
-                <a:cubicBezTo>
-                  <a:pt x="918178" y="11499"/>
-                  <a:pt x="1096688" y="5123"/>
-                  <a:pt x="1389888" y="0"/>
-                </a:cubicBezTo>
-                <a:cubicBezTo>
-                  <a:pt x="1683088" y="-5123"/>
-                  <a:pt x="1835981" y="-14038"/>
-                  <a:pt x="1980590" y="0"/>
-                </a:cubicBezTo>
-                <a:cubicBezTo>
-                  <a:pt x="2125199" y="14038"/>
-                  <a:pt x="2396099" y="-7203"/>
-                  <a:pt x="2571293" y="0"/>
-                </a:cubicBezTo>
-                <a:cubicBezTo>
-                  <a:pt x="2746487" y="7203"/>
-                  <a:pt x="3041609" y="-12036"/>
-                  <a:pt x="3474720" y="0"/>
-                </a:cubicBezTo>
-                <a:cubicBezTo>
-                  <a:pt x="3474638" y="4406"/>
-                  <a:pt x="3474631" y="9982"/>
-                  <a:pt x="3474720" y="18288"/>
-                </a:cubicBezTo>
-                <a:cubicBezTo>
-                  <a:pt x="3324873" y="21876"/>
-                  <a:pt x="3136771" y="12587"/>
-                  <a:pt x="2814523" y="18288"/>
-                </a:cubicBezTo>
-                <a:cubicBezTo>
-                  <a:pt x="2492275" y="23989"/>
-                  <a:pt x="2294402" y="47111"/>
-                  <a:pt x="2154326" y="18288"/>
-                </a:cubicBezTo>
-                <a:cubicBezTo>
-                  <a:pt x="2014250" y="-10535"/>
-                  <a:pt x="1820317" y="33903"/>
-                  <a:pt x="1494130" y="18288"/>
-                </a:cubicBezTo>
-                <a:cubicBezTo>
-                  <a:pt x="1167943" y="2673"/>
-                  <a:pt x="948432" y="14868"/>
-                  <a:pt x="729691" y="18288"/>
-                </a:cubicBezTo>
-                <a:cubicBezTo>
-                  <a:pt x="510950" y="21708"/>
-                  <a:pt x="264032" y="24354"/>
-                  <a:pt x="0" y="18288"/>
-                </a:cubicBezTo>
-                <a:cubicBezTo>
-                  <a:pt x="189" y="14288"/>
-                  <a:pt x="-703" y="3747"/>
-                  <a:pt x="0" y="0"/>
-                </a:cubicBezTo>
-                <a:close/>
-              </a:path>
-            </a:pathLst>
-          </a:custGeom>
-          <a:solidFill>
-            <a:schemeClr val="accent2"/>
-          </a:solidFill>
-          <a:ln w="44450" cap="rnd">
-            <a:solidFill>
-              <a:schemeClr val="accent2"/>
-            </a:solidFill>
-            <a:round/>
-            <a:extLst>
-              <a:ext uri="{C807C97D-BFC1-408E-A445-0C87EB9F89A2}">
-                <ask:lineSketchStyleProps xmlns:ask="http://schemas.microsoft.com/office/drawing/2018/sketchyshapes" sd="2863741219">
-                  <a:prstGeom prst="rect">
-                    <a:avLst/>
-                  </a:prstGeom>
-                  <ask:type>
-                    <ask:lineSketchFreehand/>
-                  </ask:type>
-                </ask:lineSketchStyleProps>
-              </a:ext>
-            </a:extLst>
-          </a:ln>
-        </p:spPr>
-        <p:style>
-          <a:lnRef idx="2">
-            <a:schemeClr val="accent1">
-              <a:shade val="50000"/>
-            </a:schemeClr>
-          </a:lnRef>
-          <a:fillRef idx="1">
-            <a:schemeClr val="accent1"/>
-          </a:fillRef>
-          <a:effectRef idx="0">
-            <a:schemeClr val="accent1"/>
-          </a:effectRef>
-          <a:fontRef idx="minor">
-            <a:schemeClr val="lt1"/>
-          </a:fontRef>
-        </p:style>
-        <p:txBody>
-          <a:bodyPr rtlCol="0" anchor="ctr"/>
-          <a:lstStyle/>
-          <a:p>
-            <a:pPr algn="ctr"/>
-            <a:endParaRPr lang="en-US"/>
+              <a:rPr lang="en-US" dirty="0"/>
+              <a:t>Code </a:t>
+            </a:r>
+            <a:r>
+              <a:rPr lang="en-US" b="1" dirty="0"/>
+              <a:t>With</a:t>
+            </a:r>
+            <a:r>
+              <a:rPr lang="en-US" dirty="0"/>
+              <a:t> Loops</a:t>
+            </a:r>
           </a:p>
         </p:txBody>
       </p:sp>
@@ -23168,7 +22940,7 @@
           <p:cNvPr id="3" name="Content Placeholder 2">
             <a:extLst>
               <a:ext uri="{FF2B5EF4-FFF2-40B4-BE49-F238E27FC236}">
-                <a16:creationId xmlns:a16="http://schemas.microsoft.com/office/drawing/2014/main" id="{0B0F8332-9821-569B-18A0-D1FA8BB68BA2}"/>
+                <a16:creationId xmlns:a16="http://schemas.microsoft.com/office/drawing/2014/main" id="{B9AE62B5-7F60-EE8C-6D4F-DC569B4B336B}"/>
               </a:ext>
             </a:extLst>
           </p:cNvPr>
@@ -23181,8 +22953,8 @@
         </p:nvSpPr>
         <p:spPr>
           <a:xfrm>
-            <a:off x="320040" y="2430018"/>
-            <a:ext cx="4688642" cy="3988313"/>
+            <a:off x="838200" y="1825625"/>
+            <a:ext cx="3550920" cy="4351338"/>
           </a:xfrm>
         </p:spPr>
         <p:txBody>
@@ -23192,469 +22964,1205 @@
           <a:lstStyle/>
           <a:p>
             <a:pPr marL="0" indent="0">
+              <a:lnSpc>
+                <a:spcPct val="80000"/>
+              </a:lnSpc>
+              <a:spcBef>
+                <a:spcPts val="0"/>
+              </a:spcBef>
               <a:buNone/>
             </a:pPr>
             <a:r>
-              <a:rPr lang="en-US" dirty="0">
-                <a:solidFill>
-                  <a:schemeClr val="tx2"/>
-                </a:solidFill>
-              </a:rPr>
-              <a:t>There is a magical robotic serpent named </a:t>
-            </a:r>
-            <a:r>
-              <a:rPr lang="en-US" b="1" dirty="0"/>
-              <a:t>Python</a:t>
-            </a:r>
-            <a:r>
-              <a:rPr lang="en-US" dirty="0">
-                <a:solidFill>
-                  <a:schemeClr val="tx2"/>
-                </a:solidFill>
-              </a:rPr>
-              <a:t>…</a:t>
-            </a:r>
+              <a:rPr lang="en-US" sz="1800" b="0" dirty="0">
+                <a:solidFill>
+                  <a:srgbClr val="EBBBFF"/>
+                </a:solidFill>
+                <a:effectLst/>
+                <a:latin typeface="Consolas" panose="020B0609020204030204" pitchFamily="49" charset="0"/>
+              </a:rPr>
+              <a:t>from</a:t>
+            </a:r>
+            <a:r>
+              <a:rPr lang="en-US" sz="1800" b="0" dirty="0">
+                <a:solidFill>
+                  <a:srgbClr val="FFFFFF"/>
+                </a:solidFill>
+                <a:effectLst/>
+                <a:latin typeface="Consolas" panose="020B0609020204030204" pitchFamily="49" charset="0"/>
+              </a:rPr>
+              <a:t> turtle </a:t>
+            </a:r>
+            <a:r>
+              <a:rPr lang="en-US" sz="1800" b="0" dirty="0">
+                <a:solidFill>
+                  <a:srgbClr val="EBBBFF"/>
+                </a:solidFill>
+                <a:effectLst/>
+                <a:latin typeface="Consolas" panose="020B0609020204030204" pitchFamily="49" charset="0"/>
+              </a:rPr>
+              <a:t>import</a:t>
+            </a:r>
+            <a:r>
+              <a:rPr lang="en-US" sz="1800" b="0" dirty="0">
+                <a:solidFill>
+                  <a:srgbClr val="FFFFFF"/>
+                </a:solidFill>
+                <a:effectLst/>
+                <a:latin typeface="Consolas" panose="020B0609020204030204" pitchFamily="49" charset="0"/>
+              </a:rPr>
+              <a:t> </a:t>
+            </a:r>
+            <a:r>
+              <a:rPr lang="en-US" sz="1800" b="0" dirty="0">
+                <a:solidFill>
+                  <a:srgbClr val="99FFFF"/>
+                </a:solidFill>
+                <a:effectLst/>
+                <a:latin typeface="Consolas" panose="020B0609020204030204" pitchFamily="49" charset="0"/>
+              </a:rPr>
+              <a:t>*</a:t>
+            </a:r>
+            <a:endParaRPr lang="en-US" sz="1800" b="0" dirty="0">
+              <a:solidFill>
+                <a:srgbClr val="FFFFFF"/>
+              </a:solidFill>
+              <a:effectLst/>
+              <a:latin typeface="Consolas" panose="020B0609020204030204" pitchFamily="49" charset="0"/>
+            </a:endParaRPr>
           </a:p>
           <a:p>
             <a:pPr marL="0" indent="0">
+              <a:lnSpc>
+                <a:spcPct val="80000"/>
+              </a:lnSpc>
+              <a:spcBef>
+                <a:spcPts val="0"/>
+              </a:spcBef>
               <a:buNone/>
             </a:pPr>
-            <a:endParaRPr lang="en-US" sz="900" dirty="0">
+            <a:r>
+              <a:rPr lang="en-US" sz="1800" b="0" dirty="0" err="1">
+                <a:solidFill>
+                  <a:srgbClr val="FFFFFF"/>
+                </a:solidFill>
+                <a:effectLst/>
+                <a:latin typeface="Consolas" panose="020B0609020204030204" pitchFamily="49" charset="0"/>
+              </a:rPr>
+              <a:t>sambi</a:t>
+            </a:r>
+            <a:r>
+              <a:rPr lang="en-US" sz="1800" b="0" dirty="0">
+                <a:solidFill>
+                  <a:srgbClr val="FFFFFF"/>
+                </a:solidFill>
+                <a:effectLst/>
+                <a:latin typeface="Consolas" panose="020B0609020204030204" pitchFamily="49" charset="0"/>
+              </a:rPr>
+              <a:t> </a:t>
+            </a:r>
+            <a:r>
+              <a:rPr lang="en-US" sz="1800" b="0" dirty="0">
+                <a:solidFill>
+                  <a:srgbClr val="99FFFF"/>
+                </a:solidFill>
+                <a:effectLst/>
+                <a:latin typeface="Consolas" panose="020B0609020204030204" pitchFamily="49" charset="0"/>
+              </a:rPr>
+              <a:t>=</a:t>
+            </a:r>
+            <a:r>
+              <a:rPr lang="en-US" sz="1800" b="0" dirty="0">
+                <a:solidFill>
+                  <a:srgbClr val="FFFFFF"/>
+                </a:solidFill>
+                <a:effectLst/>
+                <a:latin typeface="Consolas" panose="020B0609020204030204" pitchFamily="49" charset="0"/>
+              </a:rPr>
+              <a:t> </a:t>
+            </a:r>
+            <a:r>
+              <a:rPr lang="en-US" sz="1800" b="0" dirty="0">
+                <a:solidFill>
+                  <a:srgbClr val="BBDAFF"/>
+                </a:solidFill>
+                <a:effectLst/>
+                <a:latin typeface="Consolas" panose="020B0609020204030204" pitchFamily="49" charset="0"/>
+              </a:rPr>
+              <a:t>Turtle()</a:t>
+            </a:r>
+            <a:endParaRPr lang="en-US" sz="1800" b="0" dirty="0">
               <a:solidFill>
-                <a:schemeClr val="tx2"/>
+                <a:srgbClr val="FFFFFF"/>
               </a:solidFill>
+              <a:effectLst/>
+              <a:latin typeface="Consolas" panose="020B0609020204030204" pitchFamily="49" charset="0"/>
             </a:endParaRPr>
           </a:p>
           <a:p>
             <a:pPr marL="0" indent="0">
+              <a:lnSpc>
+                <a:spcPct val="80000"/>
+              </a:lnSpc>
+              <a:spcBef>
+                <a:spcPts val="0"/>
+              </a:spcBef>
               <a:buNone/>
             </a:pPr>
-            <a:r>
-              <a:rPr lang="en-US" dirty="0">
-                <a:solidFill>
-                  <a:schemeClr val="tx2"/>
-                </a:solidFill>
-              </a:rPr>
-              <a:t>It will bend to your every will and whim…</a:t>
-            </a:r>
+            <a:br>
+              <a:rPr lang="en-US" sz="1800" b="0" dirty="0">
+                <a:solidFill>
+                  <a:srgbClr val="FFFFFF"/>
+                </a:solidFill>
+                <a:effectLst/>
+                <a:latin typeface="Consolas" panose="020B0609020204030204" pitchFamily="49" charset="0"/>
+              </a:rPr>
+            </a:br>
+            <a:r>
+              <a:rPr lang="en-US" sz="1800" b="0" dirty="0">
+                <a:solidFill>
+                  <a:srgbClr val="FFFFFF"/>
+                </a:solidFill>
+                <a:effectLst/>
+                <a:latin typeface="Consolas" panose="020B0609020204030204" pitchFamily="49" charset="0"/>
+              </a:rPr>
+              <a:t>paper </a:t>
+            </a:r>
+            <a:r>
+              <a:rPr lang="en-US" sz="1800" b="0" dirty="0">
+                <a:solidFill>
+                  <a:srgbClr val="99FFFF"/>
+                </a:solidFill>
+                <a:effectLst/>
+                <a:latin typeface="Consolas" panose="020B0609020204030204" pitchFamily="49" charset="0"/>
+              </a:rPr>
+              <a:t>=</a:t>
+            </a:r>
+            <a:r>
+              <a:rPr lang="en-US" sz="1800" b="0" dirty="0">
+                <a:solidFill>
+                  <a:srgbClr val="FFFFFF"/>
+                </a:solidFill>
+                <a:effectLst/>
+                <a:latin typeface="Consolas" panose="020B0609020204030204" pitchFamily="49" charset="0"/>
+              </a:rPr>
+              <a:t> </a:t>
+            </a:r>
+            <a:r>
+              <a:rPr lang="en-US" sz="1800" b="0" dirty="0" err="1">
+                <a:solidFill>
+                  <a:srgbClr val="FFFFFF"/>
+                </a:solidFill>
+                <a:effectLst/>
+                <a:latin typeface="Consolas" panose="020B0609020204030204" pitchFamily="49" charset="0"/>
+              </a:rPr>
+              <a:t>sambi.</a:t>
+            </a:r>
+            <a:r>
+              <a:rPr lang="en-US" sz="1800" b="0" dirty="0" err="1">
+                <a:solidFill>
+                  <a:srgbClr val="BBDAFF"/>
+                </a:solidFill>
+                <a:effectLst/>
+                <a:latin typeface="Consolas" panose="020B0609020204030204" pitchFamily="49" charset="0"/>
+              </a:rPr>
+              <a:t>getscreen</a:t>
+            </a:r>
+            <a:r>
+              <a:rPr lang="en-US" sz="1800" b="0" dirty="0">
+                <a:solidFill>
+                  <a:srgbClr val="BBDAFF"/>
+                </a:solidFill>
+                <a:effectLst/>
+                <a:latin typeface="Consolas" panose="020B0609020204030204" pitchFamily="49" charset="0"/>
+              </a:rPr>
+              <a:t>()</a:t>
+            </a:r>
+            <a:endParaRPr lang="en-US" sz="1800" b="0" dirty="0">
+              <a:solidFill>
+                <a:srgbClr val="FFFFFF"/>
+              </a:solidFill>
+              <a:effectLst/>
+              <a:latin typeface="Consolas" panose="020B0609020204030204" pitchFamily="49" charset="0"/>
+            </a:endParaRPr>
           </a:p>
           <a:p>
             <a:pPr marL="0" indent="0">
+              <a:lnSpc>
+                <a:spcPct val="80000"/>
+              </a:lnSpc>
+              <a:spcBef>
+                <a:spcPts val="0"/>
+              </a:spcBef>
               <a:buNone/>
             </a:pPr>
-            <a:endParaRPr lang="en-US" sz="900" dirty="0">
+            <a:r>
+              <a:rPr lang="en-US" sz="1800" b="0" dirty="0" err="1">
+                <a:solidFill>
+                  <a:srgbClr val="FFFFFF"/>
+                </a:solidFill>
+                <a:effectLst/>
+                <a:latin typeface="Consolas" panose="020B0609020204030204" pitchFamily="49" charset="0"/>
+              </a:rPr>
+              <a:t>paper.</a:t>
+            </a:r>
+            <a:r>
+              <a:rPr lang="en-US" sz="1800" b="0" dirty="0" err="1">
+                <a:solidFill>
+                  <a:srgbClr val="BBDAFF"/>
+                </a:solidFill>
+                <a:effectLst/>
+                <a:latin typeface="Consolas" panose="020B0609020204030204" pitchFamily="49" charset="0"/>
+              </a:rPr>
+              <a:t>bgcolor</a:t>
+            </a:r>
+            <a:r>
+              <a:rPr lang="en-US" sz="1800" b="0" dirty="0">
+                <a:solidFill>
+                  <a:srgbClr val="BBDAFF"/>
+                </a:solidFill>
+                <a:effectLst/>
+                <a:latin typeface="Consolas" panose="020B0609020204030204" pitchFamily="49" charset="0"/>
+              </a:rPr>
+              <a:t>(</a:t>
+            </a:r>
+            <a:r>
+              <a:rPr lang="en-US" sz="1800" b="0" dirty="0">
+                <a:solidFill>
+                  <a:srgbClr val="D1F1A9"/>
+                </a:solidFill>
+                <a:effectLst/>
+                <a:latin typeface="Consolas" panose="020B0609020204030204" pitchFamily="49" charset="0"/>
+              </a:rPr>
+              <a:t>"black"</a:t>
+            </a:r>
+            <a:r>
+              <a:rPr lang="en-US" sz="1800" b="0" dirty="0">
+                <a:solidFill>
+                  <a:srgbClr val="BBDAFF"/>
+                </a:solidFill>
+                <a:effectLst/>
+                <a:latin typeface="Consolas" panose="020B0609020204030204" pitchFamily="49" charset="0"/>
+              </a:rPr>
+              <a:t>)</a:t>
+            </a:r>
+            <a:endParaRPr lang="en-US" sz="1800" b="0" dirty="0">
               <a:solidFill>
-                <a:schemeClr val="tx2"/>
+                <a:srgbClr val="FFFFFF"/>
               </a:solidFill>
+              <a:effectLst/>
+              <a:latin typeface="Consolas" panose="020B0609020204030204" pitchFamily="49" charset="0"/>
             </a:endParaRPr>
           </a:p>
           <a:p>
             <a:pPr marL="0" indent="0">
+              <a:lnSpc>
+                <a:spcPct val="80000"/>
+              </a:lnSpc>
+              <a:spcBef>
+                <a:spcPts val="0"/>
+              </a:spcBef>
               <a:buNone/>
             </a:pPr>
-            <a:r>
-              <a:rPr lang="en-US" dirty="0">
-                <a:solidFill>
-                  <a:schemeClr val="tx2"/>
-                </a:solidFill>
-              </a:rPr>
-              <a:t>All you must do is command it with flawless incantation…</a:t>
-            </a:r>
+            <a:endParaRPr lang="en-US" sz="1800" dirty="0">
+              <a:solidFill>
+                <a:srgbClr val="FFFFFF"/>
+              </a:solidFill>
+              <a:latin typeface="Consolas" panose="020B0609020204030204" pitchFamily="49" charset="0"/>
+            </a:endParaRPr>
+          </a:p>
+          <a:p>
+            <a:pPr marL="0" indent="0">
+              <a:lnSpc>
+                <a:spcPct val="80000"/>
+              </a:lnSpc>
+              <a:spcBef>
+                <a:spcPts val="0"/>
+              </a:spcBef>
+              <a:buNone/>
+            </a:pPr>
+            <a:r>
+              <a:rPr lang="en-US" sz="1800" b="0" dirty="0" err="1">
+                <a:solidFill>
+                  <a:srgbClr val="FFFFFF"/>
+                </a:solidFill>
+                <a:effectLst/>
+                <a:latin typeface="Consolas" panose="020B0609020204030204" pitchFamily="49" charset="0"/>
+              </a:rPr>
+              <a:t>sambi.</a:t>
+            </a:r>
+            <a:r>
+              <a:rPr lang="en-US" sz="1800" b="0" dirty="0" err="1">
+                <a:solidFill>
+                  <a:srgbClr val="BBDAFF"/>
+                </a:solidFill>
+                <a:effectLst/>
+                <a:latin typeface="Consolas" panose="020B0609020204030204" pitchFamily="49" charset="0"/>
+              </a:rPr>
+              <a:t>left</a:t>
+            </a:r>
+            <a:r>
+              <a:rPr lang="en-US" sz="1800" b="0" dirty="0">
+                <a:solidFill>
+                  <a:srgbClr val="BBDAFF"/>
+                </a:solidFill>
+                <a:effectLst/>
+                <a:latin typeface="Consolas" panose="020B0609020204030204" pitchFamily="49" charset="0"/>
+              </a:rPr>
+              <a:t>(</a:t>
+            </a:r>
+            <a:r>
+              <a:rPr lang="en-US" sz="1800" b="0" dirty="0">
+                <a:solidFill>
+                  <a:srgbClr val="FFC58F"/>
+                </a:solidFill>
+                <a:effectLst/>
+                <a:latin typeface="Consolas" panose="020B0609020204030204" pitchFamily="49" charset="0"/>
+              </a:rPr>
+              <a:t>90</a:t>
+            </a:r>
+            <a:r>
+              <a:rPr lang="en-US" sz="1800" b="0" dirty="0">
+                <a:solidFill>
+                  <a:srgbClr val="BBDAFF"/>
+                </a:solidFill>
+                <a:effectLst/>
+                <a:latin typeface="Consolas" panose="020B0609020204030204" pitchFamily="49" charset="0"/>
+              </a:rPr>
+              <a:t>)</a:t>
+            </a:r>
+            <a:endParaRPr lang="en-US" sz="1800" dirty="0">
+              <a:solidFill>
+                <a:srgbClr val="FFFFFF"/>
+              </a:solidFill>
+              <a:latin typeface="Consolas" panose="020B0609020204030204" pitchFamily="49" charset="0"/>
+            </a:endParaRPr>
+          </a:p>
+          <a:p>
+            <a:pPr marL="0" indent="0">
+              <a:lnSpc>
+                <a:spcPct val="80000"/>
+              </a:lnSpc>
+              <a:spcBef>
+                <a:spcPts val="0"/>
+              </a:spcBef>
+              <a:buNone/>
+            </a:pPr>
+            <a:r>
+              <a:rPr lang="en-US" sz="1800" b="0" dirty="0" err="1">
+                <a:solidFill>
+                  <a:srgbClr val="FFFFFF"/>
+                </a:solidFill>
+                <a:effectLst/>
+                <a:latin typeface="Consolas" panose="020B0609020204030204" pitchFamily="49" charset="0"/>
+              </a:rPr>
+              <a:t>sambi.</a:t>
+            </a:r>
+            <a:r>
+              <a:rPr lang="en-US" sz="1800" b="0" dirty="0" err="1">
+                <a:solidFill>
+                  <a:srgbClr val="BBDAFF"/>
+                </a:solidFill>
+                <a:effectLst/>
+                <a:latin typeface="Consolas" panose="020B0609020204030204" pitchFamily="49" charset="0"/>
+              </a:rPr>
+              <a:t>color</a:t>
+            </a:r>
+            <a:r>
+              <a:rPr lang="en-US" sz="1800" b="0" dirty="0">
+                <a:solidFill>
+                  <a:srgbClr val="BBDAFF"/>
+                </a:solidFill>
+                <a:effectLst/>
+                <a:latin typeface="Consolas" panose="020B0609020204030204" pitchFamily="49" charset="0"/>
+              </a:rPr>
+              <a:t>(</a:t>
+            </a:r>
+            <a:r>
+              <a:rPr lang="en-US" sz="1800" b="0" dirty="0">
+                <a:solidFill>
+                  <a:srgbClr val="D1F1A9"/>
+                </a:solidFill>
+                <a:effectLst/>
+                <a:latin typeface="Consolas" panose="020B0609020204030204" pitchFamily="49" charset="0"/>
+              </a:rPr>
+              <a:t>"red"</a:t>
+            </a:r>
+            <a:r>
+              <a:rPr lang="en-US" sz="1800" b="0" dirty="0">
+                <a:solidFill>
+                  <a:srgbClr val="BBDAFF"/>
+                </a:solidFill>
+                <a:effectLst/>
+                <a:latin typeface="Consolas" panose="020B0609020204030204" pitchFamily="49" charset="0"/>
+              </a:rPr>
+              <a:t>)</a:t>
+            </a:r>
+            <a:endParaRPr lang="en-US" sz="1800" b="0" dirty="0">
+              <a:solidFill>
+                <a:srgbClr val="FFFFFF"/>
+              </a:solidFill>
+              <a:effectLst/>
+              <a:latin typeface="Consolas" panose="020B0609020204030204" pitchFamily="49" charset="0"/>
+            </a:endParaRPr>
+          </a:p>
+          <a:p>
+            <a:pPr marL="0" indent="0">
+              <a:lnSpc>
+                <a:spcPct val="80000"/>
+              </a:lnSpc>
+              <a:spcBef>
+                <a:spcPts val="0"/>
+              </a:spcBef>
+              <a:buNone/>
+            </a:pPr>
+            <a:r>
+              <a:rPr lang="en-US" sz="1800" b="0" dirty="0" err="1">
+                <a:solidFill>
+                  <a:srgbClr val="FFFFFF"/>
+                </a:solidFill>
+                <a:effectLst/>
+                <a:latin typeface="Consolas" panose="020B0609020204030204" pitchFamily="49" charset="0"/>
+              </a:rPr>
+              <a:t>sambi.</a:t>
+            </a:r>
+            <a:r>
+              <a:rPr lang="en-US" sz="1800" b="0" dirty="0" err="1">
+                <a:solidFill>
+                  <a:srgbClr val="BBDAFF"/>
+                </a:solidFill>
+                <a:effectLst/>
+                <a:latin typeface="Consolas" panose="020B0609020204030204" pitchFamily="49" charset="0"/>
+              </a:rPr>
+              <a:t>speed</a:t>
+            </a:r>
+            <a:r>
+              <a:rPr lang="en-US" sz="1800" b="0" dirty="0">
+                <a:solidFill>
+                  <a:srgbClr val="BBDAFF"/>
+                </a:solidFill>
+                <a:effectLst/>
+                <a:latin typeface="Consolas" panose="020B0609020204030204" pitchFamily="49" charset="0"/>
+              </a:rPr>
+              <a:t>(</a:t>
+            </a:r>
+            <a:r>
+              <a:rPr lang="en-US" sz="1800" b="0" dirty="0">
+                <a:solidFill>
+                  <a:srgbClr val="FFC58F"/>
+                </a:solidFill>
+                <a:effectLst/>
+                <a:latin typeface="Consolas" panose="020B0609020204030204" pitchFamily="49" charset="0"/>
+              </a:rPr>
+              <a:t>10</a:t>
+            </a:r>
+            <a:r>
+              <a:rPr lang="en-US" sz="1800" b="0" dirty="0">
+                <a:solidFill>
+                  <a:srgbClr val="BBDAFF"/>
+                </a:solidFill>
+                <a:effectLst/>
+                <a:latin typeface="Consolas" panose="020B0609020204030204" pitchFamily="49" charset="0"/>
+              </a:rPr>
+              <a:t>)</a:t>
+            </a:r>
+            <a:endParaRPr lang="en-US" sz="1800" b="0" dirty="0">
+              <a:solidFill>
+                <a:srgbClr val="FFFFFF"/>
+              </a:solidFill>
+              <a:effectLst/>
+              <a:latin typeface="Consolas" panose="020B0609020204030204" pitchFamily="49" charset="0"/>
+            </a:endParaRPr>
+          </a:p>
+          <a:p>
+            <a:pPr marL="0" indent="0">
+              <a:lnSpc>
+                <a:spcPct val="80000"/>
+              </a:lnSpc>
+              <a:spcBef>
+                <a:spcPts val="0"/>
+              </a:spcBef>
+              <a:buNone/>
+            </a:pPr>
+            <a:br>
+              <a:rPr lang="en-US" sz="1800" b="0" dirty="0">
+                <a:solidFill>
+                  <a:srgbClr val="FFFFFF"/>
+                </a:solidFill>
+                <a:effectLst/>
+                <a:latin typeface="Consolas" panose="020B0609020204030204" pitchFamily="49" charset="0"/>
+              </a:rPr>
+            </a:br>
+            <a:br>
+              <a:rPr lang="en-US" sz="1800" b="0" dirty="0">
+                <a:solidFill>
+                  <a:srgbClr val="FFFFFF"/>
+                </a:solidFill>
+                <a:effectLst/>
+                <a:latin typeface="Consolas" panose="020B0609020204030204" pitchFamily="49" charset="0"/>
+              </a:rPr>
+            </a:br>
+            <a:r>
+              <a:rPr lang="en-US" sz="1800" b="1" dirty="0" err="1">
+                <a:solidFill>
+                  <a:srgbClr val="FFFFFF"/>
+                </a:solidFill>
+                <a:effectLst/>
+                <a:latin typeface="Consolas" panose="020B0609020204030204" pitchFamily="49" charset="0"/>
+              </a:rPr>
+              <a:t>sambi.</a:t>
+            </a:r>
+            <a:r>
+              <a:rPr lang="en-US" sz="1800" b="1" dirty="0" err="1">
+                <a:solidFill>
+                  <a:srgbClr val="BBDAFF"/>
+                </a:solidFill>
+                <a:effectLst/>
+                <a:latin typeface="Consolas" panose="020B0609020204030204" pitchFamily="49" charset="0"/>
+              </a:rPr>
+              <a:t>forward</a:t>
+            </a:r>
+            <a:r>
+              <a:rPr lang="en-US" sz="1800" b="1" dirty="0">
+                <a:solidFill>
+                  <a:srgbClr val="BBDAFF"/>
+                </a:solidFill>
+                <a:effectLst/>
+                <a:latin typeface="Consolas" panose="020B0609020204030204" pitchFamily="49" charset="0"/>
+              </a:rPr>
+              <a:t>(</a:t>
+            </a:r>
+            <a:r>
+              <a:rPr lang="en-US" sz="1800" b="1" dirty="0">
+                <a:solidFill>
+                  <a:srgbClr val="FFC58F"/>
+                </a:solidFill>
+                <a:effectLst/>
+                <a:latin typeface="Consolas" panose="020B0609020204030204" pitchFamily="49" charset="0"/>
+              </a:rPr>
+              <a:t>100</a:t>
+            </a:r>
+            <a:r>
+              <a:rPr lang="en-US" sz="1800" b="1" dirty="0">
+                <a:solidFill>
+                  <a:srgbClr val="BBDAFF"/>
+                </a:solidFill>
+                <a:effectLst/>
+                <a:latin typeface="Consolas" panose="020B0609020204030204" pitchFamily="49" charset="0"/>
+              </a:rPr>
+              <a:t>)</a:t>
+            </a:r>
+            <a:endParaRPr lang="en-US" sz="1800" b="1" dirty="0">
+              <a:solidFill>
+                <a:srgbClr val="FFFFFF"/>
+              </a:solidFill>
+              <a:effectLst/>
+              <a:latin typeface="Consolas" panose="020B0609020204030204" pitchFamily="49" charset="0"/>
+            </a:endParaRPr>
+          </a:p>
+          <a:p>
+            <a:pPr marL="0" indent="0">
+              <a:lnSpc>
+                <a:spcPct val="80000"/>
+              </a:lnSpc>
+              <a:spcBef>
+                <a:spcPts val="0"/>
+              </a:spcBef>
+              <a:buNone/>
+            </a:pPr>
+            <a:r>
+              <a:rPr lang="en-US" sz="1800" b="1" dirty="0" err="1">
+                <a:solidFill>
+                  <a:srgbClr val="FFFFFF"/>
+                </a:solidFill>
+                <a:effectLst/>
+                <a:latin typeface="Consolas" panose="020B0609020204030204" pitchFamily="49" charset="0"/>
+              </a:rPr>
+              <a:t>sambi.</a:t>
+            </a:r>
+            <a:r>
+              <a:rPr lang="en-US" sz="1800" b="1" dirty="0" err="1">
+                <a:solidFill>
+                  <a:srgbClr val="BBDAFF"/>
+                </a:solidFill>
+                <a:effectLst/>
+                <a:latin typeface="Consolas" panose="020B0609020204030204" pitchFamily="49" charset="0"/>
+              </a:rPr>
+              <a:t>backward</a:t>
+            </a:r>
+            <a:r>
+              <a:rPr lang="en-US" sz="1800" b="1" dirty="0">
+                <a:solidFill>
+                  <a:srgbClr val="BBDAFF"/>
+                </a:solidFill>
+                <a:effectLst/>
+                <a:latin typeface="Consolas" panose="020B0609020204030204" pitchFamily="49" charset="0"/>
+              </a:rPr>
+              <a:t>(</a:t>
+            </a:r>
+            <a:r>
+              <a:rPr lang="en-US" sz="1800" b="1" dirty="0">
+                <a:solidFill>
+                  <a:srgbClr val="FFC58F"/>
+                </a:solidFill>
+                <a:effectLst/>
+                <a:latin typeface="Consolas" panose="020B0609020204030204" pitchFamily="49" charset="0"/>
+              </a:rPr>
+              <a:t>100</a:t>
+            </a:r>
+            <a:r>
+              <a:rPr lang="en-US" sz="1800" b="1" dirty="0">
+                <a:solidFill>
+                  <a:srgbClr val="BBDAFF"/>
+                </a:solidFill>
+                <a:effectLst/>
+                <a:latin typeface="Consolas" panose="020B0609020204030204" pitchFamily="49" charset="0"/>
+              </a:rPr>
+              <a:t>)</a:t>
+            </a:r>
+            <a:endParaRPr lang="en-US" sz="1800" b="1" dirty="0">
+              <a:solidFill>
+                <a:srgbClr val="FFFFFF"/>
+              </a:solidFill>
+              <a:effectLst/>
+              <a:latin typeface="Consolas" panose="020B0609020204030204" pitchFamily="49" charset="0"/>
+            </a:endParaRPr>
+          </a:p>
+          <a:p>
+            <a:pPr marL="0" indent="0">
+              <a:lnSpc>
+                <a:spcPct val="80000"/>
+              </a:lnSpc>
+              <a:spcBef>
+                <a:spcPts val="0"/>
+              </a:spcBef>
+              <a:buNone/>
+            </a:pPr>
+            <a:r>
+              <a:rPr lang="en-US" sz="1800" b="1" dirty="0" err="1">
+                <a:solidFill>
+                  <a:srgbClr val="FFFFFF"/>
+                </a:solidFill>
+                <a:effectLst/>
+                <a:latin typeface="Consolas" panose="020B0609020204030204" pitchFamily="49" charset="0"/>
+              </a:rPr>
+              <a:t>sambi.</a:t>
+            </a:r>
+            <a:r>
+              <a:rPr lang="en-US" sz="1800" b="1" dirty="0" err="1">
+                <a:solidFill>
+                  <a:srgbClr val="BBDAFF"/>
+                </a:solidFill>
+                <a:effectLst/>
+                <a:latin typeface="Consolas" panose="020B0609020204030204" pitchFamily="49" charset="0"/>
+              </a:rPr>
+              <a:t>right</a:t>
+            </a:r>
+            <a:r>
+              <a:rPr lang="en-US" sz="1800" b="1" dirty="0">
+                <a:solidFill>
+                  <a:srgbClr val="BBDAFF"/>
+                </a:solidFill>
+                <a:effectLst/>
+                <a:latin typeface="Consolas" panose="020B0609020204030204" pitchFamily="49" charset="0"/>
+              </a:rPr>
+              <a:t>(</a:t>
+            </a:r>
+            <a:r>
+              <a:rPr lang="en-US" sz="1800" b="1" dirty="0">
+                <a:solidFill>
+                  <a:srgbClr val="FFC58F"/>
+                </a:solidFill>
+                <a:effectLst/>
+                <a:latin typeface="Consolas" panose="020B0609020204030204" pitchFamily="49" charset="0"/>
+              </a:rPr>
+              <a:t>20</a:t>
+            </a:r>
+            <a:r>
+              <a:rPr lang="en-US" sz="1800" b="1" dirty="0">
+                <a:solidFill>
+                  <a:srgbClr val="BBDAFF"/>
+                </a:solidFill>
+                <a:effectLst/>
+                <a:latin typeface="Consolas" panose="020B0609020204030204" pitchFamily="49" charset="0"/>
+              </a:rPr>
+              <a:t>)</a:t>
+            </a:r>
+            <a:endParaRPr lang="en-US" sz="1800" b="1" dirty="0">
+              <a:solidFill>
+                <a:srgbClr val="FFFFFF"/>
+              </a:solidFill>
+              <a:effectLst/>
+              <a:latin typeface="Consolas" panose="020B0609020204030204" pitchFamily="49" charset="0"/>
+            </a:endParaRPr>
+          </a:p>
+          <a:p>
+            <a:pPr marL="0" indent="0">
+              <a:lnSpc>
+                <a:spcPct val="80000"/>
+              </a:lnSpc>
+              <a:spcBef>
+                <a:spcPts val="0"/>
+              </a:spcBef>
+              <a:buNone/>
+            </a:pPr>
+            <a:endParaRPr lang="en-US" sz="1800" dirty="0">
+              <a:solidFill>
+                <a:srgbClr val="FFFFFF"/>
+              </a:solidFill>
+              <a:latin typeface="Consolas" panose="020B0609020204030204" pitchFamily="49" charset="0"/>
+            </a:endParaRPr>
           </a:p>
         </p:txBody>
       </p:sp>
       <p:pic>
         <p:nvPicPr>
-          <p:cNvPr id="1026" name="Picture 2" descr="Cyber Serpent by orica-cardsbr on DeviantArt">
+          <p:cNvPr id="7" name="Picture 6">
             <a:extLst>
               <a:ext uri="{FF2B5EF4-FFF2-40B4-BE49-F238E27FC236}">
-                <a16:creationId xmlns:a16="http://schemas.microsoft.com/office/drawing/2014/main" id="{6536EF65-D04F-FF26-B80E-F6098922FD54}"/>
+                <a16:creationId xmlns:a16="http://schemas.microsoft.com/office/drawing/2014/main" id="{B221076E-D1A2-8D90-71AD-F7A26D7385A3}"/>
               </a:ext>
             </a:extLst>
           </p:cNvPr>
           <p:cNvPicPr>
-            <a:picLocks noChangeAspect="1" noChangeArrowheads="1"/>
+            <a:picLocks noChangeAspect="1"/>
           </p:cNvPicPr>
           <p:nvPr/>
         </p:nvPicPr>
-        <p:blipFill rotWithShape="1">
-          <a:blip r:embed="rId3">
+        <p:blipFill>
+          <a:blip r:embed="rId3"/>
+          <a:stretch>
+            <a:fillRect/>
+          </a:stretch>
+        </p:blipFill>
+        <p:spPr>
+          <a:xfrm>
+            <a:off x="7603655" y="1880489"/>
+            <a:ext cx="4050470" cy="3720780"/>
+          </a:xfrm>
+          <a:prstGeom prst="rect">
+            <a:avLst/>
+          </a:prstGeom>
+        </p:spPr>
+      </p:pic>
+      <p:sp>
+        <p:nvSpPr>
+          <p:cNvPr id="8" name="Rectangle 7">
             <a:extLst>
-              <a:ext uri="{28A0092B-C50C-407E-A947-70E740481C1C}">
-                <a14:useLocalDpi xmlns:a14="http://schemas.microsoft.com/office/drawing/2010/main" val="0"/>
+              <a:ext uri="{FF2B5EF4-FFF2-40B4-BE49-F238E27FC236}">
+                <a16:creationId xmlns:a16="http://schemas.microsoft.com/office/drawing/2014/main" id="{69464E5F-38EB-C99A-669F-758DBA7F4216}"/>
               </a:ext>
             </a:extLst>
-          </a:blip>
-          <a:srcRect t="302"/>
-          <a:stretch/>
-        </p:blipFill>
-        <p:spPr bwMode="auto">
+          </p:cNvPr>
+          <p:cNvSpPr/>
+          <p:nvPr/>
+        </p:nvSpPr>
+        <p:spPr>
           <a:xfrm>
-            <a:off x="5311702" y="10"/>
-            <a:ext cx="6878775" cy="6857990"/>
+            <a:off x="583595" y="4151376"/>
+            <a:ext cx="3026664" cy="932688"/>
           </a:xfrm>
-          <a:custGeom>
+          <a:prstGeom prst="rect">
             <a:avLst/>
-            <a:gdLst/>
-            <a:ahLst/>
-            <a:cxnLst/>
-            <a:rect l="l" t="t" r="r" b="b"/>
-            <a:pathLst>
-              <a:path w="6878775" h="6858000">
-                <a:moveTo>
-                  <a:pt x="1102973" y="0"/>
-                </a:moveTo>
-                <a:lnTo>
-                  <a:pt x="1160688" y="0"/>
-                </a:lnTo>
-                <a:lnTo>
-                  <a:pt x="983189" y="331786"/>
-                </a:lnTo>
-                <a:cubicBezTo>
-                  <a:pt x="914866" y="469145"/>
-                  <a:pt x="850355" y="608712"/>
-                  <a:pt x="789261" y="750263"/>
-                </a:cubicBezTo>
-                <a:cubicBezTo>
-                  <a:pt x="774307" y="784928"/>
-                  <a:pt x="759992" y="819849"/>
-                  <a:pt x="745295" y="854514"/>
-                </a:cubicBezTo>
-                <a:cubicBezTo>
-                  <a:pt x="756682" y="845393"/>
-                  <a:pt x="765489" y="833492"/>
-                  <a:pt x="770857" y="819975"/>
-                </a:cubicBezTo>
-                <a:cubicBezTo>
-                  <a:pt x="879943" y="589569"/>
-                  <a:pt x="999605" y="365513"/>
-                  <a:pt x="1131329" y="148742"/>
-                </a:cubicBezTo>
-                <a:lnTo>
-                  <a:pt x="1227589" y="0"/>
-                </a:lnTo>
-                <a:lnTo>
-                  <a:pt x="6878775" y="0"/>
-                </a:lnTo>
-                <a:lnTo>
-                  <a:pt x="6878775" y="6858000"/>
-                </a:lnTo>
-                <a:lnTo>
-                  <a:pt x="713521" y="6858000"/>
-                </a:lnTo>
-                <a:lnTo>
-                  <a:pt x="625642" y="6670527"/>
-                </a:lnTo>
-                <a:cubicBezTo>
-                  <a:pt x="507232" y="6398531"/>
-                  <a:pt x="403083" y="6118381"/>
-                  <a:pt x="312785" y="5830359"/>
-                </a:cubicBezTo>
-                <a:cubicBezTo>
-                  <a:pt x="278149" y="5719759"/>
-                  <a:pt x="248879" y="5607635"/>
-                  <a:pt x="212198" y="5480401"/>
-                </a:cubicBezTo>
-                <a:cubicBezTo>
-                  <a:pt x="212208" y="5491601"/>
-                  <a:pt x="212803" y="5502788"/>
-                  <a:pt x="213988" y="5513923"/>
-                </a:cubicBezTo>
-                <a:cubicBezTo>
-                  <a:pt x="264089" y="5723695"/>
-                  <a:pt x="307290" y="5935370"/>
-                  <a:pt x="365826" y="6142729"/>
-                </a:cubicBezTo>
-                <a:cubicBezTo>
-                  <a:pt x="433152" y="6380817"/>
-                  <a:pt x="510068" y="6614016"/>
-                  <a:pt x="597975" y="6841549"/>
-                </a:cubicBezTo>
-                <a:lnTo>
-                  <a:pt x="604824" y="6858000"/>
-                </a:lnTo>
-                <a:lnTo>
-                  <a:pt x="552056" y="6858000"/>
-                </a:lnTo>
-                <a:lnTo>
-                  <a:pt x="539576" y="6828295"/>
-                </a:lnTo>
-                <a:cubicBezTo>
-                  <a:pt x="380597" y="6414594"/>
-                  <a:pt x="260223" y="5988893"/>
-                  <a:pt x="171555" y="5552906"/>
-                </a:cubicBezTo>
-                <a:cubicBezTo>
-                  <a:pt x="91163" y="5157998"/>
-                  <a:pt x="43746" y="4758899"/>
-                  <a:pt x="12305" y="4357388"/>
-                </a:cubicBezTo>
-                <a:cubicBezTo>
-                  <a:pt x="-14281" y="4013908"/>
-                  <a:pt x="4507" y="3672965"/>
-                  <a:pt x="46684" y="3331516"/>
-                </a:cubicBezTo>
-                <a:cubicBezTo>
-                  <a:pt x="127203" y="2664286"/>
-                  <a:pt x="277819" y="2007265"/>
-                  <a:pt x="496065" y="1371196"/>
-                </a:cubicBezTo>
-                <a:cubicBezTo>
-                  <a:pt x="636273" y="966066"/>
-                  <a:pt x="800445" y="573253"/>
-                  <a:pt x="995723" y="196614"/>
-                </a:cubicBezTo>
-                <a:close/>
-              </a:path>
-            </a:pathLst>
-          </a:custGeom>
-          <a:noFill/>
-          <a:extLst>
-            <a:ext uri="{909E8E84-426E-40DD-AFC4-6F175D3DCCD1}">
-              <a14:hiddenFill xmlns:a14="http://schemas.microsoft.com/office/drawing/2010/main">
+          </a:prstGeom>
+          <a:solidFill>
+            <a:schemeClr val="bg2">
+              <a:lumMod val="95000"/>
+              <a:lumOff val="5000"/>
+            </a:schemeClr>
+          </a:solidFill>
+          <a:ln w="38100">
+            <a:solidFill>
+              <a:schemeClr val="tx1"/>
+            </a:solidFill>
+          </a:ln>
+        </p:spPr>
+        <p:style>
+          <a:lnRef idx="2">
+            <a:schemeClr val="dk1">
+              <a:shade val="15000"/>
+            </a:schemeClr>
+          </a:lnRef>
+          <a:fillRef idx="1">
+            <a:schemeClr val="dk1"/>
+          </a:fillRef>
+          <a:effectRef idx="0">
+            <a:schemeClr val="dk1"/>
+          </a:effectRef>
+          <a:fontRef idx="minor">
+            <a:schemeClr val="lt1"/>
+          </a:fontRef>
+        </p:style>
+        <p:txBody>
+          <a:bodyPr rtlCol="0" anchor="ctr"/>
+          <a:lstStyle/>
+          <a:p>
+            <a:pPr marL="0" indent="0">
+              <a:lnSpc>
+                <a:spcPct val="80000"/>
+              </a:lnSpc>
+              <a:spcBef>
+                <a:spcPts val="0"/>
+              </a:spcBef>
+              <a:buNone/>
+            </a:pPr>
+            <a:r>
+              <a:rPr lang="en-US" sz="1800" b="1" dirty="0">
                 <a:solidFill>
                   <a:srgbClr val="FFFFFF"/>
                 </a:solidFill>
-              </a14:hiddenFill>
-            </a:ext>
-          </a:extLst>
-        </p:spPr>
-      </p:pic>
+                <a:effectLst/>
+                <a:latin typeface="Consolas" panose="020B0609020204030204" pitchFamily="49" charset="0"/>
+              </a:rPr>
+              <a:t>  </a:t>
+            </a:r>
+            <a:r>
+              <a:rPr lang="en-US" sz="1800" b="1" dirty="0" err="1">
+                <a:solidFill>
+                  <a:srgbClr val="FFFFFF"/>
+                </a:solidFill>
+                <a:effectLst/>
+                <a:latin typeface="Consolas" panose="020B0609020204030204" pitchFamily="49" charset="0"/>
+              </a:rPr>
+              <a:t>sambi.</a:t>
+            </a:r>
+            <a:r>
+              <a:rPr lang="en-US" sz="1800" b="1" dirty="0" err="1">
+                <a:solidFill>
+                  <a:srgbClr val="BBDAFF"/>
+                </a:solidFill>
+                <a:effectLst/>
+                <a:latin typeface="Consolas" panose="020B0609020204030204" pitchFamily="49" charset="0"/>
+              </a:rPr>
+              <a:t>forward</a:t>
+            </a:r>
+            <a:r>
+              <a:rPr lang="en-US" sz="1800" b="1" dirty="0">
+                <a:solidFill>
+                  <a:srgbClr val="BBDAFF"/>
+                </a:solidFill>
+                <a:effectLst/>
+                <a:latin typeface="Consolas" panose="020B0609020204030204" pitchFamily="49" charset="0"/>
+              </a:rPr>
+              <a:t>(</a:t>
+            </a:r>
+            <a:r>
+              <a:rPr lang="en-US" sz="1800" b="1" dirty="0">
+                <a:solidFill>
+                  <a:srgbClr val="FFC58F"/>
+                </a:solidFill>
+                <a:effectLst/>
+                <a:latin typeface="Consolas" panose="020B0609020204030204" pitchFamily="49" charset="0"/>
+              </a:rPr>
+              <a:t>100</a:t>
+            </a:r>
+            <a:r>
+              <a:rPr lang="en-US" sz="1800" b="1" dirty="0">
+                <a:solidFill>
+                  <a:srgbClr val="BBDAFF"/>
+                </a:solidFill>
+                <a:effectLst/>
+                <a:latin typeface="Consolas" panose="020B0609020204030204" pitchFamily="49" charset="0"/>
+              </a:rPr>
+              <a:t>)</a:t>
+            </a:r>
+            <a:endParaRPr lang="en-US" sz="1800" b="1" dirty="0">
+              <a:solidFill>
+                <a:srgbClr val="FFFFFF"/>
+              </a:solidFill>
+              <a:effectLst/>
+              <a:latin typeface="Consolas" panose="020B0609020204030204" pitchFamily="49" charset="0"/>
+            </a:endParaRPr>
+          </a:p>
+          <a:p>
+            <a:pPr marL="0" indent="0">
+              <a:lnSpc>
+                <a:spcPct val="80000"/>
+              </a:lnSpc>
+              <a:spcBef>
+                <a:spcPts val="0"/>
+              </a:spcBef>
+              <a:buNone/>
+            </a:pPr>
+            <a:r>
+              <a:rPr lang="en-US" sz="1800" b="1" dirty="0">
+                <a:solidFill>
+                  <a:srgbClr val="FFFFFF"/>
+                </a:solidFill>
+                <a:effectLst/>
+                <a:latin typeface="Consolas" panose="020B0609020204030204" pitchFamily="49" charset="0"/>
+              </a:rPr>
+              <a:t>  </a:t>
+            </a:r>
+            <a:r>
+              <a:rPr lang="en-US" sz="1800" b="1" dirty="0" err="1">
+                <a:solidFill>
+                  <a:srgbClr val="FFFFFF"/>
+                </a:solidFill>
+                <a:effectLst/>
+                <a:latin typeface="Consolas" panose="020B0609020204030204" pitchFamily="49" charset="0"/>
+              </a:rPr>
+              <a:t>sambi.</a:t>
+            </a:r>
+            <a:r>
+              <a:rPr lang="en-US" sz="1800" b="1" dirty="0" err="1">
+                <a:solidFill>
+                  <a:srgbClr val="BBDAFF"/>
+                </a:solidFill>
+                <a:effectLst/>
+                <a:latin typeface="Consolas" panose="020B0609020204030204" pitchFamily="49" charset="0"/>
+              </a:rPr>
+              <a:t>backward</a:t>
+            </a:r>
+            <a:r>
+              <a:rPr lang="en-US" sz="1800" b="1" dirty="0">
+                <a:solidFill>
+                  <a:srgbClr val="BBDAFF"/>
+                </a:solidFill>
+                <a:effectLst/>
+                <a:latin typeface="Consolas" panose="020B0609020204030204" pitchFamily="49" charset="0"/>
+              </a:rPr>
+              <a:t>(</a:t>
+            </a:r>
+            <a:r>
+              <a:rPr lang="en-US" sz="1800" b="1" dirty="0">
+                <a:solidFill>
+                  <a:srgbClr val="FFC58F"/>
+                </a:solidFill>
+                <a:effectLst/>
+                <a:latin typeface="Consolas" panose="020B0609020204030204" pitchFamily="49" charset="0"/>
+              </a:rPr>
+              <a:t>100</a:t>
+            </a:r>
+            <a:r>
+              <a:rPr lang="en-US" sz="1800" b="1" dirty="0">
+                <a:solidFill>
+                  <a:srgbClr val="BBDAFF"/>
+                </a:solidFill>
+                <a:effectLst/>
+                <a:latin typeface="Consolas" panose="020B0609020204030204" pitchFamily="49" charset="0"/>
+              </a:rPr>
+              <a:t>)</a:t>
+            </a:r>
+            <a:endParaRPr lang="en-US" sz="1800" b="1" dirty="0">
+              <a:solidFill>
+                <a:srgbClr val="FFFFFF"/>
+              </a:solidFill>
+              <a:effectLst/>
+              <a:latin typeface="Consolas" panose="020B0609020204030204" pitchFamily="49" charset="0"/>
+            </a:endParaRPr>
+          </a:p>
+          <a:p>
+            <a:pPr marL="0" indent="0">
+              <a:lnSpc>
+                <a:spcPct val="80000"/>
+              </a:lnSpc>
+              <a:spcBef>
+                <a:spcPts val="0"/>
+              </a:spcBef>
+              <a:buNone/>
+            </a:pPr>
+            <a:r>
+              <a:rPr lang="en-US" sz="1800" b="1" dirty="0">
+                <a:solidFill>
+                  <a:srgbClr val="FFFFFF"/>
+                </a:solidFill>
+                <a:effectLst/>
+                <a:latin typeface="Consolas" panose="020B0609020204030204" pitchFamily="49" charset="0"/>
+              </a:rPr>
+              <a:t>  </a:t>
+            </a:r>
+            <a:r>
+              <a:rPr lang="en-US" sz="1800" b="1" dirty="0" err="1">
+                <a:solidFill>
+                  <a:srgbClr val="FFFFFF"/>
+                </a:solidFill>
+                <a:effectLst/>
+                <a:latin typeface="Consolas" panose="020B0609020204030204" pitchFamily="49" charset="0"/>
+              </a:rPr>
+              <a:t>sambi.</a:t>
+            </a:r>
+            <a:r>
+              <a:rPr lang="en-US" sz="1800" b="1" dirty="0" err="1">
+                <a:solidFill>
+                  <a:srgbClr val="BBDAFF"/>
+                </a:solidFill>
+                <a:effectLst/>
+                <a:latin typeface="Consolas" panose="020B0609020204030204" pitchFamily="49" charset="0"/>
+              </a:rPr>
+              <a:t>right</a:t>
+            </a:r>
+            <a:r>
+              <a:rPr lang="en-US" sz="1800" b="1" dirty="0">
+                <a:solidFill>
+                  <a:srgbClr val="BBDAFF"/>
+                </a:solidFill>
+                <a:effectLst/>
+                <a:latin typeface="Consolas" panose="020B0609020204030204" pitchFamily="49" charset="0"/>
+              </a:rPr>
+              <a:t>(</a:t>
+            </a:r>
+            <a:r>
+              <a:rPr lang="en-US" sz="1800" b="1" dirty="0">
+                <a:solidFill>
+                  <a:srgbClr val="FFC58F"/>
+                </a:solidFill>
+                <a:effectLst/>
+                <a:latin typeface="Consolas" panose="020B0609020204030204" pitchFamily="49" charset="0"/>
+              </a:rPr>
+              <a:t>20</a:t>
+            </a:r>
+            <a:r>
+              <a:rPr lang="en-US" sz="1800" b="1" dirty="0">
+                <a:solidFill>
+                  <a:srgbClr val="BBDAFF"/>
+                </a:solidFill>
+                <a:effectLst/>
+                <a:latin typeface="Consolas" panose="020B0609020204030204" pitchFamily="49" charset="0"/>
+              </a:rPr>
+              <a:t>)</a:t>
+            </a:r>
+            <a:endParaRPr lang="en-US" sz="1800" b="1" dirty="0">
+              <a:solidFill>
+                <a:srgbClr val="FFFFFF"/>
+              </a:solidFill>
+              <a:effectLst/>
+              <a:latin typeface="Consolas" panose="020B0609020204030204" pitchFamily="49" charset="0"/>
+            </a:endParaRPr>
+          </a:p>
+        </p:txBody>
+      </p:sp>
     </p:spTree>
     <p:extLst>
       <p:ext uri="{BB962C8B-B14F-4D97-AF65-F5344CB8AC3E}">
-        <p14:creationId xmlns:p14="http://schemas.microsoft.com/office/powerpoint/2010/main" val="1720523774"/>
+        <p14:creationId xmlns:p14="http://schemas.microsoft.com/office/powerpoint/2010/main" val="442505114"/>
       </p:ext>
     </p:extLst>
   </p:cSld>
   <p:clrMapOvr>
     <a:masterClrMapping/>
   </p:clrMapOvr>
-  <mc:AlternateContent xmlns:mc="http://schemas.openxmlformats.org/markup-compatibility/2006" xmlns:p159="http://schemas.microsoft.com/office/powerpoint/2015/09/main">
-    <mc:Choice Requires="p159">
-      <p:transition xmlns:p14="http://schemas.microsoft.com/office/powerpoint/2010/main" spd="slow" p14:dur="2000">
-        <p159:morph option="byObject"/>
+  <mc:AlternateContent xmlns:mc="http://schemas.openxmlformats.org/markup-compatibility/2006" xmlns:p14="http://schemas.microsoft.com/office/powerpoint/2010/main">
+    <mc:Choice Requires="p14">
+      <p:transition spd="med" p14:dur="700">
+        <p:fade/>
       </p:transition>
     </mc:Choice>
     <mc:Fallback xmlns="">
-      <p:transition spd="slow">
+      <p:transition spd="med">
         <p:fade/>
       </p:transition>
     </mc:Fallback>
   </mc:AlternateContent>
-  <p:timing>
-    <p:tnLst>
-      <p:par>
-        <p:cTn id="1" dur="indefinite" restart="never" nodeType="tmRoot">
-          <p:childTnLst>
-            <p:seq concurrent="1" nextAc="seek">
-              <p:cTn id="2" dur="indefinite" nodeType="mainSeq">
-                <p:childTnLst>
-                  <p:par>
-                    <p:cTn id="3" fill="hold">
-                      <p:stCondLst>
-                        <p:cond delay="indefinite"/>
-                      </p:stCondLst>
-                      <p:childTnLst>
-                        <p:par>
-                          <p:cTn id="4" fill="hold">
-                            <p:stCondLst>
-                              <p:cond delay="0"/>
-                            </p:stCondLst>
-                            <p:childTnLst>
-                              <p:par>
-                                <p:cTn id="5" presetID="10" presetClass="entr" presetSubtype="0" fill="hold" nodeType="clickEffect">
-                                  <p:stCondLst>
-                                    <p:cond delay="0"/>
-                                  </p:stCondLst>
-                                  <p:childTnLst>
-                                    <p:set>
-                                      <p:cBhvr>
-                                        <p:cTn id="6" dur="1" fill="hold">
-                                          <p:stCondLst>
-                                            <p:cond delay="0"/>
-                                          </p:stCondLst>
-                                        </p:cTn>
-                                        <p:tgtEl>
-                                          <p:spTgt spid="3">
-                                            <p:txEl>
-                                              <p:pRg st="0" end="0"/>
-                                            </p:txEl>
-                                          </p:spTgt>
-                                        </p:tgtEl>
-                                        <p:attrNameLst>
-                                          <p:attrName>style.visibility</p:attrName>
-                                        </p:attrNameLst>
-                                      </p:cBhvr>
-                                      <p:to>
-                                        <p:strVal val="visible"/>
-                                      </p:to>
-                                    </p:set>
-                                    <p:animEffect transition="in" filter="fade">
-                                      <p:cBhvr>
-                                        <p:cTn id="7" dur="500"/>
-                                        <p:tgtEl>
-                                          <p:spTgt spid="3">
-                                            <p:txEl>
-                                              <p:pRg st="0" end="0"/>
-                                            </p:txEl>
-                                          </p:spTgt>
-                                        </p:tgtEl>
-                                      </p:cBhvr>
-                                    </p:animEffect>
-                                  </p:childTnLst>
-                                </p:cTn>
-                              </p:par>
-                            </p:childTnLst>
-                          </p:cTn>
-                        </p:par>
-                      </p:childTnLst>
-                    </p:cTn>
-                  </p:par>
-                  <p:par>
-                    <p:cTn id="8" fill="hold">
-                      <p:stCondLst>
-                        <p:cond delay="indefinite"/>
-                      </p:stCondLst>
-                      <p:childTnLst>
-                        <p:par>
-                          <p:cTn id="9" fill="hold">
-                            <p:stCondLst>
-                              <p:cond delay="0"/>
-                            </p:stCondLst>
-                            <p:childTnLst>
-                              <p:par>
-                                <p:cTn id="10" presetID="10" presetClass="entr" presetSubtype="0" fill="hold" nodeType="clickEffect">
-                                  <p:stCondLst>
-                                    <p:cond delay="0"/>
-                                  </p:stCondLst>
-                                  <p:childTnLst>
-                                    <p:set>
-                                      <p:cBhvr>
-                                        <p:cTn id="11" dur="1" fill="hold">
-                                          <p:stCondLst>
-                                            <p:cond delay="0"/>
-                                          </p:stCondLst>
-                                        </p:cTn>
-                                        <p:tgtEl>
-                                          <p:spTgt spid="3">
-                                            <p:txEl>
-                                              <p:pRg st="2" end="2"/>
-                                            </p:txEl>
-                                          </p:spTgt>
-                                        </p:tgtEl>
-                                        <p:attrNameLst>
-                                          <p:attrName>style.visibility</p:attrName>
-                                        </p:attrNameLst>
-                                      </p:cBhvr>
-                                      <p:to>
-                                        <p:strVal val="visible"/>
-                                      </p:to>
-                                    </p:set>
-                                    <p:animEffect transition="in" filter="fade">
-                                      <p:cBhvr>
-                                        <p:cTn id="12" dur="500"/>
-                                        <p:tgtEl>
-                                          <p:spTgt spid="3">
-                                            <p:txEl>
-                                              <p:pRg st="2" end="2"/>
-                                            </p:txEl>
-                                          </p:spTgt>
-                                        </p:tgtEl>
-                                      </p:cBhvr>
-                                    </p:animEffect>
-                                  </p:childTnLst>
-                                </p:cTn>
-                              </p:par>
-                            </p:childTnLst>
-                          </p:cTn>
-                        </p:par>
-                      </p:childTnLst>
-                    </p:cTn>
-                  </p:par>
-                  <p:par>
-                    <p:cTn id="13" fill="hold">
-                      <p:stCondLst>
-                        <p:cond delay="indefinite"/>
-                      </p:stCondLst>
-                      <p:childTnLst>
-                        <p:par>
-                          <p:cTn id="14" fill="hold">
-                            <p:stCondLst>
-                              <p:cond delay="0"/>
-                            </p:stCondLst>
-                            <p:childTnLst>
-                              <p:par>
-                                <p:cTn id="15" presetID="10" presetClass="entr" presetSubtype="0" fill="hold" nodeType="clickEffect">
-                                  <p:stCondLst>
-                                    <p:cond delay="0"/>
-                                  </p:stCondLst>
-                                  <p:childTnLst>
-                                    <p:set>
-                                      <p:cBhvr>
-                                        <p:cTn id="16" dur="1" fill="hold">
-                                          <p:stCondLst>
-                                            <p:cond delay="0"/>
-                                          </p:stCondLst>
-                                        </p:cTn>
-                                        <p:tgtEl>
-                                          <p:spTgt spid="3">
-                                            <p:txEl>
-                                              <p:pRg st="4" end="4"/>
-                                            </p:txEl>
-                                          </p:spTgt>
-                                        </p:tgtEl>
-                                        <p:attrNameLst>
-                                          <p:attrName>style.visibility</p:attrName>
-                                        </p:attrNameLst>
-                                      </p:cBhvr>
-                                      <p:to>
-                                        <p:strVal val="visible"/>
-                                      </p:to>
-                                    </p:set>
-                                    <p:animEffect transition="in" filter="fade">
-                                      <p:cBhvr>
-                                        <p:cTn id="17" dur="500"/>
-                                        <p:tgtEl>
-                                          <p:spTgt spid="3">
-                                            <p:txEl>
-                                              <p:pRg st="4" end="4"/>
-                                            </p:txEl>
-                                          </p:spTgt>
-                                        </p:tgtEl>
-                                      </p:cBhvr>
-                                    </p:animEffect>
-                                  </p:childTnLst>
-                                </p:cTn>
-                              </p:par>
-                            </p:childTnLst>
-                          </p:cTn>
-                        </p:par>
-                      </p:childTnLst>
-                    </p:cTn>
-                  </p:par>
-                </p:childTnLst>
-              </p:cTn>
-              <p:prevCondLst>
-                <p:cond evt="onPrev" delay="0">
-                  <p:tgtEl>
-                    <p:sldTgt/>
-                  </p:tgtEl>
-                </p:cond>
-              </p:prevCondLst>
-              <p:nextCondLst>
-                <p:cond evt="onNext" delay="0">
-                  <p:tgtEl>
-                    <p:sldTgt/>
-                  </p:tgtEl>
-                </p:cond>
-              </p:nextCondLst>
-            </p:seq>
-          </p:childTnLst>
-        </p:cTn>
-      </p:par>
-    </p:tnLst>
-  </p:timing>
+</p:sld>
+</file>
+
+<file path=ppt/slides/slide3.xml><?xml version="1.0" encoding="utf-8"?>
+<p:sld xmlns:a="http://schemas.openxmlformats.org/drawingml/2006/main" xmlns:r="http://schemas.openxmlformats.org/officeDocument/2006/relationships" xmlns:p="http://schemas.openxmlformats.org/presentationml/2006/main">
+  <p:cSld>
+    <p:spTree>
+      <p:nvGrpSpPr>
+        <p:cNvPr id="1" name=""/>
+        <p:cNvGrpSpPr/>
+        <p:nvPr/>
+      </p:nvGrpSpPr>
+      <p:grpSpPr>
+        <a:xfrm>
+          <a:off x="0" y="0"/>
+          <a:ext cx="0" cy="0"/>
+          <a:chOff x="0" y="0"/>
+          <a:chExt cx="0" cy="0"/>
+        </a:xfrm>
+      </p:grpSpPr>
+      <p:sp>
+        <p:nvSpPr>
+          <p:cNvPr id="2" name="Title 1">
+            <a:extLst>
+              <a:ext uri="{FF2B5EF4-FFF2-40B4-BE49-F238E27FC236}">
+                <a16:creationId xmlns:a16="http://schemas.microsoft.com/office/drawing/2014/main" id="{010F4922-BC8F-59D3-E64D-070477F697B0}"/>
+              </a:ext>
+            </a:extLst>
+          </p:cNvPr>
+          <p:cNvSpPr>
+            <a:spLocks noGrp="1"/>
+          </p:cNvSpPr>
+          <p:nvPr>
+            <p:ph type="title"/>
+          </p:nvPr>
+        </p:nvSpPr>
+        <p:spPr/>
+        <p:txBody>
+          <a:bodyPr/>
+          <a:lstStyle/>
+          <a:p>
+            <a:r>
+              <a:rPr lang="en-US" dirty="0"/>
+              <a:t>Agenda</a:t>
+            </a:r>
+          </a:p>
+        </p:txBody>
+      </p:sp>
+      <p:sp>
+        <p:nvSpPr>
+          <p:cNvPr id="3" name="Content Placeholder 2">
+            <a:extLst>
+              <a:ext uri="{FF2B5EF4-FFF2-40B4-BE49-F238E27FC236}">
+                <a16:creationId xmlns:a16="http://schemas.microsoft.com/office/drawing/2014/main" id="{91C67F44-1E85-A791-3F4D-664AF1C8CDC3}"/>
+              </a:ext>
+            </a:extLst>
+          </p:cNvPr>
+          <p:cNvSpPr>
+            <a:spLocks noGrp="1"/>
+          </p:cNvSpPr>
+          <p:nvPr>
+            <p:ph sz="half" idx="1"/>
+          </p:nvPr>
+        </p:nvSpPr>
+        <p:spPr/>
+        <p:txBody>
+          <a:bodyPr/>
+          <a:lstStyle/>
+          <a:p>
+            <a:r>
+              <a:rPr lang="en-US" dirty="0"/>
+              <a:t>What Python Does</a:t>
+            </a:r>
+          </a:p>
+          <a:p>
+            <a:r>
+              <a:rPr lang="en-US" dirty="0"/>
+              <a:t>Turtle Graphics</a:t>
+            </a:r>
+          </a:p>
+          <a:p>
+            <a:r>
+              <a:rPr lang="en-US" dirty="0"/>
+              <a:t>Mini Quiz</a:t>
+            </a:r>
+          </a:p>
+          <a:p>
+            <a:r>
+              <a:rPr lang="en-US" dirty="0"/>
+              <a:t>Loops</a:t>
+            </a:r>
+          </a:p>
+          <a:p>
+            <a:r>
+              <a:rPr lang="en-US" dirty="0"/>
+              <a:t>Python in the World</a:t>
+            </a:r>
+          </a:p>
+        </p:txBody>
+      </p:sp>
+    </p:spTree>
+    <p:extLst>
+      <p:ext uri="{BB962C8B-B14F-4D97-AF65-F5344CB8AC3E}">
+        <p14:creationId xmlns:p14="http://schemas.microsoft.com/office/powerpoint/2010/main" val="1196596656"/>
+      </p:ext>
+    </p:extLst>
+  </p:cSld>
+  <p:clrMapOvr>
+    <a:masterClrMapping/>
+  </p:clrMapOvr>
 </p:sld>
 </file>
 
@@ -24562,7 +25070,7 @@
           <p:nvPr/>
         </p:nvPicPr>
         <p:blipFill>
-          <a:blip r:embed="rId2"/>
+          <a:blip r:embed="rId3"/>
           <a:stretch>
             <a:fillRect/>
           </a:stretch>
@@ -24591,8 +25099,8 @@
         </p:nvSpPr>
         <p:spPr>
           <a:xfrm>
-            <a:off x="583595" y="4151376"/>
-            <a:ext cx="3026664" cy="932688"/>
+            <a:off x="54864" y="1880489"/>
+            <a:ext cx="7406640" cy="4612386"/>
           </a:xfrm>
           <a:prstGeom prst="rect">
             <a:avLst/>
@@ -24639,7 +25147,7 @@
               <a:buNone/>
             </a:pPr>
             <a:r>
-              <a:rPr lang="en-US" sz="1800" b="1" dirty="0">
+              <a:rPr lang="en-US" sz="4400" b="1" dirty="0">
                 <a:solidFill>
                   <a:srgbClr val="FFFFFF"/>
                 </a:solidFill>
@@ -24649,7 +25157,7 @@
               <a:t>  </a:t>
             </a:r>
             <a:r>
-              <a:rPr lang="en-US" sz="1800" b="1" dirty="0" err="1">
+              <a:rPr lang="en-US" sz="4400" dirty="0" err="1">
                 <a:solidFill>
                   <a:srgbClr val="FFFFFF"/>
                 </a:solidFill>
@@ -24659,7 +25167,7 @@
               <a:t>sambi.</a:t>
             </a:r>
             <a:r>
-              <a:rPr lang="en-US" sz="1800" b="1" dirty="0" err="1">
+              <a:rPr lang="en-US" sz="4400" dirty="0" err="1">
                 <a:solidFill>
                   <a:srgbClr val="BBDAFF"/>
                 </a:solidFill>
@@ -24669,7 +25177,7 @@
               <a:t>forward</a:t>
             </a:r>
             <a:r>
-              <a:rPr lang="en-US" sz="1800" b="1" dirty="0">
+              <a:rPr lang="en-US" sz="4400" dirty="0">
                 <a:solidFill>
                   <a:srgbClr val="BBDAFF"/>
                 </a:solidFill>
@@ -24679,7 +25187,7 @@
               <a:t>(</a:t>
             </a:r>
             <a:r>
-              <a:rPr lang="en-US" sz="1800" b="1" dirty="0">
+              <a:rPr lang="en-US" sz="4400" dirty="0">
                 <a:solidFill>
                   <a:srgbClr val="FFC58F"/>
                 </a:solidFill>
@@ -24689,7 +25197,7 @@
               <a:t>100</a:t>
             </a:r>
             <a:r>
-              <a:rPr lang="en-US" sz="1800" b="1" dirty="0">
+              <a:rPr lang="en-US" sz="4400" dirty="0">
                 <a:solidFill>
                   <a:srgbClr val="BBDAFF"/>
                 </a:solidFill>
@@ -24698,7 +25206,7 @@
               </a:rPr>
               <a:t>)</a:t>
             </a:r>
-            <a:endParaRPr lang="en-US" sz="1800" b="1" dirty="0">
+            <a:endParaRPr lang="en-US" sz="4400" dirty="0">
               <a:solidFill>
                 <a:srgbClr val="FFFFFF"/>
               </a:solidFill>
@@ -24717,7 +25225,7 @@
               <a:buNone/>
             </a:pPr>
             <a:r>
-              <a:rPr lang="en-US" sz="1800" b="1" dirty="0">
+              <a:rPr lang="en-US" sz="4400" dirty="0">
                 <a:solidFill>
                   <a:srgbClr val="FFFFFF"/>
                 </a:solidFill>
@@ -24727,7 +25235,7 @@
               <a:t>  </a:t>
             </a:r>
             <a:r>
-              <a:rPr lang="en-US" sz="1800" b="1" dirty="0" err="1">
+              <a:rPr lang="en-US" sz="4400" dirty="0" err="1">
                 <a:solidFill>
                   <a:srgbClr val="FFFFFF"/>
                 </a:solidFill>
@@ -24737,7 +25245,7 @@
               <a:t>sambi.</a:t>
             </a:r>
             <a:r>
-              <a:rPr lang="en-US" sz="1800" b="1" dirty="0" err="1">
+              <a:rPr lang="en-US" sz="4400" dirty="0" err="1">
                 <a:solidFill>
                   <a:srgbClr val="BBDAFF"/>
                 </a:solidFill>
@@ -24747,7 +25255,7 @@
               <a:t>backward</a:t>
             </a:r>
             <a:r>
-              <a:rPr lang="en-US" sz="1800" b="1" dirty="0">
+              <a:rPr lang="en-US" sz="4400" dirty="0">
                 <a:solidFill>
                   <a:srgbClr val="BBDAFF"/>
                 </a:solidFill>
@@ -24757,7 +25265,7 @@
               <a:t>(</a:t>
             </a:r>
             <a:r>
-              <a:rPr lang="en-US" sz="1800" b="1" dirty="0">
+              <a:rPr lang="en-US" sz="4400" dirty="0">
                 <a:solidFill>
                   <a:srgbClr val="FFC58F"/>
                 </a:solidFill>
@@ -24767,7 +25275,7 @@
               <a:t>100</a:t>
             </a:r>
             <a:r>
-              <a:rPr lang="en-US" sz="1800" b="1" dirty="0">
+              <a:rPr lang="en-US" sz="4400" dirty="0">
                 <a:solidFill>
                   <a:srgbClr val="BBDAFF"/>
                 </a:solidFill>
@@ -24776,7 +25284,7 @@
               </a:rPr>
               <a:t>)</a:t>
             </a:r>
-            <a:endParaRPr lang="en-US" sz="1800" b="1" dirty="0">
+            <a:endParaRPr lang="en-US" sz="4400" dirty="0">
               <a:solidFill>
                 <a:srgbClr val="FFFFFF"/>
               </a:solidFill>
@@ -24795,7 +25303,7 @@
               <a:buNone/>
             </a:pPr>
             <a:r>
-              <a:rPr lang="en-US" sz="1800" b="1" dirty="0">
+              <a:rPr lang="en-US" sz="4400" dirty="0">
                 <a:solidFill>
                   <a:srgbClr val="FFFFFF"/>
                 </a:solidFill>
@@ -24805,7 +25313,7 @@
               <a:t>  </a:t>
             </a:r>
             <a:r>
-              <a:rPr lang="en-US" sz="1800" b="1" dirty="0" err="1">
+              <a:rPr lang="en-US" sz="4400" dirty="0" err="1">
                 <a:solidFill>
                   <a:srgbClr val="FFFFFF"/>
                 </a:solidFill>
@@ -24815,7 +25323,7 @@
               <a:t>sambi.</a:t>
             </a:r>
             <a:r>
-              <a:rPr lang="en-US" sz="1800" b="1" dirty="0" err="1">
+              <a:rPr lang="en-US" sz="4400" dirty="0" err="1">
                 <a:solidFill>
                   <a:srgbClr val="BBDAFF"/>
                 </a:solidFill>
@@ -24825,7 +25333,7 @@
               <a:t>right</a:t>
             </a:r>
             <a:r>
-              <a:rPr lang="en-US" sz="1800" b="1" dirty="0">
+              <a:rPr lang="en-US" sz="4400" dirty="0">
                 <a:solidFill>
                   <a:srgbClr val="BBDAFF"/>
                 </a:solidFill>
@@ -24835,7 +25343,7 @@
               <a:t>(</a:t>
             </a:r>
             <a:r>
-              <a:rPr lang="en-US" sz="1800" b="1" dirty="0">
+              <a:rPr lang="en-US" sz="4400" dirty="0">
                 <a:solidFill>
                   <a:srgbClr val="FFC58F"/>
                 </a:solidFill>
@@ -24845,7 +25353,7 @@
               <a:t>20</a:t>
             </a:r>
             <a:r>
-              <a:rPr lang="en-US" sz="1800" b="1" dirty="0">
+              <a:rPr lang="en-US" sz="4400" dirty="0">
                 <a:solidFill>
                   <a:srgbClr val="BBDAFF"/>
                 </a:solidFill>
@@ -24854,7 +25362,7 @@
               </a:rPr>
               <a:t>)</a:t>
             </a:r>
-            <a:endParaRPr lang="en-US" sz="1800" b="1" dirty="0">
+            <a:endParaRPr lang="en-US" sz="4400" dirty="0">
               <a:solidFill>
                 <a:srgbClr val="FFFFFF"/>
               </a:solidFill>
@@ -24867,21 +25375,21 @@
     </p:spTree>
     <p:extLst>
       <p:ext uri="{BB962C8B-B14F-4D97-AF65-F5344CB8AC3E}">
-        <p14:creationId xmlns:p14="http://schemas.microsoft.com/office/powerpoint/2010/main" val="442505114"/>
+        <p14:creationId xmlns:p14="http://schemas.microsoft.com/office/powerpoint/2010/main" val="255088620"/>
       </p:ext>
     </p:extLst>
   </p:cSld>
   <p:clrMapOvr>
     <a:masterClrMapping/>
   </p:clrMapOvr>
-  <mc:AlternateContent xmlns:mc="http://schemas.openxmlformats.org/markup-compatibility/2006" xmlns:p14="http://schemas.microsoft.com/office/powerpoint/2010/main">
-    <mc:Choice Requires="p14">
-      <p:transition spd="med" p14:dur="700">
-        <p:fade/>
+  <mc:AlternateContent xmlns:mc="http://schemas.openxmlformats.org/markup-compatibility/2006" xmlns:p159="http://schemas.microsoft.com/office/powerpoint/2015/09/main">
+    <mc:Choice Requires="p159">
+      <p:transition xmlns:p14="http://schemas.microsoft.com/office/powerpoint/2010/main" spd="slow" p14:dur="2000">
+        <p159:morph option="byObject"/>
       </p:transition>
     </mc:Choice>
     <mc:Fallback xmlns="">
-      <p:transition spd="med">
+      <p:transition spd="slow">
         <p:fade/>
       </p:transition>
     </mc:Fallback>
@@ -25793,1238 +26301,7 @@
           <p:nvPr/>
         </p:nvPicPr>
         <p:blipFill>
-          <a:blip r:embed="rId2"/>
-          <a:stretch>
-            <a:fillRect/>
-          </a:stretch>
-        </p:blipFill>
-        <p:spPr>
-          <a:xfrm>
-            <a:off x="7603655" y="1880489"/>
-            <a:ext cx="4050470" cy="3720780"/>
-          </a:xfrm>
-          <a:prstGeom prst="rect">
-            <a:avLst/>
-          </a:prstGeom>
-        </p:spPr>
-      </p:pic>
-      <p:sp>
-        <p:nvSpPr>
-          <p:cNvPr id="8" name="Rectangle 7">
-            <a:extLst>
-              <a:ext uri="{FF2B5EF4-FFF2-40B4-BE49-F238E27FC236}">
-                <a16:creationId xmlns:a16="http://schemas.microsoft.com/office/drawing/2014/main" id="{69464E5F-38EB-C99A-669F-758DBA7F4216}"/>
-              </a:ext>
-            </a:extLst>
-          </p:cNvPr>
-          <p:cNvSpPr/>
-          <p:nvPr/>
-        </p:nvSpPr>
-        <p:spPr>
-          <a:xfrm>
-            <a:off x="54864" y="1880489"/>
-            <a:ext cx="7406640" cy="4612386"/>
-          </a:xfrm>
-          <a:prstGeom prst="rect">
-            <a:avLst/>
-          </a:prstGeom>
-          <a:solidFill>
-            <a:schemeClr val="bg2">
-              <a:lumMod val="95000"/>
-              <a:lumOff val="5000"/>
-            </a:schemeClr>
-          </a:solidFill>
-          <a:ln w="38100">
-            <a:solidFill>
-              <a:schemeClr val="tx1"/>
-            </a:solidFill>
-          </a:ln>
-        </p:spPr>
-        <p:style>
-          <a:lnRef idx="2">
-            <a:schemeClr val="dk1">
-              <a:shade val="15000"/>
-            </a:schemeClr>
-          </a:lnRef>
-          <a:fillRef idx="1">
-            <a:schemeClr val="dk1"/>
-          </a:fillRef>
-          <a:effectRef idx="0">
-            <a:schemeClr val="dk1"/>
-          </a:effectRef>
-          <a:fontRef idx="minor">
-            <a:schemeClr val="lt1"/>
-          </a:fontRef>
-        </p:style>
-        <p:txBody>
-          <a:bodyPr rtlCol="0" anchor="ctr"/>
-          <a:lstStyle/>
-          <a:p>
-            <a:pPr marL="0" indent="0">
-              <a:lnSpc>
-                <a:spcPct val="80000"/>
-              </a:lnSpc>
-              <a:spcBef>
-                <a:spcPts val="0"/>
-              </a:spcBef>
-              <a:buNone/>
-            </a:pPr>
-            <a:r>
-              <a:rPr lang="en-US" sz="4400" b="1" dirty="0">
-                <a:solidFill>
-                  <a:srgbClr val="FFFFFF"/>
-                </a:solidFill>
-                <a:effectLst/>
-                <a:latin typeface="Consolas" panose="020B0609020204030204" pitchFamily="49" charset="0"/>
-              </a:rPr>
-              <a:t>  </a:t>
-            </a:r>
-            <a:r>
-              <a:rPr lang="en-US" sz="4400" dirty="0" err="1">
-                <a:solidFill>
-                  <a:srgbClr val="FFFFFF"/>
-                </a:solidFill>
-                <a:effectLst/>
-                <a:latin typeface="Consolas" panose="020B0609020204030204" pitchFamily="49" charset="0"/>
-              </a:rPr>
-              <a:t>sambi.</a:t>
-            </a:r>
-            <a:r>
-              <a:rPr lang="en-US" sz="4400" dirty="0" err="1">
-                <a:solidFill>
-                  <a:srgbClr val="BBDAFF"/>
-                </a:solidFill>
-                <a:effectLst/>
-                <a:latin typeface="Consolas" panose="020B0609020204030204" pitchFamily="49" charset="0"/>
-              </a:rPr>
-              <a:t>forward</a:t>
-            </a:r>
-            <a:r>
-              <a:rPr lang="en-US" sz="4400" dirty="0">
-                <a:solidFill>
-                  <a:srgbClr val="BBDAFF"/>
-                </a:solidFill>
-                <a:effectLst/>
-                <a:latin typeface="Consolas" panose="020B0609020204030204" pitchFamily="49" charset="0"/>
-              </a:rPr>
-              <a:t>(</a:t>
-            </a:r>
-            <a:r>
-              <a:rPr lang="en-US" sz="4400" dirty="0">
-                <a:solidFill>
-                  <a:srgbClr val="FFC58F"/>
-                </a:solidFill>
-                <a:effectLst/>
-                <a:latin typeface="Consolas" panose="020B0609020204030204" pitchFamily="49" charset="0"/>
-              </a:rPr>
-              <a:t>100</a:t>
-            </a:r>
-            <a:r>
-              <a:rPr lang="en-US" sz="4400" dirty="0">
-                <a:solidFill>
-                  <a:srgbClr val="BBDAFF"/>
-                </a:solidFill>
-                <a:effectLst/>
-                <a:latin typeface="Consolas" panose="020B0609020204030204" pitchFamily="49" charset="0"/>
-              </a:rPr>
-              <a:t>)</a:t>
-            </a:r>
-            <a:endParaRPr lang="en-US" sz="4400" dirty="0">
-              <a:solidFill>
-                <a:srgbClr val="FFFFFF"/>
-              </a:solidFill>
-              <a:effectLst/>
-              <a:latin typeface="Consolas" panose="020B0609020204030204" pitchFamily="49" charset="0"/>
-            </a:endParaRPr>
-          </a:p>
-          <a:p>
-            <a:pPr marL="0" indent="0">
-              <a:lnSpc>
-                <a:spcPct val="80000"/>
-              </a:lnSpc>
-              <a:spcBef>
-                <a:spcPts val="0"/>
-              </a:spcBef>
-              <a:buNone/>
-            </a:pPr>
-            <a:r>
-              <a:rPr lang="en-US" sz="4400" dirty="0">
-                <a:solidFill>
-                  <a:srgbClr val="FFFFFF"/>
-                </a:solidFill>
-                <a:effectLst/>
-                <a:latin typeface="Consolas" panose="020B0609020204030204" pitchFamily="49" charset="0"/>
-              </a:rPr>
-              <a:t>  </a:t>
-            </a:r>
-            <a:r>
-              <a:rPr lang="en-US" sz="4400" dirty="0" err="1">
-                <a:solidFill>
-                  <a:srgbClr val="FFFFFF"/>
-                </a:solidFill>
-                <a:effectLst/>
-                <a:latin typeface="Consolas" panose="020B0609020204030204" pitchFamily="49" charset="0"/>
-              </a:rPr>
-              <a:t>sambi.</a:t>
-            </a:r>
-            <a:r>
-              <a:rPr lang="en-US" sz="4400" dirty="0" err="1">
-                <a:solidFill>
-                  <a:srgbClr val="BBDAFF"/>
-                </a:solidFill>
-                <a:effectLst/>
-                <a:latin typeface="Consolas" panose="020B0609020204030204" pitchFamily="49" charset="0"/>
-              </a:rPr>
-              <a:t>backward</a:t>
-            </a:r>
-            <a:r>
-              <a:rPr lang="en-US" sz="4400" dirty="0">
-                <a:solidFill>
-                  <a:srgbClr val="BBDAFF"/>
-                </a:solidFill>
-                <a:effectLst/>
-                <a:latin typeface="Consolas" panose="020B0609020204030204" pitchFamily="49" charset="0"/>
-              </a:rPr>
-              <a:t>(</a:t>
-            </a:r>
-            <a:r>
-              <a:rPr lang="en-US" sz="4400" dirty="0">
-                <a:solidFill>
-                  <a:srgbClr val="FFC58F"/>
-                </a:solidFill>
-                <a:effectLst/>
-                <a:latin typeface="Consolas" panose="020B0609020204030204" pitchFamily="49" charset="0"/>
-              </a:rPr>
-              <a:t>100</a:t>
-            </a:r>
-            <a:r>
-              <a:rPr lang="en-US" sz="4400" dirty="0">
-                <a:solidFill>
-                  <a:srgbClr val="BBDAFF"/>
-                </a:solidFill>
-                <a:effectLst/>
-                <a:latin typeface="Consolas" panose="020B0609020204030204" pitchFamily="49" charset="0"/>
-              </a:rPr>
-              <a:t>)</a:t>
-            </a:r>
-            <a:endParaRPr lang="en-US" sz="4400" dirty="0">
-              <a:solidFill>
-                <a:srgbClr val="FFFFFF"/>
-              </a:solidFill>
-              <a:effectLst/>
-              <a:latin typeface="Consolas" panose="020B0609020204030204" pitchFamily="49" charset="0"/>
-            </a:endParaRPr>
-          </a:p>
-          <a:p>
-            <a:pPr marL="0" indent="0">
-              <a:lnSpc>
-                <a:spcPct val="80000"/>
-              </a:lnSpc>
-              <a:spcBef>
-                <a:spcPts val="0"/>
-              </a:spcBef>
-              <a:buNone/>
-            </a:pPr>
-            <a:r>
-              <a:rPr lang="en-US" sz="4400" dirty="0">
-                <a:solidFill>
-                  <a:srgbClr val="FFFFFF"/>
-                </a:solidFill>
-                <a:effectLst/>
-                <a:latin typeface="Consolas" panose="020B0609020204030204" pitchFamily="49" charset="0"/>
-              </a:rPr>
-              <a:t>  </a:t>
-            </a:r>
-            <a:r>
-              <a:rPr lang="en-US" sz="4400" dirty="0" err="1">
-                <a:solidFill>
-                  <a:srgbClr val="FFFFFF"/>
-                </a:solidFill>
-                <a:effectLst/>
-                <a:latin typeface="Consolas" panose="020B0609020204030204" pitchFamily="49" charset="0"/>
-              </a:rPr>
-              <a:t>sambi.</a:t>
-            </a:r>
-            <a:r>
-              <a:rPr lang="en-US" sz="4400" dirty="0" err="1">
-                <a:solidFill>
-                  <a:srgbClr val="BBDAFF"/>
-                </a:solidFill>
-                <a:effectLst/>
-                <a:latin typeface="Consolas" panose="020B0609020204030204" pitchFamily="49" charset="0"/>
-              </a:rPr>
-              <a:t>right</a:t>
-            </a:r>
-            <a:r>
-              <a:rPr lang="en-US" sz="4400" dirty="0">
-                <a:solidFill>
-                  <a:srgbClr val="BBDAFF"/>
-                </a:solidFill>
-                <a:effectLst/>
-                <a:latin typeface="Consolas" panose="020B0609020204030204" pitchFamily="49" charset="0"/>
-              </a:rPr>
-              <a:t>(</a:t>
-            </a:r>
-            <a:r>
-              <a:rPr lang="en-US" sz="4400" dirty="0">
-                <a:solidFill>
-                  <a:srgbClr val="FFC58F"/>
-                </a:solidFill>
-                <a:effectLst/>
-                <a:latin typeface="Consolas" panose="020B0609020204030204" pitchFamily="49" charset="0"/>
-              </a:rPr>
-              <a:t>20</a:t>
-            </a:r>
-            <a:r>
-              <a:rPr lang="en-US" sz="4400" dirty="0">
-                <a:solidFill>
-                  <a:srgbClr val="BBDAFF"/>
-                </a:solidFill>
-                <a:effectLst/>
-                <a:latin typeface="Consolas" panose="020B0609020204030204" pitchFamily="49" charset="0"/>
-              </a:rPr>
-              <a:t>)</a:t>
-            </a:r>
-            <a:endParaRPr lang="en-US" sz="4400" dirty="0">
-              <a:solidFill>
-                <a:srgbClr val="FFFFFF"/>
-              </a:solidFill>
-              <a:effectLst/>
-              <a:latin typeface="Consolas" panose="020B0609020204030204" pitchFamily="49" charset="0"/>
-            </a:endParaRPr>
-          </a:p>
-        </p:txBody>
-      </p:sp>
-    </p:spTree>
-    <p:extLst>
-      <p:ext uri="{BB962C8B-B14F-4D97-AF65-F5344CB8AC3E}">
-        <p14:creationId xmlns:p14="http://schemas.microsoft.com/office/powerpoint/2010/main" val="255088620"/>
-      </p:ext>
-    </p:extLst>
-  </p:cSld>
-  <p:clrMapOvr>
-    <a:masterClrMapping/>
-  </p:clrMapOvr>
-  <mc:AlternateContent xmlns:mc="http://schemas.openxmlformats.org/markup-compatibility/2006" xmlns:p159="http://schemas.microsoft.com/office/powerpoint/2015/09/main">
-    <mc:Choice Requires="p159">
-      <p:transition xmlns:p14="http://schemas.microsoft.com/office/powerpoint/2010/main" spd="slow" p14:dur="2000">
-        <p159:morph option="byObject"/>
-      </p:transition>
-    </mc:Choice>
-    <mc:Fallback xmlns="">
-      <p:transition spd="slow">
-        <p:fade/>
-      </p:transition>
-    </mc:Fallback>
-  </mc:AlternateContent>
-</p:sld>
-</file>
-
-<file path=ppt/slides/slide32.xml><?xml version="1.0" encoding="utf-8"?>
-<p:sld xmlns:a="http://schemas.openxmlformats.org/drawingml/2006/main" xmlns:r="http://schemas.openxmlformats.org/officeDocument/2006/relationships" xmlns:p="http://schemas.openxmlformats.org/presentationml/2006/main">
-  <p:cSld>
-    <p:spTree>
-      <p:nvGrpSpPr>
-        <p:cNvPr id="1" name=""/>
-        <p:cNvGrpSpPr/>
-        <p:nvPr/>
-      </p:nvGrpSpPr>
-      <p:grpSpPr>
-        <a:xfrm>
-          <a:off x="0" y="0"/>
-          <a:ext cx="0" cy="0"/>
-          <a:chOff x="0" y="0"/>
-          <a:chExt cx="0" cy="0"/>
-        </a:xfrm>
-      </p:grpSpPr>
-      <p:sp>
-        <p:nvSpPr>
-          <p:cNvPr id="4" name="Rectangle 3">
-            <a:extLst>
-              <a:ext uri="{FF2B5EF4-FFF2-40B4-BE49-F238E27FC236}">
-                <a16:creationId xmlns:a16="http://schemas.microsoft.com/office/drawing/2014/main" id="{67B45C40-6D18-0062-BB1F-CBF59D9A1E4E}"/>
-              </a:ext>
-            </a:extLst>
-          </p:cNvPr>
-          <p:cNvSpPr/>
-          <p:nvPr/>
-        </p:nvSpPr>
-        <p:spPr>
-          <a:xfrm>
-            <a:off x="838200" y="4151376"/>
-            <a:ext cx="2590800" cy="932688"/>
-          </a:xfrm>
-          <a:prstGeom prst="rect">
-            <a:avLst/>
-          </a:prstGeom>
-          <a:solidFill>
-            <a:schemeClr val="bg2">
-              <a:lumMod val="95000"/>
-              <a:lumOff val="5000"/>
-            </a:schemeClr>
-          </a:solidFill>
-          <a:ln w="38100">
-            <a:solidFill>
-              <a:schemeClr val="tx1"/>
-            </a:solidFill>
-          </a:ln>
-        </p:spPr>
-        <p:style>
-          <a:lnRef idx="2">
-            <a:schemeClr val="dk1">
-              <a:shade val="15000"/>
-            </a:schemeClr>
-          </a:lnRef>
-          <a:fillRef idx="1">
-            <a:schemeClr val="dk1"/>
-          </a:fillRef>
-          <a:effectRef idx="0">
-            <a:schemeClr val="dk1"/>
-          </a:effectRef>
-          <a:fontRef idx="minor">
-            <a:schemeClr val="lt1"/>
-          </a:fontRef>
-        </p:style>
-        <p:txBody>
-          <a:bodyPr rtlCol="0" anchor="ctr"/>
-          <a:lstStyle/>
-          <a:p>
-            <a:pPr algn="ctr"/>
-            <a:endParaRPr lang="en-US"/>
-          </a:p>
-        </p:txBody>
-      </p:sp>
-      <p:sp>
-        <p:nvSpPr>
-          <p:cNvPr id="2" name="Title 1">
-            <a:extLst>
-              <a:ext uri="{FF2B5EF4-FFF2-40B4-BE49-F238E27FC236}">
-                <a16:creationId xmlns:a16="http://schemas.microsoft.com/office/drawing/2014/main" id="{A210528F-1C1E-CDA5-B923-9142BD6E7A01}"/>
-              </a:ext>
-            </a:extLst>
-          </p:cNvPr>
-          <p:cNvSpPr>
-            <a:spLocks noGrp="1"/>
-          </p:cNvSpPr>
-          <p:nvPr>
-            <p:ph type="title"/>
-          </p:nvPr>
-        </p:nvSpPr>
-        <p:spPr/>
-        <p:txBody>
-          <a:bodyPr/>
-          <a:lstStyle/>
-          <a:p>
-            <a:r>
-              <a:rPr lang="en-US" dirty="0"/>
-              <a:t>Code </a:t>
-            </a:r>
-            <a:r>
-              <a:rPr lang="en-US" b="1" dirty="0"/>
-              <a:t>With</a:t>
-            </a:r>
-            <a:r>
-              <a:rPr lang="en-US" dirty="0"/>
-              <a:t> Loops</a:t>
-            </a:r>
-          </a:p>
-        </p:txBody>
-      </p:sp>
-      <p:sp>
-        <p:nvSpPr>
-          <p:cNvPr id="3" name="Content Placeholder 2">
-            <a:extLst>
-              <a:ext uri="{FF2B5EF4-FFF2-40B4-BE49-F238E27FC236}">
-                <a16:creationId xmlns:a16="http://schemas.microsoft.com/office/drawing/2014/main" id="{B9AE62B5-7F60-EE8C-6D4F-DC569B4B336B}"/>
-              </a:ext>
-            </a:extLst>
-          </p:cNvPr>
-          <p:cNvSpPr>
-            <a:spLocks noGrp="1"/>
-          </p:cNvSpPr>
-          <p:nvPr>
-            <p:ph idx="1"/>
-          </p:nvPr>
-        </p:nvSpPr>
-        <p:spPr>
-          <a:xfrm>
-            <a:off x="838200" y="1825625"/>
-            <a:ext cx="3550920" cy="4351338"/>
-          </a:xfrm>
-        </p:spPr>
-        <p:txBody>
-          <a:bodyPr>
-            <a:normAutofit/>
-          </a:bodyPr>
-          <a:lstStyle/>
-          <a:p>
-            <a:pPr marL="0" indent="0">
-              <a:lnSpc>
-                <a:spcPct val="80000"/>
-              </a:lnSpc>
-              <a:spcBef>
-                <a:spcPts val="0"/>
-              </a:spcBef>
-              <a:buNone/>
-            </a:pPr>
-            <a:r>
-              <a:rPr lang="en-US" sz="1800" b="0" dirty="0">
-                <a:solidFill>
-                  <a:srgbClr val="EBBBFF"/>
-                </a:solidFill>
-                <a:effectLst/>
-                <a:latin typeface="Consolas" panose="020B0609020204030204" pitchFamily="49" charset="0"/>
-              </a:rPr>
-              <a:t>from</a:t>
-            </a:r>
-            <a:r>
-              <a:rPr lang="en-US" sz="1800" b="0" dirty="0">
-                <a:solidFill>
-                  <a:srgbClr val="FFFFFF"/>
-                </a:solidFill>
-                <a:effectLst/>
-                <a:latin typeface="Consolas" panose="020B0609020204030204" pitchFamily="49" charset="0"/>
-              </a:rPr>
-              <a:t> turtle </a:t>
-            </a:r>
-            <a:r>
-              <a:rPr lang="en-US" sz="1800" b="0" dirty="0">
-                <a:solidFill>
-                  <a:srgbClr val="EBBBFF"/>
-                </a:solidFill>
-                <a:effectLst/>
-                <a:latin typeface="Consolas" panose="020B0609020204030204" pitchFamily="49" charset="0"/>
-              </a:rPr>
-              <a:t>import</a:t>
-            </a:r>
-            <a:r>
-              <a:rPr lang="en-US" sz="1800" b="0" dirty="0">
-                <a:solidFill>
-                  <a:srgbClr val="FFFFFF"/>
-                </a:solidFill>
-                <a:effectLst/>
-                <a:latin typeface="Consolas" panose="020B0609020204030204" pitchFamily="49" charset="0"/>
-              </a:rPr>
-              <a:t> </a:t>
-            </a:r>
-            <a:r>
-              <a:rPr lang="en-US" sz="1800" b="0" dirty="0">
-                <a:solidFill>
-                  <a:srgbClr val="99FFFF"/>
-                </a:solidFill>
-                <a:effectLst/>
-                <a:latin typeface="Consolas" panose="020B0609020204030204" pitchFamily="49" charset="0"/>
-              </a:rPr>
-              <a:t>*</a:t>
-            </a:r>
-            <a:endParaRPr lang="en-US" sz="1800" b="0" dirty="0">
-              <a:solidFill>
-                <a:srgbClr val="FFFFFF"/>
-              </a:solidFill>
-              <a:effectLst/>
-              <a:latin typeface="Consolas" panose="020B0609020204030204" pitchFamily="49" charset="0"/>
-            </a:endParaRPr>
-          </a:p>
-          <a:p>
-            <a:pPr marL="0" indent="0">
-              <a:lnSpc>
-                <a:spcPct val="80000"/>
-              </a:lnSpc>
-              <a:spcBef>
-                <a:spcPts val="0"/>
-              </a:spcBef>
-              <a:buNone/>
-            </a:pPr>
-            <a:r>
-              <a:rPr lang="en-US" sz="1800" b="0" dirty="0" err="1">
-                <a:solidFill>
-                  <a:srgbClr val="FFFFFF"/>
-                </a:solidFill>
-                <a:effectLst/>
-                <a:latin typeface="Consolas" panose="020B0609020204030204" pitchFamily="49" charset="0"/>
-              </a:rPr>
-              <a:t>sambi</a:t>
-            </a:r>
-            <a:r>
-              <a:rPr lang="en-US" sz="1800" b="0" dirty="0">
-                <a:solidFill>
-                  <a:srgbClr val="FFFFFF"/>
-                </a:solidFill>
-                <a:effectLst/>
-                <a:latin typeface="Consolas" panose="020B0609020204030204" pitchFamily="49" charset="0"/>
-              </a:rPr>
-              <a:t> </a:t>
-            </a:r>
-            <a:r>
-              <a:rPr lang="en-US" sz="1800" b="0" dirty="0">
-                <a:solidFill>
-                  <a:srgbClr val="99FFFF"/>
-                </a:solidFill>
-                <a:effectLst/>
-                <a:latin typeface="Consolas" panose="020B0609020204030204" pitchFamily="49" charset="0"/>
-              </a:rPr>
-              <a:t>=</a:t>
-            </a:r>
-            <a:r>
-              <a:rPr lang="en-US" sz="1800" b="0" dirty="0">
-                <a:solidFill>
-                  <a:srgbClr val="FFFFFF"/>
-                </a:solidFill>
-                <a:effectLst/>
-                <a:latin typeface="Consolas" panose="020B0609020204030204" pitchFamily="49" charset="0"/>
-              </a:rPr>
-              <a:t> </a:t>
-            </a:r>
-            <a:r>
-              <a:rPr lang="en-US" sz="1800" b="0" dirty="0">
-                <a:solidFill>
-                  <a:srgbClr val="BBDAFF"/>
-                </a:solidFill>
-                <a:effectLst/>
-                <a:latin typeface="Consolas" panose="020B0609020204030204" pitchFamily="49" charset="0"/>
-              </a:rPr>
-              <a:t>Turtle()</a:t>
-            </a:r>
-            <a:endParaRPr lang="en-US" sz="1800" b="0" dirty="0">
-              <a:solidFill>
-                <a:srgbClr val="FFFFFF"/>
-              </a:solidFill>
-              <a:effectLst/>
-              <a:latin typeface="Consolas" panose="020B0609020204030204" pitchFamily="49" charset="0"/>
-            </a:endParaRPr>
-          </a:p>
-          <a:p>
-            <a:pPr marL="0" indent="0">
-              <a:lnSpc>
-                <a:spcPct val="80000"/>
-              </a:lnSpc>
-              <a:spcBef>
-                <a:spcPts val="0"/>
-              </a:spcBef>
-              <a:buNone/>
-            </a:pPr>
-            <a:br>
-              <a:rPr lang="en-US" sz="1800" b="0" dirty="0">
-                <a:solidFill>
-                  <a:srgbClr val="FFFFFF"/>
-                </a:solidFill>
-                <a:effectLst/>
-                <a:latin typeface="Consolas" panose="020B0609020204030204" pitchFamily="49" charset="0"/>
-              </a:rPr>
-            </a:br>
-            <a:r>
-              <a:rPr lang="en-US" sz="1800" b="0" dirty="0">
-                <a:solidFill>
-                  <a:srgbClr val="FFFFFF"/>
-                </a:solidFill>
-                <a:effectLst/>
-                <a:latin typeface="Consolas" panose="020B0609020204030204" pitchFamily="49" charset="0"/>
-              </a:rPr>
-              <a:t>paper </a:t>
-            </a:r>
-            <a:r>
-              <a:rPr lang="en-US" sz="1800" b="0" dirty="0">
-                <a:solidFill>
-                  <a:srgbClr val="99FFFF"/>
-                </a:solidFill>
-                <a:effectLst/>
-                <a:latin typeface="Consolas" panose="020B0609020204030204" pitchFamily="49" charset="0"/>
-              </a:rPr>
-              <a:t>=</a:t>
-            </a:r>
-            <a:r>
-              <a:rPr lang="en-US" sz="1800" b="0" dirty="0">
-                <a:solidFill>
-                  <a:srgbClr val="FFFFFF"/>
-                </a:solidFill>
-                <a:effectLst/>
-                <a:latin typeface="Consolas" panose="020B0609020204030204" pitchFamily="49" charset="0"/>
-              </a:rPr>
-              <a:t> </a:t>
-            </a:r>
-            <a:r>
-              <a:rPr lang="en-US" sz="1800" b="0" dirty="0" err="1">
-                <a:solidFill>
-                  <a:srgbClr val="FFFFFF"/>
-                </a:solidFill>
-                <a:effectLst/>
-                <a:latin typeface="Consolas" panose="020B0609020204030204" pitchFamily="49" charset="0"/>
-              </a:rPr>
-              <a:t>sambi.</a:t>
-            </a:r>
-            <a:r>
-              <a:rPr lang="en-US" sz="1800" b="0" dirty="0" err="1">
-                <a:solidFill>
-                  <a:srgbClr val="BBDAFF"/>
-                </a:solidFill>
-                <a:effectLst/>
-                <a:latin typeface="Consolas" panose="020B0609020204030204" pitchFamily="49" charset="0"/>
-              </a:rPr>
-              <a:t>getscreen</a:t>
-            </a:r>
-            <a:r>
-              <a:rPr lang="en-US" sz="1800" b="0" dirty="0">
-                <a:solidFill>
-                  <a:srgbClr val="BBDAFF"/>
-                </a:solidFill>
-                <a:effectLst/>
-                <a:latin typeface="Consolas" panose="020B0609020204030204" pitchFamily="49" charset="0"/>
-              </a:rPr>
-              <a:t>()</a:t>
-            </a:r>
-            <a:endParaRPr lang="en-US" sz="1800" b="0" dirty="0">
-              <a:solidFill>
-                <a:srgbClr val="FFFFFF"/>
-              </a:solidFill>
-              <a:effectLst/>
-              <a:latin typeface="Consolas" panose="020B0609020204030204" pitchFamily="49" charset="0"/>
-            </a:endParaRPr>
-          </a:p>
-          <a:p>
-            <a:pPr marL="0" indent="0">
-              <a:lnSpc>
-                <a:spcPct val="80000"/>
-              </a:lnSpc>
-              <a:spcBef>
-                <a:spcPts val="0"/>
-              </a:spcBef>
-              <a:buNone/>
-            </a:pPr>
-            <a:r>
-              <a:rPr lang="en-US" sz="1800" b="0" dirty="0" err="1">
-                <a:solidFill>
-                  <a:srgbClr val="FFFFFF"/>
-                </a:solidFill>
-                <a:effectLst/>
-                <a:latin typeface="Consolas" panose="020B0609020204030204" pitchFamily="49" charset="0"/>
-              </a:rPr>
-              <a:t>paper.</a:t>
-            </a:r>
-            <a:r>
-              <a:rPr lang="en-US" sz="1800" b="0" dirty="0" err="1">
-                <a:solidFill>
-                  <a:srgbClr val="BBDAFF"/>
-                </a:solidFill>
-                <a:effectLst/>
-                <a:latin typeface="Consolas" panose="020B0609020204030204" pitchFamily="49" charset="0"/>
-              </a:rPr>
-              <a:t>bgcolor</a:t>
-            </a:r>
-            <a:r>
-              <a:rPr lang="en-US" sz="1800" b="0" dirty="0">
-                <a:solidFill>
-                  <a:srgbClr val="BBDAFF"/>
-                </a:solidFill>
-                <a:effectLst/>
-                <a:latin typeface="Consolas" panose="020B0609020204030204" pitchFamily="49" charset="0"/>
-              </a:rPr>
-              <a:t>(</a:t>
-            </a:r>
-            <a:r>
-              <a:rPr lang="en-US" sz="1800" b="0" dirty="0">
-                <a:solidFill>
-                  <a:srgbClr val="D1F1A9"/>
-                </a:solidFill>
-                <a:effectLst/>
-                <a:latin typeface="Consolas" panose="020B0609020204030204" pitchFamily="49" charset="0"/>
-              </a:rPr>
-              <a:t>"black"</a:t>
-            </a:r>
-            <a:r>
-              <a:rPr lang="en-US" sz="1800" b="0" dirty="0">
-                <a:solidFill>
-                  <a:srgbClr val="BBDAFF"/>
-                </a:solidFill>
-                <a:effectLst/>
-                <a:latin typeface="Consolas" panose="020B0609020204030204" pitchFamily="49" charset="0"/>
-              </a:rPr>
-              <a:t>)</a:t>
-            </a:r>
-            <a:endParaRPr lang="en-US" sz="1800" b="0" dirty="0">
-              <a:solidFill>
-                <a:srgbClr val="FFFFFF"/>
-              </a:solidFill>
-              <a:effectLst/>
-              <a:latin typeface="Consolas" panose="020B0609020204030204" pitchFamily="49" charset="0"/>
-            </a:endParaRPr>
-          </a:p>
-          <a:p>
-            <a:pPr marL="0" indent="0">
-              <a:lnSpc>
-                <a:spcPct val="80000"/>
-              </a:lnSpc>
-              <a:spcBef>
-                <a:spcPts val="0"/>
-              </a:spcBef>
-              <a:buNone/>
-            </a:pPr>
-            <a:endParaRPr lang="en-US" sz="1800" dirty="0">
-              <a:solidFill>
-                <a:srgbClr val="FFFFFF"/>
-              </a:solidFill>
-              <a:latin typeface="Consolas" panose="020B0609020204030204" pitchFamily="49" charset="0"/>
-            </a:endParaRPr>
-          </a:p>
-          <a:p>
-            <a:pPr marL="0" indent="0">
-              <a:lnSpc>
-                <a:spcPct val="80000"/>
-              </a:lnSpc>
-              <a:spcBef>
-                <a:spcPts val="0"/>
-              </a:spcBef>
-              <a:buNone/>
-            </a:pPr>
-            <a:r>
-              <a:rPr lang="en-US" sz="1800" b="0" dirty="0" err="1">
-                <a:solidFill>
-                  <a:srgbClr val="FFFFFF"/>
-                </a:solidFill>
-                <a:effectLst/>
-                <a:latin typeface="Consolas" panose="020B0609020204030204" pitchFamily="49" charset="0"/>
-              </a:rPr>
-              <a:t>sambi.</a:t>
-            </a:r>
-            <a:r>
-              <a:rPr lang="en-US" sz="1800" b="0" dirty="0" err="1">
-                <a:solidFill>
-                  <a:srgbClr val="BBDAFF"/>
-                </a:solidFill>
-                <a:effectLst/>
-                <a:latin typeface="Consolas" panose="020B0609020204030204" pitchFamily="49" charset="0"/>
-              </a:rPr>
-              <a:t>left</a:t>
-            </a:r>
-            <a:r>
-              <a:rPr lang="en-US" sz="1800" b="0" dirty="0">
-                <a:solidFill>
-                  <a:srgbClr val="BBDAFF"/>
-                </a:solidFill>
-                <a:effectLst/>
-                <a:latin typeface="Consolas" panose="020B0609020204030204" pitchFamily="49" charset="0"/>
-              </a:rPr>
-              <a:t>(</a:t>
-            </a:r>
-            <a:r>
-              <a:rPr lang="en-US" sz="1800" b="0" dirty="0">
-                <a:solidFill>
-                  <a:srgbClr val="FFC58F"/>
-                </a:solidFill>
-                <a:effectLst/>
-                <a:latin typeface="Consolas" panose="020B0609020204030204" pitchFamily="49" charset="0"/>
-              </a:rPr>
-              <a:t>90</a:t>
-            </a:r>
-            <a:r>
-              <a:rPr lang="en-US" sz="1800" b="0" dirty="0">
-                <a:solidFill>
-                  <a:srgbClr val="BBDAFF"/>
-                </a:solidFill>
-                <a:effectLst/>
-                <a:latin typeface="Consolas" panose="020B0609020204030204" pitchFamily="49" charset="0"/>
-              </a:rPr>
-              <a:t>)</a:t>
-            </a:r>
-            <a:endParaRPr lang="en-US" sz="1800" dirty="0">
-              <a:solidFill>
-                <a:srgbClr val="FFFFFF"/>
-              </a:solidFill>
-              <a:latin typeface="Consolas" panose="020B0609020204030204" pitchFamily="49" charset="0"/>
-            </a:endParaRPr>
-          </a:p>
-          <a:p>
-            <a:pPr marL="0" indent="0">
-              <a:lnSpc>
-                <a:spcPct val="80000"/>
-              </a:lnSpc>
-              <a:spcBef>
-                <a:spcPts val="0"/>
-              </a:spcBef>
-              <a:buNone/>
-            </a:pPr>
-            <a:r>
-              <a:rPr lang="en-US" sz="1800" b="0" dirty="0" err="1">
-                <a:solidFill>
-                  <a:srgbClr val="FFFFFF"/>
-                </a:solidFill>
-                <a:effectLst/>
-                <a:latin typeface="Consolas" panose="020B0609020204030204" pitchFamily="49" charset="0"/>
-              </a:rPr>
-              <a:t>sambi.</a:t>
-            </a:r>
-            <a:r>
-              <a:rPr lang="en-US" sz="1800" b="0" dirty="0" err="1">
-                <a:solidFill>
-                  <a:srgbClr val="BBDAFF"/>
-                </a:solidFill>
-                <a:effectLst/>
-                <a:latin typeface="Consolas" panose="020B0609020204030204" pitchFamily="49" charset="0"/>
-              </a:rPr>
-              <a:t>color</a:t>
-            </a:r>
-            <a:r>
-              <a:rPr lang="en-US" sz="1800" b="0" dirty="0">
-                <a:solidFill>
-                  <a:srgbClr val="BBDAFF"/>
-                </a:solidFill>
-                <a:effectLst/>
-                <a:latin typeface="Consolas" panose="020B0609020204030204" pitchFamily="49" charset="0"/>
-              </a:rPr>
-              <a:t>(</a:t>
-            </a:r>
-            <a:r>
-              <a:rPr lang="en-US" sz="1800" b="0" dirty="0">
-                <a:solidFill>
-                  <a:srgbClr val="D1F1A9"/>
-                </a:solidFill>
-                <a:effectLst/>
-                <a:latin typeface="Consolas" panose="020B0609020204030204" pitchFamily="49" charset="0"/>
-              </a:rPr>
-              <a:t>"red"</a:t>
-            </a:r>
-            <a:r>
-              <a:rPr lang="en-US" sz="1800" b="0" dirty="0">
-                <a:solidFill>
-                  <a:srgbClr val="BBDAFF"/>
-                </a:solidFill>
-                <a:effectLst/>
-                <a:latin typeface="Consolas" panose="020B0609020204030204" pitchFamily="49" charset="0"/>
-              </a:rPr>
-              <a:t>)</a:t>
-            </a:r>
-            <a:endParaRPr lang="en-US" sz="1800" b="0" dirty="0">
-              <a:solidFill>
-                <a:srgbClr val="FFFFFF"/>
-              </a:solidFill>
-              <a:effectLst/>
-              <a:latin typeface="Consolas" panose="020B0609020204030204" pitchFamily="49" charset="0"/>
-            </a:endParaRPr>
-          </a:p>
-          <a:p>
-            <a:pPr marL="0" indent="0">
-              <a:lnSpc>
-                <a:spcPct val="80000"/>
-              </a:lnSpc>
-              <a:spcBef>
-                <a:spcPts val="0"/>
-              </a:spcBef>
-              <a:buNone/>
-            </a:pPr>
-            <a:r>
-              <a:rPr lang="en-US" sz="1800" b="0" dirty="0" err="1">
-                <a:solidFill>
-                  <a:srgbClr val="FFFFFF"/>
-                </a:solidFill>
-                <a:effectLst/>
-                <a:latin typeface="Consolas" panose="020B0609020204030204" pitchFamily="49" charset="0"/>
-              </a:rPr>
-              <a:t>sambi.</a:t>
-            </a:r>
-            <a:r>
-              <a:rPr lang="en-US" sz="1800" b="0" dirty="0" err="1">
-                <a:solidFill>
-                  <a:srgbClr val="BBDAFF"/>
-                </a:solidFill>
-                <a:effectLst/>
-                <a:latin typeface="Consolas" panose="020B0609020204030204" pitchFamily="49" charset="0"/>
-              </a:rPr>
-              <a:t>speed</a:t>
-            </a:r>
-            <a:r>
-              <a:rPr lang="en-US" sz="1800" b="0" dirty="0">
-                <a:solidFill>
-                  <a:srgbClr val="BBDAFF"/>
-                </a:solidFill>
-                <a:effectLst/>
-                <a:latin typeface="Consolas" panose="020B0609020204030204" pitchFamily="49" charset="0"/>
-              </a:rPr>
-              <a:t>(</a:t>
-            </a:r>
-            <a:r>
-              <a:rPr lang="en-US" sz="1800" b="0" dirty="0">
-                <a:solidFill>
-                  <a:srgbClr val="FFC58F"/>
-                </a:solidFill>
-                <a:effectLst/>
-                <a:latin typeface="Consolas" panose="020B0609020204030204" pitchFamily="49" charset="0"/>
-              </a:rPr>
-              <a:t>10</a:t>
-            </a:r>
-            <a:r>
-              <a:rPr lang="en-US" sz="1800" b="0" dirty="0">
-                <a:solidFill>
-                  <a:srgbClr val="BBDAFF"/>
-                </a:solidFill>
-                <a:effectLst/>
-                <a:latin typeface="Consolas" panose="020B0609020204030204" pitchFamily="49" charset="0"/>
-              </a:rPr>
-              <a:t>)</a:t>
-            </a:r>
-            <a:endParaRPr lang="en-US" sz="1800" b="0" dirty="0">
-              <a:solidFill>
-                <a:srgbClr val="FFFFFF"/>
-              </a:solidFill>
-              <a:effectLst/>
-              <a:latin typeface="Consolas" panose="020B0609020204030204" pitchFamily="49" charset="0"/>
-            </a:endParaRPr>
-          </a:p>
-          <a:p>
-            <a:pPr marL="0" indent="0">
-              <a:lnSpc>
-                <a:spcPct val="80000"/>
-              </a:lnSpc>
-              <a:spcBef>
-                <a:spcPts val="0"/>
-              </a:spcBef>
-              <a:buNone/>
-            </a:pPr>
-            <a:br>
-              <a:rPr lang="en-US" sz="1800" b="0" dirty="0">
-                <a:solidFill>
-                  <a:srgbClr val="FFFFFF"/>
-                </a:solidFill>
-                <a:effectLst/>
-                <a:latin typeface="Consolas" panose="020B0609020204030204" pitchFamily="49" charset="0"/>
-              </a:rPr>
-            </a:br>
-            <a:br>
-              <a:rPr lang="en-US" sz="1800" b="0" dirty="0">
-                <a:solidFill>
-                  <a:srgbClr val="FFFFFF"/>
-                </a:solidFill>
-                <a:effectLst/>
-                <a:latin typeface="Consolas" panose="020B0609020204030204" pitchFamily="49" charset="0"/>
-              </a:rPr>
-            </a:br>
-            <a:r>
-              <a:rPr lang="en-US" sz="1800" b="1" dirty="0" err="1">
-                <a:solidFill>
-                  <a:srgbClr val="FFFFFF"/>
-                </a:solidFill>
-                <a:effectLst/>
-                <a:latin typeface="Consolas" panose="020B0609020204030204" pitchFamily="49" charset="0"/>
-              </a:rPr>
-              <a:t>sambi.</a:t>
-            </a:r>
-            <a:r>
-              <a:rPr lang="en-US" sz="1800" b="1" dirty="0" err="1">
-                <a:solidFill>
-                  <a:srgbClr val="BBDAFF"/>
-                </a:solidFill>
-                <a:effectLst/>
-                <a:latin typeface="Consolas" panose="020B0609020204030204" pitchFamily="49" charset="0"/>
-              </a:rPr>
-              <a:t>forward</a:t>
-            </a:r>
-            <a:r>
-              <a:rPr lang="en-US" sz="1800" b="1" dirty="0">
-                <a:solidFill>
-                  <a:srgbClr val="BBDAFF"/>
-                </a:solidFill>
-                <a:effectLst/>
-                <a:latin typeface="Consolas" panose="020B0609020204030204" pitchFamily="49" charset="0"/>
-              </a:rPr>
-              <a:t>(</a:t>
-            </a:r>
-            <a:r>
-              <a:rPr lang="en-US" sz="1800" b="1" dirty="0">
-                <a:solidFill>
-                  <a:srgbClr val="FFC58F"/>
-                </a:solidFill>
-                <a:effectLst/>
-                <a:latin typeface="Consolas" panose="020B0609020204030204" pitchFamily="49" charset="0"/>
-              </a:rPr>
-              <a:t>100</a:t>
-            </a:r>
-            <a:r>
-              <a:rPr lang="en-US" sz="1800" b="1" dirty="0">
-                <a:solidFill>
-                  <a:srgbClr val="BBDAFF"/>
-                </a:solidFill>
-                <a:effectLst/>
-                <a:latin typeface="Consolas" panose="020B0609020204030204" pitchFamily="49" charset="0"/>
-              </a:rPr>
-              <a:t>)</a:t>
-            </a:r>
-            <a:endParaRPr lang="en-US" sz="1800" b="1" dirty="0">
-              <a:solidFill>
-                <a:srgbClr val="FFFFFF"/>
-              </a:solidFill>
-              <a:effectLst/>
-              <a:latin typeface="Consolas" panose="020B0609020204030204" pitchFamily="49" charset="0"/>
-            </a:endParaRPr>
-          </a:p>
-          <a:p>
-            <a:pPr marL="0" indent="0">
-              <a:lnSpc>
-                <a:spcPct val="80000"/>
-              </a:lnSpc>
-              <a:spcBef>
-                <a:spcPts val="0"/>
-              </a:spcBef>
-              <a:buNone/>
-            </a:pPr>
-            <a:r>
-              <a:rPr lang="en-US" sz="1800" b="1" dirty="0" err="1">
-                <a:solidFill>
-                  <a:srgbClr val="FFFFFF"/>
-                </a:solidFill>
-                <a:effectLst/>
-                <a:latin typeface="Consolas" panose="020B0609020204030204" pitchFamily="49" charset="0"/>
-              </a:rPr>
-              <a:t>sambi.</a:t>
-            </a:r>
-            <a:r>
-              <a:rPr lang="en-US" sz="1800" b="1" dirty="0" err="1">
-                <a:solidFill>
-                  <a:srgbClr val="BBDAFF"/>
-                </a:solidFill>
-                <a:effectLst/>
-                <a:latin typeface="Consolas" panose="020B0609020204030204" pitchFamily="49" charset="0"/>
-              </a:rPr>
-              <a:t>backward</a:t>
-            </a:r>
-            <a:r>
-              <a:rPr lang="en-US" sz="1800" b="1" dirty="0">
-                <a:solidFill>
-                  <a:srgbClr val="BBDAFF"/>
-                </a:solidFill>
-                <a:effectLst/>
-                <a:latin typeface="Consolas" panose="020B0609020204030204" pitchFamily="49" charset="0"/>
-              </a:rPr>
-              <a:t>(</a:t>
-            </a:r>
-            <a:r>
-              <a:rPr lang="en-US" sz="1800" b="1" dirty="0">
-                <a:solidFill>
-                  <a:srgbClr val="FFC58F"/>
-                </a:solidFill>
-                <a:effectLst/>
-                <a:latin typeface="Consolas" panose="020B0609020204030204" pitchFamily="49" charset="0"/>
-              </a:rPr>
-              <a:t>100</a:t>
-            </a:r>
-            <a:r>
-              <a:rPr lang="en-US" sz="1800" b="1" dirty="0">
-                <a:solidFill>
-                  <a:srgbClr val="BBDAFF"/>
-                </a:solidFill>
-                <a:effectLst/>
-                <a:latin typeface="Consolas" panose="020B0609020204030204" pitchFamily="49" charset="0"/>
-              </a:rPr>
-              <a:t>)</a:t>
-            </a:r>
-            <a:endParaRPr lang="en-US" sz="1800" b="1" dirty="0">
-              <a:solidFill>
-                <a:srgbClr val="FFFFFF"/>
-              </a:solidFill>
-              <a:effectLst/>
-              <a:latin typeface="Consolas" panose="020B0609020204030204" pitchFamily="49" charset="0"/>
-            </a:endParaRPr>
-          </a:p>
-          <a:p>
-            <a:pPr marL="0" indent="0">
-              <a:lnSpc>
-                <a:spcPct val="80000"/>
-              </a:lnSpc>
-              <a:spcBef>
-                <a:spcPts val="0"/>
-              </a:spcBef>
-              <a:buNone/>
-            </a:pPr>
-            <a:r>
-              <a:rPr lang="en-US" sz="1800" b="1" dirty="0" err="1">
-                <a:solidFill>
-                  <a:srgbClr val="FFFFFF"/>
-                </a:solidFill>
-                <a:effectLst/>
-                <a:latin typeface="Consolas" panose="020B0609020204030204" pitchFamily="49" charset="0"/>
-              </a:rPr>
-              <a:t>sambi.</a:t>
-            </a:r>
-            <a:r>
-              <a:rPr lang="en-US" sz="1800" b="1" dirty="0" err="1">
-                <a:solidFill>
-                  <a:srgbClr val="BBDAFF"/>
-                </a:solidFill>
-                <a:effectLst/>
-                <a:latin typeface="Consolas" panose="020B0609020204030204" pitchFamily="49" charset="0"/>
-              </a:rPr>
-              <a:t>right</a:t>
-            </a:r>
-            <a:r>
-              <a:rPr lang="en-US" sz="1800" b="1" dirty="0">
-                <a:solidFill>
-                  <a:srgbClr val="BBDAFF"/>
-                </a:solidFill>
-                <a:effectLst/>
-                <a:latin typeface="Consolas" panose="020B0609020204030204" pitchFamily="49" charset="0"/>
-              </a:rPr>
-              <a:t>(</a:t>
-            </a:r>
-            <a:r>
-              <a:rPr lang="en-US" sz="1800" b="1" dirty="0">
-                <a:solidFill>
-                  <a:srgbClr val="FFC58F"/>
-                </a:solidFill>
-                <a:effectLst/>
-                <a:latin typeface="Consolas" panose="020B0609020204030204" pitchFamily="49" charset="0"/>
-              </a:rPr>
-              <a:t>20</a:t>
-            </a:r>
-            <a:r>
-              <a:rPr lang="en-US" sz="1800" b="1" dirty="0">
-                <a:solidFill>
-                  <a:srgbClr val="BBDAFF"/>
-                </a:solidFill>
-                <a:effectLst/>
-                <a:latin typeface="Consolas" panose="020B0609020204030204" pitchFamily="49" charset="0"/>
-              </a:rPr>
-              <a:t>)</a:t>
-            </a:r>
-            <a:endParaRPr lang="en-US" sz="1800" b="1" dirty="0">
-              <a:solidFill>
-                <a:srgbClr val="FFFFFF"/>
-              </a:solidFill>
-              <a:effectLst/>
-              <a:latin typeface="Consolas" panose="020B0609020204030204" pitchFamily="49" charset="0"/>
-            </a:endParaRPr>
-          </a:p>
-          <a:p>
-            <a:pPr marL="0" indent="0">
-              <a:lnSpc>
-                <a:spcPct val="80000"/>
-              </a:lnSpc>
-              <a:spcBef>
-                <a:spcPts val="0"/>
-              </a:spcBef>
-              <a:buNone/>
-            </a:pPr>
-            <a:endParaRPr lang="en-US" sz="1800" dirty="0">
-              <a:solidFill>
-                <a:srgbClr val="FFFFFF"/>
-              </a:solidFill>
-              <a:latin typeface="Consolas" panose="020B0609020204030204" pitchFamily="49" charset="0"/>
-            </a:endParaRPr>
-          </a:p>
-        </p:txBody>
-      </p:sp>
-      <p:pic>
-        <p:nvPicPr>
-          <p:cNvPr id="7" name="Picture 6">
-            <a:extLst>
-              <a:ext uri="{FF2B5EF4-FFF2-40B4-BE49-F238E27FC236}">
-                <a16:creationId xmlns:a16="http://schemas.microsoft.com/office/drawing/2014/main" id="{B221076E-D1A2-8D90-71AD-F7A26D7385A3}"/>
-              </a:ext>
-            </a:extLst>
-          </p:cNvPr>
-          <p:cNvPicPr>
-            <a:picLocks noChangeAspect="1"/>
-          </p:cNvPicPr>
-          <p:nvPr/>
-        </p:nvPicPr>
-        <p:blipFill>
-          <a:blip r:embed="rId2"/>
+          <a:blip r:embed="rId3"/>
           <a:stretch>
             <a:fillRect/>
           </a:stretch>
@@ -27718,7 +26995,7 @@
 </p:sld>
 </file>
 
-<file path=ppt/slides/slide33.xml><?xml version="1.0" encoding="utf-8"?>
+<file path=ppt/slides/slide32.xml><?xml version="1.0" encoding="utf-8"?>
 <p:sld xmlns:a="http://schemas.openxmlformats.org/drawingml/2006/main" xmlns:r="http://schemas.openxmlformats.org/officeDocument/2006/relationships" xmlns:p="http://schemas.openxmlformats.org/presentationml/2006/main">
   <p:cSld>
     <p:spTree>
@@ -28622,7 +27899,7 @@
           <p:nvPr/>
         </p:nvPicPr>
         <p:blipFill>
-          <a:blip r:embed="rId2"/>
+          <a:blip r:embed="rId3"/>
           <a:stretch>
             <a:fillRect/>
           </a:stretch>
@@ -29337,7 +28614,7 @@
 </p:sld>
 </file>
 
-<file path=ppt/slides/slide34.xml><?xml version="1.0" encoding="utf-8"?>
+<file path=ppt/slides/slide33.xml><?xml version="1.0" encoding="utf-8"?>
 <p:sld xmlns:a="http://schemas.openxmlformats.org/drawingml/2006/main" xmlns:r="http://schemas.openxmlformats.org/officeDocument/2006/relationships" xmlns:p="http://schemas.openxmlformats.org/presentationml/2006/main">
   <p:cSld>
     <p:spTree>
@@ -30663,7 +29940,7 @@
 </p:sld>
 </file>
 
-<file path=ppt/slides/slide35.xml><?xml version="1.0" encoding="utf-8"?>
+<file path=ppt/slides/slide34.xml><?xml version="1.0" encoding="utf-8"?>
 <p:sld xmlns:a="http://schemas.openxmlformats.org/drawingml/2006/main" xmlns:r="http://schemas.openxmlformats.org/officeDocument/2006/relationships" xmlns:p="http://schemas.openxmlformats.org/presentationml/2006/main">
   <p:cSld>
     <p:spTree>
@@ -31098,7 +30375,7 @@
 </p:sld>
 </file>
 
-<file path=ppt/slides/slide36.xml><?xml version="1.0" encoding="utf-8"?>
+<file path=ppt/slides/slide35.xml><?xml version="1.0" encoding="utf-8"?>
 <p:sld xmlns:a="http://schemas.openxmlformats.org/drawingml/2006/main" xmlns:r="http://schemas.openxmlformats.org/officeDocument/2006/relationships" xmlns:p="http://schemas.openxmlformats.org/presentationml/2006/main">
   <p:cSld>
     <p:spTree>
@@ -31271,7 +30548,7 @@
 </p:sld>
 </file>
 
-<file path=ppt/slides/slide37.xml><?xml version="1.0" encoding="utf-8"?>
+<file path=ppt/slides/slide36.xml><?xml version="1.0" encoding="utf-8"?>
 <p:sld xmlns:a="http://schemas.openxmlformats.org/drawingml/2006/main" xmlns:r="http://schemas.openxmlformats.org/officeDocument/2006/relationships" xmlns:p="http://schemas.openxmlformats.org/presentationml/2006/main">
   <p:cSld>
     <p:spTree>
@@ -31331,7 +30608,7 @@
 </p:sld>
 </file>
 
-<file path=ppt/slides/slide38.xml><?xml version="1.0" encoding="utf-8"?>
+<file path=ppt/slides/slide37.xml><?xml version="1.0" encoding="utf-8"?>
 <p:sld xmlns:a="http://schemas.openxmlformats.org/drawingml/2006/main" xmlns:r="http://schemas.openxmlformats.org/officeDocument/2006/relationships" xmlns:p="http://schemas.openxmlformats.org/presentationml/2006/main">
   <p:cSld>
     <p:spTree>
@@ -32447,7 +31724,7 @@
 </p:sld>
 </file>
 
-<file path=ppt/slides/slide39.xml><?xml version="1.0" encoding="utf-8"?>
+<file path=ppt/slides/slide38.xml><?xml version="1.0" encoding="utf-8"?>
 <p:sld xmlns:a="http://schemas.openxmlformats.org/drawingml/2006/main" xmlns:r="http://schemas.openxmlformats.org/officeDocument/2006/relationships" xmlns:p="http://schemas.openxmlformats.org/presentationml/2006/main">
   <p:cSld>
     <p:spTree>
@@ -33525,117 +32802,7 @@
 </p:sld>
 </file>
 
-<file path=ppt/slides/slide4.xml><?xml version="1.0" encoding="utf-8"?>
-<p:sld xmlns:a="http://schemas.openxmlformats.org/drawingml/2006/main" xmlns:r="http://schemas.openxmlformats.org/officeDocument/2006/relationships" xmlns:p="http://schemas.openxmlformats.org/presentationml/2006/main">
-  <p:cSld>
-    <p:spTree>
-      <p:nvGrpSpPr>
-        <p:cNvPr id="1" name=""/>
-        <p:cNvGrpSpPr/>
-        <p:nvPr/>
-      </p:nvGrpSpPr>
-      <p:grpSpPr>
-        <a:xfrm>
-          <a:off x="0" y="0"/>
-          <a:ext cx="0" cy="0"/>
-          <a:chOff x="0" y="0"/>
-          <a:chExt cx="0" cy="0"/>
-        </a:xfrm>
-      </p:grpSpPr>
-      <p:sp>
-        <p:nvSpPr>
-          <p:cNvPr id="2" name="Title 1">
-            <a:extLst>
-              <a:ext uri="{FF2B5EF4-FFF2-40B4-BE49-F238E27FC236}">
-                <a16:creationId xmlns:a16="http://schemas.microsoft.com/office/drawing/2014/main" id="{010F4922-BC8F-59D3-E64D-070477F697B0}"/>
-              </a:ext>
-            </a:extLst>
-          </p:cNvPr>
-          <p:cNvSpPr>
-            <a:spLocks noGrp="1"/>
-          </p:cNvSpPr>
-          <p:nvPr>
-            <p:ph type="title"/>
-          </p:nvPr>
-        </p:nvSpPr>
-        <p:spPr/>
-        <p:txBody>
-          <a:bodyPr/>
-          <a:lstStyle/>
-          <a:p>
-            <a:r>
-              <a:rPr lang="en-US" dirty="0"/>
-              <a:t>Agenda</a:t>
-            </a:r>
-          </a:p>
-        </p:txBody>
-      </p:sp>
-      <p:sp>
-        <p:nvSpPr>
-          <p:cNvPr id="3" name="Content Placeholder 2">
-            <a:extLst>
-              <a:ext uri="{FF2B5EF4-FFF2-40B4-BE49-F238E27FC236}">
-                <a16:creationId xmlns:a16="http://schemas.microsoft.com/office/drawing/2014/main" id="{91C67F44-1E85-A791-3F4D-664AF1C8CDC3}"/>
-              </a:ext>
-            </a:extLst>
-          </p:cNvPr>
-          <p:cNvSpPr>
-            <a:spLocks noGrp="1"/>
-          </p:cNvSpPr>
-          <p:nvPr>
-            <p:ph sz="half" idx="1"/>
-          </p:nvPr>
-        </p:nvSpPr>
-        <p:spPr/>
-        <p:txBody>
-          <a:bodyPr/>
-          <a:lstStyle/>
-          <a:p>
-            <a:r>
-              <a:rPr lang="en-US" dirty="0"/>
-              <a:t>What Python Does</a:t>
-            </a:r>
-          </a:p>
-          <a:p>
-            <a:r>
-              <a:rPr lang="en-US" dirty="0"/>
-              <a:t>Turtle Graphics</a:t>
-            </a:r>
-          </a:p>
-          <a:p>
-            <a:r>
-              <a:rPr lang="en-US" dirty="0"/>
-              <a:t>Mini Quiz</a:t>
-            </a:r>
-          </a:p>
-          <a:p>
-            <a:r>
-              <a:rPr lang="en-US" dirty="0"/>
-              <a:t>Loops</a:t>
-            </a:r>
-          </a:p>
-          <a:p>
-            <a:r>
-              <a:rPr lang="en-US" dirty="0"/>
-              <a:t>Python in the World</a:t>
-            </a:r>
-          </a:p>
-        </p:txBody>
-      </p:sp>
-    </p:spTree>
-    <p:extLst>
-      <p:ext uri="{BB962C8B-B14F-4D97-AF65-F5344CB8AC3E}">
-        <p14:creationId xmlns:p14="http://schemas.microsoft.com/office/powerpoint/2010/main" val="1196596656"/>
-      </p:ext>
-    </p:extLst>
-  </p:cSld>
-  <p:clrMapOvr>
-    <a:masterClrMapping/>
-  </p:clrMapOvr>
-</p:sld>
-</file>
-
-<file path=ppt/slides/slide40.xml><?xml version="1.0" encoding="utf-8"?>
+<file path=ppt/slides/slide39.xml><?xml version="1.0" encoding="utf-8"?>
 <p:sld xmlns:a="http://schemas.openxmlformats.org/drawingml/2006/main" xmlns:r="http://schemas.openxmlformats.org/officeDocument/2006/relationships" xmlns:p="http://schemas.openxmlformats.org/presentationml/2006/main">
   <p:cSld>
     <p:spTree>
@@ -34264,249 +33431,7 @@
 </p:sld>
 </file>
 
-<file path=ppt/slides/slide41.xml><?xml version="1.0" encoding="utf-8"?>
-<p:sld xmlns:a="http://schemas.openxmlformats.org/drawingml/2006/main" xmlns:r="http://schemas.openxmlformats.org/officeDocument/2006/relationships" xmlns:p="http://schemas.openxmlformats.org/presentationml/2006/main">
-  <p:cSld>
-    <p:spTree>
-      <p:nvGrpSpPr>
-        <p:cNvPr id="1" name=""/>
-        <p:cNvGrpSpPr/>
-        <p:nvPr/>
-      </p:nvGrpSpPr>
-      <p:grpSpPr>
-        <a:xfrm>
-          <a:off x="0" y="0"/>
-          <a:ext cx="0" cy="0"/>
-          <a:chOff x="0" y="0"/>
-          <a:chExt cx="0" cy="0"/>
-        </a:xfrm>
-      </p:grpSpPr>
-      <p:pic>
-        <p:nvPicPr>
-          <p:cNvPr id="4" name="Picture 2" descr="Supportive snake | Kirishima eijirou, Story inspiration, Arcanum">
-            <a:extLst>
-              <a:ext uri="{FF2B5EF4-FFF2-40B4-BE49-F238E27FC236}">
-                <a16:creationId xmlns:a16="http://schemas.microsoft.com/office/drawing/2014/main" id="{DEFA6CC8-5179-41F4-05C3-012076C6A1A7}"/>
-              </a:ext>
-            </a:extLst>
-          </p:cNvPr>
-          <p:cNvPicPr>
-            <a:picLocks noChangeAspect="1" noChangeArrowheads="1"/>
-          </p:cNvPicPr>
-          <p:nvPr/>
-        </p:nvPicPr>
-        <p:blipFill rotWithShape="1">
-          <a:blip r:embed="rId3">
-            <a:extLst>
-              <a:ext uri="{28A0092B-C50C-407E-A947-70E740481C1C}">
-                <a14:useLocalDpi xmlns:a14="http://schemas.microsoft.com/office/drawing/2010/main" val="0"/>
-              </a:ext>
-            </a:extLst>
-          </a:blip>
-          <a:srcRect t="23333" b="18334"/>
-          <a:stretch/>
-        </p:blipFill>
-        <p:spPr bwMode="auto">
-          <a:xfrm>
-            <a:off x="2543969" y="2052328"/>
-            <a:ext cx="7104062" cy="2753343"/>
-          </a:xfrm>
-          <a:prstGeom prst="rect">
-            <a:avLst/>
-          </a:prstGeom>
-          <a:noFill/>
-          <a:extLst>
-            <a:ext uri="{909E8E84-426E-40DD-AFC4-6F175D3DCCD1}">
-              <a14:hiddenFill xmlns:a14="http://schemas.microsoft.com/office/drawing/2010/main">
-                <a:solidFill>
-                  <a:srgbClr val="FFFFFF"/>
-                </a:solidFill>
-              </a14:hiddenFill>
-            </a:ext>
-          </a:extLst>
-        </p:spPr>
-      </p:pic>
-      <p:sp>
-        <p:nvSpPr>
-          <p:cNvPr id="2" name="Title 1">
-            <a:extLst>
-              <a:ext uri="{FF2B5EF4-FFF2-40B4-BE49-F238E27FC236}">
-                <a16:creationId xmlns:a16="http://schemas.microsoft.com/office/drawing/2014/main" id="{4DD820D6-5715-AFD0-11FC-17CC585EBE2B}"/>
-              </a:ext>
-            </a:extLst>
-          </p:cNvPr>
-          <p:cNvSpPr>
-            <a:spLocks noGrp="1"/>
-          </p:cNvSpPr>
-          <p:nvPr>
-            <p:ph type="title"/>
-          </p:nvPr>
-        </p:nvSpPr>
-        <p:spPr>
-          <a:xfrm>
-            <a:off x="0" y="340963"/>
-            <a:ext cx="12192000" cy="1325563"/>
-          </a:xfrm>
-        </p:spPr>
-        <p:txBody>
-          <a:bodyPr/>
-          <a:lstStyle/>
-          <a:p>
-            <a:pPr algn="ctr"/>
-            <a:r>
-              <a:rPr lang="en-US" b="1" dirty="0"/>
-              <a:t>Final Thoughts</a:t>
-            </a:r>
-          </a:p>
-        </p:txBody>
-      </p:sp>
-    </p:spTree>
-    <p:extLst>
-      <p:ext uri="{BB962C8B-B14F-4D97-AF65-F5344CB8AC3E}">
-        <p14:creationId xmlns:p14="http://schemas.microsoft.com/office/powerpoint/2010/main" val="3570851938"/>
-      </p:ext>
-    </p:extLst>
-  </p:cSld>
-  <p:clrMapOvr>
-    <a:masterClrMapping/>
-  </p:clrMapOvr>
-  <mc:AlternateContent xmlns:mc="http://schemas.openxmlformats.org/markup-compatibility/2006" xmlns:p159="http://schemas.microsoft.com/office/powerpoint/2015/09/main">
-    <mc:Choice Requires="p159">
-      <p:transition xmlns:p14="http://schemas.microsoft.com/office/powerpoint/2010/main" spd="slow" p14:dur="2000">
-        <p159:morph option="byObject"/>
-      </p:transition>
-    </mc:Choice>
-    <mc:Fallback xmlns="">
-      <p:transition spd="slow">
-        <p:fade/>
-      </p:transition>
-    </mc:Fallback>
-  </mc:AlternateContent>
-  <p:timing>
-    <p:tnLst>
-      <p:par>
-        <p:cTn id="1" dur="indefinite" restart="never" nodeType="tmRoot">
-          <p:childTnLst>
-            <p:seq concurrent="1" nextAc="seek">
-              <p:cTn id="2" dur="indefinite" nodeType="mainSeq">
-                <p:childTnLst>
-                  <p:par>
-                    <p:cTn id="3" fill="hold">
-                      <p:stCondLst>
-                        <p:cond delay="indefinite"/>
-                      </p:stCondLst>
-                      <p:childTnLst>
-                        <p:par>
-                          <p:cTn id="4" fill="hold">
-                            <p:stCondLst>
-                              <p:cond delay="0"/>
-                            </p:stCondLst>
-                            <p:childTnLst>
-                              <p:par>
-                                <p:cTn id="5" presetID="2" presetClass="entr" presetSubtype="4" fill="hold" nodeType="clickEffect">
-                                  <p:stCondLst>
-                                    <p:cond delay="0"/>
-                                  </p:stCondLst>
-                                  <p:childTnLst>
-                                    <p:set>
-                                      <p:cBhvr>
-                                        <p:cTn id="6" dur="1" fill="hold">
-                                          <p:stCondLst>
-                                            <p:cond delay="0"/>
-                                          </p:stCondLst>
-                                        </p:cTn>
-                                        <p:tgtEl>
-                                          <p:spTgt spid="4"/>
-                                        </p:tgtEl>
-                                        <p:attrNameLst>
-                                          <p:attrName>style.visibility</p:attrName>
-                                        </p:attrNameLst>
-                                      </p:cBhvr>
-                                      <p:to>
-                                        <p:strVal val="visible"/>
-                                      </p:to>
-                                    </p:set>
-                                    <p:anim calcmode="lin" valueType="num">
-                                      <p:cBhvr additive="base">
-                                        <p:cTn id="7" dur="500" fill="hold"/>
-                                        <p:tgtEl>
-                                          <p:spTgt spid="4"/>
-                                        </p:tgtEl>
-                                        <p:attrNameLst>
-                                          <p:attrName>ppt_x</p:attrName>
-                                        </p:attrNameLst>
-                                      </p:cBhvr>
-                                      <p:tavLst>
-                                        <p:tav tm="0">
-                                          <p:val>
-                                            <p:strVal val="#ppt_x"/>
-                                          </p:val>
-                                        </p:tav>
-                                        <p:tav tm="100000">
-                                          <p:val>
-                                            <p:strVal val="#ppt_x"/>
-                                          </p:val>
-                                        </p:tav>
-                                      </p:tavLst>
-                                    </p:anim>
-                                    <p:anim calcmode="lin" valueType="num">
-                                      <p:cBhvr additive="base">
-                                        <p:cTn id="8" dur="500" fill="hold"/>
-                                        <p:tgtEl>
-                                          <p:spTgt spid="4"/>
-                                        </p:tgtEl>
-                                        <p:attrNameLst>
-                                          <p:attrName>ppt_y</p:attrName>
-                                        </p:attrNameLst>
-                                      </p:cBhvr>
-                                      <p:tavLst>
-                                        <p:tav tm="0">
-                                          <p:val>
-                                            <p:strVal val="1+#ppt_h/2"/>
-                                          </p:val>
-                                        </p:tav>
-                                        <p:tav tm="100000">
-                                          <p:val>
-                                            <p:strVal val="#ppt_y"/>
-                                          </p:val>
-                                        </p:tav>
-                                      </p:tavLst>
-                                    </p:anim>
-                                  </p:childTnLst>
-                                </p:cTn>
-                              </p:par>
-                            </p:childTnLst>
-                          </p:cTn>
-                        </p:par>
-                      </p:childTnLst>
-                    </p:cTn>
-                  </p:par>
-                </p:childTnLst>
-              </p:cTn>
-              <p:prevCondLst>
-                <p:cond evt="onPrev" delay="0">
-                  <p:tgtEl>
-                    <p:sldTgt/>
-                  </p:tgtEl>
-                </p:cond>
-              </p:prevCondLst>
-              <p:nextCondLst>
-                <p:cond evt="onNext" delay="0">
-                  <p:tgtEl>
-                    <p:sldTgt/>
-                  </p:tgtEl>
-                </p:cond>
-              </p:nextCondLst>
-            </p:seq>
-          </p:childTnLst>
-        </p:cTn>
-      </p:par>
-    </p:tnLst>
-  </p:timing>
-</p:sld>
-</file>
-
-<file path=ppt/slides/slide5.xml><?xml version="1.0" encoding="utf-8"?>
+<file path=ppt/slides/slide4.xml><?xml version="1.0" encoding="utf-8"?>
 <p:sld xmlns:a="http://schemas.openxmlformats.org/drawingml/2006/main" xmlns:r="http://schemas.openxmlformats.org/officeDocument/2006/relationships" xmlns:p="http://schemas.openxmlformats.org/presentationml/2006/main">
   <p:cSld>
     <p:spTree>
@@ -38091,7 +37016,249 @@
 </p:sld>
 </file>
 
-<file path=ppt/slides/slide6.xml><?xml version="1.0" encoding="utf-8"?>
+<file path=ppt/slides/slide40.xml><?xml version="1.0" encoding="utf-8"?>
+<p:sld xmlns:a="http://schemas.openxmlformats.org/drawingml/2006/main" xmlns:r="http://schemas.openxmlformats.org/officeDocument/2006/relationships" xmlns:p="http://schemas.openxmlformats.org/presentationml/2006/main">
+  <p:cSld>
+    <p:spTree>
+      <p:nvGrpSpPr>
+        <p:cNvPr id="1" name=""/>
+        <p:cNvGrpSpPr/>
+        <p:nvPr/>
+      </p:nvGrpSpPr>
+      <p:grpSpPr>
+        <a:xfrm>
+          <a:off x="0" y="0"/>
+          <a:ext cx="0" cy="0"/>
+          <a:chOff x="0" y="0"/>
+          <a:chExt cx="0" cy="0"/>
+        </a:xfrm>
+      </p:grpSpPr>
+      <p:pic>
+        <p:nvPicPr>
+          <p:cNvPr id="4" name="Picture 2" descr="Supportive snake | Kirishima eijirou, Story inspiration, Arcanum">
+            <a:extLst>
+              <a:ext uri="{FF2B5EF4-FFF2-40B4-BE49-F238E27FC236}">
+                <a16:creationId xmlns:a16="http://schemas.microsoft.com/office/drawing/2014/main" id="{DEFA6CC8-5179-41F4-05C3-012076C6A1A7}"/>
+              </a:ext>
+            </a:extLst>
+          </p:cNvPr>
+          <p:cNvPicPr>
+            <a:picLocks noChangeAspect="1" noChangeArrowheads="1"/>
+          </p:cNvPicPr>
+          <p:nvPr/>
+        </p:nvPicPr>
+        <p:blipFill rotWithShape="1">
+          <a:blip r:embed="rId3">
+            <a:extLst>
+              <a:ext uri="{28A0092B-C50C-407E-A947-70E740481C1C}">
+                <a14:useLocalDpi xmlns:a14="http://schemas.microsoft.com/office/drawing/2010/main" val="0"/>
+              </a:ext>
+            </a:extLst>
+          </a:blip>
+          <a:srcRect t="23333" b="18334"/>
+          <a:stretch/>
+        </p:blipFill>
+        <p:spPr bwMode="auto">
+          <a:xfrm>
+            <a:off x="2543969" y="2052328"/>
+            <a:ext cx="7104062" cy="2753343"/>
+          </a:xfrm>
+          <a:prstGeom prst="rect">
+            <a:avLst/>
+          </a:prstGeom>
+          <a:noFill/>
+          <a:extLst>
+            <a:ext uri="{909E8E84-426E-40DD-AFC4-6F175D3DCCD1}">
+              <a14:hiddenFill xmlns:a14="http://schemas.microsoft.com/office/drawing/2010/main">
+                <a:solidFill>
+                  <a:srgbClr val="FFFFFF"/>
+                </a:solidFill>
+              </a14:hiddenFill>
+            </a:ext>
+          </a:extLst>
+        </p:spPr>
+      </p:pic>
+      <p:sp>
+        <p:nvSpPr>
+          <p:cNvPr id="2" name="Title 1">
+            <a:extLst>
+              <a:ext uri="{FF2B5EF4-FFF2-40B4-BE49-F238E27FC236}">
+                <a16:creationId xmlns:a16="http://schemas.microsoft.com/office/drawing/2014/main" id="{4DD820D6-5715-AFD0-11FC-17CC585EBE2B}"/>
+              </a:ext>
+            </a:extLst>
+          </p:cNvPr>
+          <p:cNvSpPr>
+            <a:spLocks noGrp="1"/>
+          </p:cNvSpPr>
+          <p:nvPr>
+            <p:ph type="title"/>
+          </p:nvPr>
+        </p:nvSpPr>
+        <p:spPr>
+          <a:xfrm>
+            <a:off x="0" y="340963"/>
+            <a:ext cx="12192000" cy="1325563"/>
+          </a:xfrm>
+        </p:spPr>
+        <p:txBody>
+          <a:bodyPr/>
+          <a:lstStyle/>
+          <a:p>
+            <a:pPr algn="ctr"/>
+            <a:r>
+              <a:rPr lang="en-US" b="1" dirty="0"/>
+              <a:t>Final Thoughts</a:t>
+            </a:r>
+          </a:p>
+        </p:txBody>
+      </p:sp>
+    </p:spTree>
+    <p:extLst>
+      <p:ext uri="{BB962C8B-B14F-4D97-AF65-F5344CB8AC3E}">
+        <p14:creationId xmlns:p14="http://schemas.microsoft.com/office/powerpoint/2010/main" val="3570851938"/>
+      </p:ext>
+    </p:extLst>
+  </p:cSld>
+  <p:clrMapOvr>
+    <a:masterClrMapping/>
+  </p:clrMapOvr>
+  <mc:AlternateContent xmlns:mc="http://schemas.openxmlformats.org/markup-compatibility/2006" xmlns:p159="http://schemas.microsoft.com/office/powerpoint/2015/09/main">
+    <mc:Choice Requires="p159">
+      <p:transition xmlns:p14="http://schemas.microsoft.com/office/powerpoint/2010/main" spd="slow" p14:dur="2000">
+        <p159:morph option="byObject"/>
+      </p:transition>
+    </mc:Choice>
+    <mc:Fallback xmlns="">
+      <p:transition spd="slow">
+        <p:fade/>
+      </p:transition>
+    </mc:Fallback>
+  </mc:AlternateContent>
+  <p:timing>
+    <p:tnLst>
+      <p:par>
+        <p:cTn id="1" dur="indefinite" restart="never" nodeType="tmRoot">
+          <p:childTnLst>
+            <p:seq concurrent="1" nextAc="seek">
+              <p:cTn id="2" dur="indefinite" nodeType="mainSeq">
+                <p:childTnLst>
+                  <p:par>
+                    <p:cTn id="3" fill="hold">
+                      <p:stCondLst>
+                        <p:cond delay="indefinite"/>
+                      </p:stCondLst>
+                      <p:childTnLst>
+                        <p:par>
+                          <p:cTn id="4" fill="hold">
+                            <p:stCondLst>
+                              <p:cond delay="0"/>
+                            </p:stCondLst>
+                            <p:childTnLst>
+                              <p:par>
+                                <p:cTn id="5" presetID="2" presetClass="entr" presetSubtype="4" fill="hold" nodeType="clickEffect">
+                                  <p:stCondLst>
+                                    <p:cond delay="0"/>
+                                  </p:stCondLst>
+                                  <p:childTnLst>
+                                    <p:set>
+                                      <p:cBhvr>
+                                        <p:cTn id="6" dur="1" fill="hold">
+                                          <p:stCondLst>
+                                            <p:cond delay="0"/>
+                                          </p:stCondLst>
+                                        </p:cTn>
+                                        <p:tgtEl>
+                                          <p:spTgt spid="4"/>
+                                        </p:tgtEl>
+                                        <p:attrNameLst>
+                                          <p:attrName>style.visibility</p:attrName>
+                                        </p:attrNameLst>
+                                      </p:cBhvr>
+                                      <p:to>
+                                        <p:strVal val="visible"/>
+                                      </p:to>
+                                    </p:set>
+                                    <p:anim calcmode="lin" valueType="num">
+                                      <p:cBhvr additive="base">
+                                        <p:cTn id="7" dur="500" fill="hold"/>
+                                        <p:tgtEl>
+                                          <p:spTgt spid="4"/>
+                                        </p:tgtEl>
+                                        <p:attrNameLst>
+                                          <p:attrName>ppt_x</p:attrName>
+                                        </p:attrNameLst>
+                                      </p:cBhvr>
+                                      <p:tavLst>
+                                        <p:tav tm="0">
+                                          <p:val>
+                                            <p:strVal val="#ppt_x"/>
+                                          </p:val>
+                                        </p:tav>
+                                        <p:tav tm="100000">
+                                          <p:val>
+                                            <p:strVal val="#ppt_x"/>
+                                          </p:val>
+                                        </p:tav>
+                                      </p:tavLst>
+                                    </p:anim>
+                                    <p:anim calcmode="lin" valueType="num">
+                                      <p:cBhvr additive="base">
+                                        <p:cTn id="8" dur="500" fill="hold"/>
+                                        <p:tgtEl>
+                                          <p:spTgt spid="4"/>
+                                        </p:tgtEl>
+                                        <p:attrNameLst>
+                                          <p:attrName>ppt_y</p:attrName>
+                                        </p:attrNameLst>
+                                      </p:cBhvr>
+                                      <p:tavLst>
+                                        <p:tav tm="0">
+                                          <p:val>
+                                            <p:strVal val="1+#ppt_h/2"/>
+                                          </p:val>
+                                        </p:tav>
+                                        <p:tav tm="100000">
+                                          <p:val>
+                                            <p:strVal val="#ppt_y"/>
+                                          </p:val>
+                                        </p:tav>
+                                      </p:tavLst>
+                                    </p:anim>
+                                  </p:childTnLst>
+                                </p:cTn>
+                              </p:par>
+                            </p:childTnLst>
+                          </p:cTn>
+                        </p:par>
+                      </p:childTnLst>
+                    </p:cTn>
+                  </p:par>
+                </p:childTnLst>
+              </p:cTn>
+              <p:prevCondLst>
+                <p:cond evt="onPrev" delay="0">
+                  <p:tgtEl>
+                    <p:sldTgt/>
+                  </p:tgtEl>
+                </p:cond>
+              </p:prevCondLst>
+              <p:nextCondLst>
+                <p:cond evt="onNext" delay="0">
+                  <p:tgtEl>
+                    <p:sldTgt/>
+                  </p:tgtEl>
+                </p:cond>
+              </p:nextCondLst>
+            </p:seq>
+          </p:childTnLst>
+        </p:cTn>
+      </p:par>
+    </p:tnLst>
+  </p:timing>
+</p:sld>
+</file>
+
+<file path=ppt/slides/slide5.xml><?xml version="1.0" encoding="utf-8"?>
 <p:sld xmlns:a="http://schemas.openxmlformats.org/drawingml/2006/main" xmlns:r="http://schemas.openxmlformats.org/officeDocument/2006/relationships" xmlns:p="http://schemas.openxmlformats.org/presentationml/2006/main">
   <p:cSld>
     <p:spTree>
@@ -39107,7 +38274,7 @@
 </p:sld>
 </file>
 
-<file path=ppt/slides/slide7.xml><?xml version="1.0" encoding="utf-8"?>
+<file path=ppt/slides/slide6.xml><?xml version="1.0" encoding="utf-8"?>
 <p:sld xmlns:a="http://schemas.openxmlformats.org/drawingml/2006/main" xmlns:r="http://schemas.openxmlformats.org/officeDocument/2006/relationships" xmlns:p="http://schemas.openxmlformats.org/presentationml/2006/main">
   <p:cSld>
     <p:spTree>
@@ -42584,7 +41751,7 @@
 </p:sld>
 </file>
 
-<file path=ppt/slides/slide8.xml><?xml version="1.0" encoding="utf-8"?>
+<file path=ppt/slides/slide7.xml><?xml version="1.0" encoding="utf-8"?>
 <p:sld xmlns:a="http://schemas.openxmlformats.org/drawingml/2006/main" xmlns:r="http://schemas.openxmlformats.org/officeDocument/2006/relationships" xmlns:p="http://schemas.openxmlformats.org/presentationml/2006/main">
   <p:cSld>
     <p:spTree>
@@ -43045,7 +42212,7 @@
 </p:sld>
 </file>
 
-<file path=ppt/slides/slide9.xml><?xml version="1.0" encoding="utf-8"?>
+<file path=ppt/slides/slide8.xml><?xml version="1.0" encoding="utf-8"?>
 <p:sld xmlns:a="http://schemas.openxmlformats.org/drawingml/2006/main" xmlns:r="http://schemas.openxmlformats.org/officeDocument/2006/relationships" xmlns:p="http://schemas.openxmlformats.org/presentationml/2006/main">
   <p:cSld>
     <p:spTree>
@@ -44007,6 +43174,384 @@
     </p:tnLst>
     <p:bldLst>
       <p:bldP spid="3" grpId="0" animBg="1"/>
+    </p:bldLst>
+  </p:timing>
+</p:sld>
+</file>
+
+<file path=ppt/slides/slide9.xml><?xml version="1.0" encoding="utf-8"?>
+<p:sld xmlns:a="http://schemas.openxmlformats.org/drawingml/2006/main" xmlns:r="http://schemas.openxmlformats.org/officeDocument/2006/relationships" xmlns:p="http://schemas.openxmlformats.org/presentationml/2006/main">
+  <p:cSld>
+    <p:spTree>
+      <p:nvGrpSpPr>
+        <p:cNvPr id="1" name=""/>
+        <p:cNvGrpSpPr/>
+        <p:nvPr/>
+      </p:nvGrpSpPr>
+      <p:grpSpPr>
+        <a:xfrm>
+          <a:off x="0" y="0"/>
+          <a:ext cx="0" cy="0"/>
+          <a:chOff x="0" y="0"/>
+          <a:chExt cx="0" cy="0"/>
+        </a:xfrm>
+      </p:grpSpPr>
+      <p:sp>
+        <p:nvSpPr>
+          <p:cNvPr id="5" name="TextBox 4">
+            <a:extLst>
+              <a:ext uri="{FF2B5EF4-FFF2-40B4-BE49-F238E27FC236}">
+                <a16:creationId xmlns:a16="http://schemas.microsoft.com/office/drawing/2014/main" id="{95ED940D-4F78-01CF-752B-E9085274FFC7}"/>
+              </a:ext>
+            </a:extLst>
+          </p:cNvPr>
+          <p:cNvSpPr txBox="1"/>
+          <p:nvPr/>
+        </p:nvSpPr>
+        <p:spPr>
+          <a:xfrm>
+            <a:off x="1308100" y="1562383"/>
+            <a:ext cx="9575800" cy="4708981"/>
+          </a:xfrm>
+          <a:prstGeom prst="rect">
+            <a:avLst/>
+          </a:prstGeom>
+          <a:noFill/>
+        </p:spPr>
+        <p:txBody>
+          <a:bodyPr wrap="square">
+            <a:spAutoFit/>
+          </a:bodyPr>
+          <a:lstStyle/>
+          <a:p>
+            <a:r>
+              <a:rPr lang="en-US" sz="2000" dirty="0">
+                <a:latin typeface="Consolas" panose="020B0609020204030204" pitchFamily="49" charset="0"/>
+              </a:rPr>
+              <a:t>                             ___-------___</a:t>
+            </a:r>
+          </a:p>
+          <a:p>
+            <a:r>
+              <a:rPr lang="en-US" sz="2000" dirty="0">
+                <a:latin typeface="Consolas" panose="020B0609020204030204" pitchFamily="49" charset="0"/>
+              </a:rPr>
+              <a:t>                         _-~~             ~~-_</a:t>
+            </a:r>
+          </a:p>
+          <a:p>
+            <a:r>
+              <a:rPr lang="en-US" sz="2000" dirty="0">
+                <a:latin typeface="Consolas" panose="020B0609020204030204" pitchFamily="49" charset="0"/>
+              </a:rPr>
+              <a:t>                      _-~                    /~-_</a:t>
+            </a:r>
+          </a:p>
+          <a:p>
+            <a:r>
+              <a:rPr lang="en-US" sz="2000" dirty="0">
+                <a:latin typeface="Consolas" panose="020B0609020204030204" pitchFamily="49" charset="0"/>
+              </a:rPr>
+              <a:t>   /^\__/^\         /~  \                   /    \</a:t>
+            </a:r>
+          </a:p>
+          <a:p>
+            <a:r>
+              <a:rPr lang="en-US" sz="2000" dirty="0">
+                <a:latin typeface="Consolas" panose="020B0609020204030204" pitchFamily="49" charset="0"/>
+              </a:rPr>
+              <a:t> /|  O|| O|        /      \_______________/        \</a:t>
+            </a:r>
+          </a:p>
+          <a:p>
+            <a:r>
+              <a:rPr lang="en-US" sz="2000" dirty="0">
+                <a:latin typeface="Consolas" panose="020B0609020204030204" pitchFamily="49" charset="0"/>
+              </a:rPr>
+              <a:t>| |___||__|      /       /                \          \</a:t>
+            </a:r>
+          </a:p>
+          <a:p>
+            <a:r>
+              <a:rPr lang="en-US" sz="2000" dirty="0">
+                <a:latin typeface="Consolas" panose="020B0609020204030204" pitchFamily="49" charset="0"/>
+              </a:rPr>
+              <a:t>|          \    /      /                    \          \</a:t>
+            </a:r>
+          </a:p>
+          <a:p>
+            <a:r>
+              <a:rPr lang="en-US" sz="2000" dirty="0">
+                <a:latin typeface="Consolas" panose="020B0609020204030204" pitchFamily="49" charset="0"/>
+              </a:rPr>
+              <a:t>|   (_______) /______/          </a:t>
+            </a:r>
+            <a:r>
+              <a:rPr lang="en-US" sz="2000" b="1" dirty="0">
+                <a:solidFill>
+                  <a:schemeClr val="tx2"/>
+                </a:solidFill>
+                <a:latin typeface="Consolas" panose="020B0609020204030204" pitchFamily="49" charset="0"/>
+              </a:rPr>
+              <a:t>TURTLE</a:t>
+            </a:r>
+            <a:r>
+              <a:rPr lang="en-US" sz="2000" dirty="0">
+                <a:latin typeface="Consolas" panose="020B0609020204030204" pitchFamily="49" charset="0"/>
+              </a:rPr>
+              <a:t>       \_________ \</a:t>
+            </a:r>
+          </a:p>
+          <a:p>
+            <a:r>
+              <a:rPr lang="en-US" sz="2000" dirty="0">
+                <a:latin typeface="Consolas" panose="020B0609020204030204" pitchFamily="49" charset="0"/>
+              </a:rPr>
+              <a:t>|         / /         \      </a:t>
+            </a:r>
+            <a:r>
+              <a:rPr lang="en-US" sz="2000" b="1" dirty="0">
+                <a:solidFill>
+                  <a:schemeClr val="tx2"/>
+                </a:solidFill>
+                <a:latin typeface="Consolas" panose="020B0609020204030204" pitchFamily="49" charset="0"/>
+              </a:rPr>
+              <a:t>GRAPHICS</a:t>
+            </a:r>
+            <a:r>
+              <a:rPr lang="en-US" sz="2000" dirty="0">
+                <a:latin typeface="Consolas" panose="020B0609020204030204" pitchFamily="49" charset="0"/>
+              </a:rPr>
+              <a:t>       /            \</a:t>
+            </a:r>
+          </a:p>
+          <a:p>
+            <a:r>
+              <a:rPr lang="en-US" sz="2000" dirty="0">
+                <a:latin typeface="Consolas" panose="020B0609020204030204" pitchFamily="49" charset="0"/>
+              </a:rPr>
+              <a:t> \         \^\\         \                  /               \     /</a:t>
+            </a:r>
+          </a:p>
+          <a:p>
+            <a:r>
+              <a:rPr lang="en-US" sz="2000" dirty="0">
+                <a:latin typeface="Consolas" panose="020B0609020204030204" pitchFamily="49" charset="0"/>
+              </a:rPr>
+              <a:t>   \         ||           \______________/      _-_       //\__//</a:t>
+            </a:r>
+          </a:p>
+          <a:p>
+            <a:r>
+              <a:rPr lang="en-US" sz="2000" dirty="0">
+                <a:latin typeface="Consolas" panose="020B0609020204030204" pitchFamily="49" charset="0"/>
+              </a:rPr>
+              <a:t>     \       ||------_-~~-_ ------------- \ --/~   ~\    || __/</a:t>
+            </a:r>
+          </a:p>
+          <a:p>
+            <a:r>
+              <a:rPr lang="en-US" sz="2000" dirty="0">
+                <a:latin typeface="Consolas" panose="020B0609020204030204" pitchFamily="49" charset="0"/>
+              </a:rPr>
+              <a:t>       ~-----||====/~     |==================|       |/~~~~~</a:t>
+            </a:r>
+          </a:p>
+          <a:p>
+            <a:r>
+              <a:rPr lang="en-US" sz="2000" dirty="0">
+                <a:latin typeface="Consolas" panose="020B0609020204030204" pitchFamily="49" charset="0"/>
+              </a:rPr>
+              <a:t>        (_(__/  ./     /                    \_\      \.</a:t>
+            </a:r>
+          </a:p>
+          <a:p>
+            <a:r>
+              <a:rPr lang="en-US" sz="2000" dirty="0">
+                <a:latin typeface="Consolas" panose="020B0609020204030204" pitchFamily="49" charset="0"/>
+              </a:rPr>
+              <a:t>               (_(___/                         \_____)_)</a:t>
+            </a:r>
+          </a:p>
+        </p:txBody>
+      </p:sp>
+      <p:sp>
+        <p:nvSpPr>
+          <p:cNvPr id="10" name="TextBox 9">
+            <a:extLst>
+              <a:ext uri="{FF2B5EF4-FFF2-40B4-BE49-F238E27FC236}">
+                <a16:creationId xmlns:a16="http://schemas.microsoft.com/office/drawing/2014/main" id="{B086B709-30F6-C14C-9937-9FD4EB15E81A}"/>
+              </a:ext>
+            </a:extLst>
+          </p:cNvPr>
+          <p:cNvSpPr txBox="1"/>
+          <p:nvPr/>
+        </p:nvSpPr>
+        <p:spPr>
+          <a:xfrm>
+            <a:off x="-90312" y="-203980"/>
+            <a:ext cx="888385" cy="707886"/>
+          </a:xfrm>
+          <a:prstGeom prst="rect">
+            <a:avLst/>
+          </a:prstGeom>
+          <a:noFill/>
+        </p:spPr>
+        <p:txBody>
+          <a:bodyPr wrap="none" rtlCol="0">
+            <a:spAutoFit/>
+          </a:bodyPr>
+          <a:lstStyle/>
+          <a:p>
+            <a:r>
+              <a:rPr lang="en-US" sz="4000" dirty="0"/>
+              <a:t>🐢</a:t>
+            </a:r>
+          </a:p>
+        </p:txBody>
+      </p:sp>
+    </p:spTree>
+    <p:extLst>
+      <p:ext uri="{BB962C8B-B14F-4D97-AF65-F5344CB8AC3E}">
+        <p14:creationId xmlns:p14="http://schemas.microsoft.com/office/powerpoint/2010/main" val="2585959955"/>
+      </p:ext>
+    </p:extLst>
+  </p:cSld>
+  <p:clrMapOvr>
+    <a:masterClrMapping/>
+  </p:clrMapOvr>
+  <mc:AlternateContent xmlns:mc="http://schemas.openxmlformats.org/markup-compatibility/2006" xmlns:p159="http://schemas.microsoft.com/office/powerpoint/2015/09/main">
+    <mc:Choice Requires="p159">
+      <p:transition xmlns:p14="http://schemas.microsoft.com/office/powerpoint/2010/main" spd="slow" p14:dur="2000">
+        <p159:morph option="byObject"/>
+      </p:transition>
+    </mc:Choice>
+    <mc:Fallback xmlns="">
+      <p:transition spd="slow">
+        <p:fade/>
+      </p:transition>
+    </mc:Fallback>
+  </mc:AlternateContent>
+  <p:timing>
+    <p:tnLst>
+      <p:par>
+        <p:cTn id="1" dur="indefinite" restart="never" nodeType="tmRoot">
+          <p:childTnLst>
+            <p:seq concurrent="1" nextAc="seek">
+              <p:cTn id="2" dur="indefinite" nodeType="mainSeq">
+                <p:childTnLst>
+                  <p:par>
+                    <p:cTn id="3" fill="hold">
+                      <p:stCondLst>
+                        <p:cond delay="indefinite"/>
+                      </p:stCondLst>
+                      <p:childTnLst>
+                        <p:par>
+                          <p:cTn id="4" fill="hold">
+                            <p:stCondLst>
+                              <p:cond delay="0"/>
+                            </p:stCondLst>
+                            <p:childTnLst>
+                              <p:par>
+                                <p:cTn id="5" presetID="10" presetClass="entr" presetSubtype="0" fill="hold" grpId="0" nodeType="clickEffect">
+                                  <p:stCondLst>
+                                    <p:cond delay="0"/>
+                                  </p:stCondLst>
+                                  <p:childTnLst>
+                                    <p:set>
+                                      <p:cBhvr>
+                                        <p:cTn id="6" dur="1" fill="hold">
+                                          <p:stCondLst>
+                                            <p:cond delay="0"/>
+                                          </p:stCondLst>
+                                        </p:cTn>
+                                        <p:tgtEl>
+                                          <p:spTgt spid="5"/>
+                                        </p:tgtEl>
+                                        <p:attrNameLst>
+                                          <p:attrName>style.visibility</p:attrName>
+                                        </p:attrNameLst>
+                                      </p:cBhvr>
+                                      <p:to>
+                                        <p:strVal val="visible"/>
+                                      </p:to>
+                                    </p:set>
+                                    <p:animEffect transition="in" filter="fade">
+                                      <p:cBhvr>
+                                        <p:cTn id="7" dur="500"/>
+                                        <p:tgtEl>
+                                          <p:spTgt spid="5"/>
+                                        </p:tgtEl>
+                                      </p:cBhvr>
+                                    </p:animEffect>
+                                  </p:childTnLst>
+                                </p:cTn>
+                              </p:par>
+                              <p:par>
+                                <p:cTn id="8" presetID="10" presetClass="entr" presetSubtype="0" fill="hold" grpId="0" nodeType="withEffect">
+                                  <p:stCondLst>
+                                    <p:cond delay="0"/>
+                                  </p:stCondLst>
+                                  <p:childTnLst>
+                                    <p:set>
+                                      <p:cBhvr>
+                                        <p:cTn id="9" dur="1" fill="hold">
+                                          <p:stCondLst>
+                                            <p:cond delay="0"/>
+                                          </p:stCondLst>
+                                        </p:cTn>
+                                        <p:tgtEl>
+                                          <p:spTgt spid="10"/>
+                                        </p:tgtEl>
+                                        <p:attrNameLst>
+                                          <p:attrName>style.visibility</p:attrName>
+                                        </p:attrNameLst>
+                                      </p:cBhvr>
+                                      <p:to>
+                                        <p:strVal val="visible"/>
+                                      </p:to>
+                                    </p:set>
+                                    <p:animEffect transition="in" filter="fade">
+                                      <p:cBhvr>
+                                        <p:cTn id="10" dur="500"/>
+                                        <p:tgtEl>
+                                          <p:spTgt spid="10"/>
+                                        </p:tgtEl>
+                                      </p:cBhvr>
+                                    </p:animEffect>
+                                  </p:childTnLst>
+                                </p:cTn>
+                              </p:par>
+                            </p:childTnLst>
+                          </p:cTn>
+                        </p:par>
+                      </p:childTnLst>
+                    </p:cTn>
+                  </p:par>
+                </p:childTnLst>
+              </p:cTn>
+              <p:prevCondLst>
+                <p:cond evt="onPrev" delay="0">
+                  <p:tgtEl>
+                    <p:sldTgt/>
+                  </p:tgtEl>
+                </p:cond>
+              </p:prevCondLst>
+              <p:nextCondLst>
+                <p:cond evt="onNext" delay="0">
+                  <p:tgtEl>
+                    <p:sldTgt/>
+                  </p:tgtEl>
+                </p:cond>
+              </p:nextCondLst>
+            </p:seq>
+          </p:childTnLst>
+        </p:cTn>
+      </p:par>
+    </p:tnLst>
+    <p:bldLst>
+      <p:bldP spid="5" grpId="0"/>
+      <p:bldP spid="10" grpId="0"/>
     </p:bldLst>
   </p:timing>
 </p:sld>
